--- a/Prezentare_Mana_Robotica.pptx
+++ b/Prezentare_Mana_Robotica.pptx
@@ -1730,6 +1730,13 @@
           </a:solidFill>
           <a:ln/>
         </p:spPr>
+        <p:txBody>
+          <a:bodyPr/>
+          <a:lstStyle/>
+          <a:p>
+            <a:endParaRPr lang="en-US"/>
+          </a:p>
+        </p:txBody>
       </p:sp>
       <p:sp>
         <p:nvSpPr>
@@ -1750,6 +1757,13 @@
           </a:solidFill>
           <a:ln/>
         </p:spPr>
+        <p:txBody>
+          <a:bodyPr/>
+          <a:lstStyle/>
+          <a:p>
+            <a:endParaRPr lang="en-US"/>
+          </a:p>
+        </p:txBody>
       </p:sp>
       <p:sp>
         <p:nvSpPr>
@@ -1784,6 +1798,13 @@
             </a:outerShdw>
           </a:effectLst>
         </p:spPr>
+        <p:txBody>
+          <a:bodyPr/>
+          <a:lstStyle/>
+          <a:p>
+            <a:endParaRPr lang="en-US"/>
+          </a:p>
+        </p:txBody>
       </p:sp>
       <p:pic>
         <p:nvPicPr>
@@ -1842,7 +1863,18 @@
                 <a:ea typeface="Calibri" pitchFamily="34" charset="-122"/>
                 <a:cs typeface="Calibri" pitchFamily="34" charset="-120"/>
               </a:rPr>
-              <a:t>Prototip: mana + antebrat printate 3D, 6× servo MG90S</a:t>
+              <a:t>Prototip: mana + antebrat printate 3D, 6× </a:t>
+            </a:r>
+            <a:r>
+              <a:rPr lang="en-US" sz="950" i="1" dirty="0" err="1">
+                <a:solidFill>
+                  <a:srgbClr val="8FB7C2"/>
+                </a:solidFill>
+                <a:latin typeface="Calibri" pitchFamily="34" charset="0"/>
+                <a:ea typeface="Calibri" pitchFamily="34" charset="-122"/>
+                <a:cs typeface="Calibri" pitchFamily="34" charset="-120"/>
+              </a:rPr>
+              <a:t>servomotoare</a:t>
             </a:r>
             <a:endParaRPr lang="en-US" sz="950" dirty="0"/>
           </a:p>
@@ -2010,6 +2042,13 @@
             <a:prstDash val="solid"/>
           </a:ln>
         </p:spPr>
+        <p:txBody>
+          <a:bodyPr/>
+          <a:lstStyle/>
+          <a:p>
+            <a:endParaRPr lang="en-US"/>
+          </a:p>
+        </p:txBody>
       </p:sp>
       <p:sp>
         <p:nvSpPr>
@@ -2109,7 +2148,7 @@
                 <a:ea typeface="Calibri" pitchFamily="34" charset="-122"/>
                 <a:cs typeface="Calibri" pitchFamily="34" charset="-120"/>
               </a:rPr>
-              <a:t>Lucrare de licenta  ·  Informatica  ·  2025–2026</a:t>
+              <a:t>Lucrare de licenta  ·  Informatica  ·  2026</a:t>
             </a:r>
             <a:endParaRPr lang="en-US" sz="1350" dirty="0"/>
           </a:p>
@@ -2167,6 +2206,13 @@
           </a:solidFill>
           <a:ln/>
         </p:spPr>
+        <p:txBody>
+          <a:bodyPr/>
+          <a:lstStyle/>
+          <a:p>
+            <a:endParaRPr lang="en-US"/>
+          </a:p>
+        </p:txBody>
       </p:sp>
       <p:sp>
         <p:nvSpPr>
@@ -2325,7 +2371,29 @@
                 <a:ea typeface="Calibri" pitchFamily="34" charset="-122"/>
                 <a:cs typeface="Calibri" pitchFamily="34" charset="-120"/>
               </a:rPr>
-              <a:t>Sistem integrat HW–SW fezabil, robust si scalabil.</a:t>
+              <a:t>Sistem integrat HW</a:t>
+            </a:r>
+            <a:r>
+              <a:rPr lang="en-US" sz="1500">
+                <a:solidFill>
+                  <a:srgbClr val="BFE9E4"/>
+                </a:solidFill>
+                <a:latin typeface="Calibri" pitchFamily="34" charset="0"/>
+                <a:ea typeface="Calibri" pitchFamily="34" charset="-122"/>
+                <a:cs typeface="Calibri" pitchFamily="34" charset="-120"/>
+              </a:rPr>
+              <a:t>–SW </a:t>
+            </a:r>
+            <a:r>
+              <a:rPr lang="en-US" sz="1500" dirty="0">
+                <a:solidFill>
+                  <a:srgbClr val="BFE9E4"/>
+                </a:solidFill>
+                <a:latin typeface="Calibri" pitchFamily="34" charset="0"/>
+                <a:ea typeface="Calibri" pitchFamily="34" charset="-122"/>
+                <a:cs typeface="Calibri" pitchFamily="34" charset="-120"/>
+              </a:rPr>
+              <a:t>robust si scalabil.</a:t>
             </a:r>
             <a:endParaRPr lang="en-US" sz="1500" dirty="0"/>
           </a:p>
@@ -2431,6 +2499,13 @@
             </a:outerShdw>
           </a:effectLst>
         </p:spPr>
+        <p:txBody>
+          <a:bodyPr/>
+          <a:lstStyle/>
+          <a:p>
+            <a:endParaRPr lang="en-US"/>
+          </a:p>
+        </p:txBody>
       </p:sp>
       <p:sp>
         <p:nvSpPr>
@@ -2451,6 +2526,13 @@
           </a:solidFill>
           <a:ln/>
         </p:spPr>
+        <p:txBody>
+          <a:bodyPr/>
+          <a:lstStyle/>
+          <a:p>
+            <a:endParaRPr lang="en-US"/>
+          </a:p>
+        </p:txBody>
       </p:sp>
       <p:sp>
         <p:nvSpPr>
@@ -2571,6 +2653,17 @@
               <a:buChar char="•"/>
             </a:pPr>
             <a:r>
+              <a:rPr lang="en-US" sz="1400" dirty="0" err="1">
+                <a:solidFill>
+                  <a:srgbClr val="BFE9E4"/>
+                </a:solidFill>
+                <a:latin typeface="Calibri" pitchFamily="34" charset="0"/>
+                <a:ea typeface="Calibri" pitchFamily="34" charset="-122"/>
+                <a:cs typeface="Calibri" pitchFamily="34" charset="-120"/>
+              </a:rPr>
+              <a:t>Executarea</a:t>
+            </a:r>
+            <a:r>
               <a:rPr lang="en-US" sz="1400" dirty="0">
                 <a:solidFill>
                   <a:srgbClr val="BFE9E4"/>
@@ -2579,7 +2672,73 @@
                 <a:ea typeface="Calibri" pitchFamily="34" charset="-122"/>
                 <a:cs typeface="Calibri" pitchFamily="34" charset="-120"/>
               </a:rPr>
-              <a:t>Control prin semnale mioelectrice (EMG) de la utilizator.</a:t>
+              <a:t> </a:t>
+            </a:r>
+            <a:r>
+              <a:rPr lang="en-US" sz="1400" dirty="0" err="1">
+                <a:solidFill>
+                  <a:srgbClr val="BFE9E4"/>
+                </a:solidFill>
+                <a:latin typeface="Calibri" pitchFamily="34" charset="0"/>
+                <a:ea typeface="Calibri" pitchFamily="34" charset="-122"/>
+                <a:cs typeface="Calibri" pitchFamily="34" charset="-120"/>
+              </a:rPr>
+              <a:t>servo_task</a:t>
+            </a:r>
+            <a:r>
+              <a:rPr lang="en-US" sz="1400" dirty="0">
+                <a:solidFill>
+                  <a:srgbClr val="BFE9E4"/>
+                </a:solidFill>
+                <a:latin typeface="Calibri" pitchFamily="34" charset="0"/>
+                <a:ea typeface="Calibri" pitchFamily="34" charset="-122"/>
+                <a:cs typeface="Calibri" pitchFamily="34" charset="-120"/>
+              </a:rPr>
+              <a:t>() </a:t>
+            </a:r>
+            <a:r>
+              <a:rPr lang="en-US" sz="1400" dirty="0" err="1">
+                <a:solidFill>
+                  <a:srgbClr val="BFE9E4"/>
+                </a:solidFill>
+                <a:latin typeface="Calibri" pitchFamily="34" charset="0"/>
+                <a:ea typeface="Calibri" pitchFamily="34" charset="-122"/>
+                <a:cs typeface="Calibri" pitchFamily="34" charset="-120"/>
+              </a:rPr>
+              <a:t>prin</a:t>
+            </a:r>
+            <a:r>
+              <a:rPr lang="en-US" sz="1400" dirty="0">
+                <a:solidFill>
+                  <a:srgbClr val="BFE9E4"/>
+                </a:solidFill>
+                <a:latin typeface="Calibri" pitchFamily="34" charset="0"/>
+                <a:ea typeface="Calibri" pitchFamily="34" charset="-122"/>
+                <a:cs typeface="Calibri" pitchFamily="34" charset="-120"/>
+              </a:rPr>
+              <a:t> ISR nu </a:t>
+            </a:r>
+            <a:r>
+              <a:rPr lang="en-US" sz="1400" dirty="0" err="1">
+                <a:solidFill>
+                  <a:srgbClr val="BFE9E4"/>
+                </a:solidFill>
+                <a:latin typeface="Calibri" pitchFamily="34" charset="0"/>
+                <a:ea typeface="Calibri" pitchFamily="34" charset="-122"/>
+                <a:cs typeface="Calibri" pitchFamily="34" charset="-120"/>
+              </a:rPr>
+              <a:t>prin</a:t>
+            </a:r>
+            <a:r>
+              <a:rPr lang="en-US" sz="1400" dirty="0">
+                <a:solidFill>
+                  <a:srgbClr val="BFE9E4"/>
+                </a:solidFill>
+                <a:latin typeface="Calibri" pitchFamily="34" charset="0"/>
+                <a:ea typeface="Calibri" pitchFamily="34" charset="-122"/>
+                <a:cs typeface="Calibri" pitchFamily="34" charset="-120"/>
+              </a:rPr>
+              <a:t> polling.</a:t>
             </a:r>
             <a:endParaRPr lang="en-US" sz="1400" dirty="0"/>
           </a:p>
@@ -2787,6 +2946,13 @@
             </a:outerShdw>
           </a:effectLst>
         </p:spPr>
+        <p:txBody>
+          <a:bodyPr/>
+          <a:lstStyle/>
+          <a:p>
+            <a:endParaRPr lang="en-US"/>
+          </a:p>
+        </p:txBody>
       </p:sp>
       <p:sp>
         <p:nvSpPr>
@@ -2927,6 +3093,13 @@
           </a:solidFill>
           <a:ln/>
         </p:spPr>
+        <p:txBody>
+          <a:bodyPr/>
+          <a:lstStyle/>
+          <a:p>
+            <a:endParaRPr lang="en-US"/>
+          </a:p>
+        </p:txBody>
       </p:sp>
       <p:sp>
         <p:nvSpPr>
@@ -3067,6 +3240,13 @@
           </a:solidFill>
           <a:ln/>
         </p:spPr>
+        <p:txBody>
+          <a:bodyPr/>
+          <a:lstStyle/>
+          <a:p>
+            <a:endParaRPr lang="en-US"/>
+          </a:p>
+        </p:txBody>
       </p:sp>
       <p:sp>
         <p:nvSpPr>
@@ -3207,6 +3387,13 @@
           </a:solidFill>
           <a:ln/>
         </p:spPr>
+        <p:txBody>
+          <a:bodyPr/>
+          <a:lstStyle/>
+          <a:p>
+            <a:endParaRPr lang="en-US"/>
+          </a:p>
+        </p:txBody>
       </p:sp>
       <p:sp>
         <p:nvSpPr>
@@ -3545,6 +3732,13 @@
             </a:outerShdw>
           </a:effectLst>
         </p:spPr>
+        <p:txBody>
+          <a:bodyPr/>
+          <a:lstStyle/>
+          <a:p>
+            <a:endParaRPr lang="en-US"/>
+          </a:p>
+        </p:txBody>
       </p:sp>
       <p:sp>
         <p:nvSpPr>
@@ -3691,6 +3885,13 @@
             </a:outerShdw>
           </a:effectLst>
         </p:spPr>
+        <p:txBody>
+          <a:bodyPr/>
+          <a:lstStyle/>
+          <a:p>
+            <a:endParaRPr lang="en-US"/>
+          </a:p>
+        </p:txBody>
       </p:sp>
       <p:sp>
         <p:nvSpPr>
@@ -3837,6 +4038,13 @@
             </a:outerShdw>
           </a:effectLst>
         </p:spPr>
+        <p:txBody>
+          <a:bodyPr/>
+          <a:lstStyle/>
+          <a:p>
+            <a:endParaRPr lang="en-US"/>
+          </a:p>
+        </p:txBody>
       </p:sp>
       <p:sp>
         <p:nvSpPr>
@@ -3983,6 +4191,13 @@
             </a:outerShdw>
           </a:effectLst>
         </p:spPr>
+        <p:txBody>
+          <a:bodyPr/>
+          <a:lstStyle/>
+          <a:p>
+            <a:endParaRPr lang="en-US"/>
+          </a:p>
+        </p:txBody>
       </p:sp>
       <p:sp>
         <p:nvSpPr>
@@ -4129,6 +4344,13 @@
             </a:outerShdw>
           </a:effectLst>
         </p:spPr>
+        <p:txBody>
+          <a:bodyPr/>
+          <a:lstStyle/>
+          <a:p>
+            <a:endParaRPr lang="en-US"/>
+          </a:p>
+        </p:txBody>
       </p:sp>
       <p:sp>
         <p:nvSpPr>
@@ -4275,6 +4497,13 @@
             </a:outerShdw>
           </a:effectLst>
         </p:spPr>
+        <p:txBody>
+          <a:bodyPr/>
+          <a:lstStyle/>
+          <a:p>
+            <a:endParaRPr lang="en-US"/>
+          </a:p>
+        </p:txBody>
       </p:sp>
       <p:sp>
         <p:nvSpPr>
@@ -4382,6 +4611,13 @@
             </a:outerShdw>
           </a:effectLst>
         </p:spPr>
+        <p:txBody>
+          <a:bodyPr/>
+          <a:lstStyle/>
+          <a:p>
+            <a:endParaRPr lang="en-US"/>
+          </a:p>
+        </p:txBody>
       </p:sp>
       <p:sp>
         <p:nvSpPr>
@@ -4402,6 +4638,13 @@
           </a:solidFill>
           <a:ln/>
         </p:spPr>
+        <p:txBody>
+          <a:bodyPr/>
+          <a:lstStyle/>
+          <a:p>
+            <a:endParaRPr lang="en-US"/>
+          </a:p>
+        </p:txBody>
       </p:sp>
       <p:sp>
         <p:nvSpPr>
@@ -4512,6 +4755,13 @@
             </a:outerShdw>
           </a:effectLst>
         </p:spPr>
+        <p:txBody>
+          <a:bodyPr/>
+          <a:lstStyle/>
+          <a:p>
+            <a:endParaRPr lang="en-US"/>
+          </a:p>
+        </p:txBody>
       </p:sp>
       <p:sp>
         <p:nvSpPr>
@@ -4532,6 +4782,13 @@
           </a:solidFill>
           <a:ln/>
         </p:spPr>
+        <p:txBody>
+          <a:bodyPr/>
+          <a:lstStyle/>
+          <a:p>
+            <a:endParaRPr lang="en-US"/>
+          </a:p>
+        </p:txBody>
       </p:sp>
       <p:sp>
         <p:nvSpPr>
@@ -4642,6 +4899,13 @@
             </a:outerShdw>
           </a:effectLst>
         </p:spPr>
+        <p:txBody>
+          <a:bodyPr/>
+          <a:lstStyle/>
+          <a:p>
+            <a:endParaRPr lang="en-US"/>
+          </a:p>
+        </p:txBody>
       </p:sp>
       <p:sp>
         <p:nvSpPr>
@@ -4662,6 +4926,13 @@
           </a:solidFill>
           <a:ln/>
         </p:spPr>
+        <p:txBody>
+          <a:bodyPr/>
+          <a:lstStyle/>
+          <a:p>
+            <a:endParaRPr lang="en-US"/>
+          </a:p>
+        </p:txBody>
       </p:sp>
       <p:sp>
         <p:nvSpPr>
@@ -4959,6 +5230,13 @@
             </a:outerShdw>
           </a:effectLst>
         </p:spPr>
+        <p:txBody>
+          <a:bodyPr/>
+          <a:lstStyle/>
+          <a:p>
+            <a:endParaRPr lang="en-US"/>
+          </a:p>
+        </p:txBody>
       </p:sp>
       <p:sp>
         <p:nvSpPr>
@@ -5027,6 +5305,13 @@
             </a:outerShdw>
           </a:effectLst>
         </p:spPr>
+        <p:txBody>
+          <a:bodyPr/>
+          <a:lstStyle/>
+          <a:p>
+            <a:endParaRPr lang="en-US"/>
+          </a:p>
+        </p:txBody>
       </p:sp>
       <p:pic>
         <p:nvPicPr>
@@ -5110,6 +5395,13 @@
           </a:solidFill>
           <a:ln/>
         </p:spPr>
+        <p:txBody>
+          <a:bodyPr/>
+          <a:lstStyle/>
+          <a:p>
+            <a:endParaRPr lang="en-US"/>
+          </a:p>
+        </p:txBody>
       </p:sp>
       <p:sp>
         <p:nvSpPr>
@@ -5211,6 +5503,13 @@
           </a:solidFill>
           <a:ln/>
         </p:spPr>
+        <p:txBody>
+          <a:bodyPr/>
+          <a:lstStyle/>
+          <a:p>
+            <a:endParaRPr lang="en-US"/>
+          </a:p>
+        </p:txBody>
       </p:sp>
       <p:sp>
         <p:nvSpPr>
@@ -5334,6 +5633,13 @@
           </a:solidFill>
           <a:ln/>
         </p:spPr>
+        <p:txBody>
+          <a:bodyPr/>
+          <a:lstStyle/>
+          <a:p>
+            <a:endParaRPr lang="en-US"/>
+          </a:p>
+        </p:txBody>
       </p:sp>
       <p:sp>
         <p:nvSpPr>
@@ -5435,6 +5741,13 @@
           </a:solidFill>
           <a:ln/>
         </p:spPr>
+        <p:txBody>
+          <a:bodyPr/>
+          <a:lstStyle/>
+          <a:p>
+            <a:endParaRPr lang="en-US"/>
+          </a:p>
+        </p:txBody>
       </p:sp>
       <p:sp>
         <p:nvSpPr>
@@ -5732,6 +6045,13 @@
             </a:outerShdw>
           </a:effectLst>
         </p:spPr>
+        <p:txBody>
+          <a:bodyPr/>
+          <a:lstStyle/>
+          <a:p>
+            <a:endParaRPr lang="en-US"/>
+          </a:p>
+        </p:txBody>
       </p:sp>
       <p:sp>
         <p:nvSpPr>
@@ -5800,6 +6120,13 @@
             </a:outerShdw>
           </a:effectLst>
         </p:spPr>
+        <p:txBody>
+          <a:bodyPr/>
+          <a:lstStyle/>
+          <a:p>
+            <a:endParaRPr lang="en-US"/>
+          </a:p>
+        </p:txBody>
       </p:sp>
       <p:sp>
         <p:nvSpPr>
@@ -5991,7 +6318,7 @@
                 <a:ea typeface="Calibri" pitchFamily="34" charset="-122"/>
                 <a:cs typeface="Calibri" pitchFamily="34" charset="-120"/>
               </a:rPr>
-              <a:t>Ajustari repetate de pinout (19 → 17)</a:t>
+              <a:t>Ajustari repetate de pinout (22 → 17)</a:t>
             </a:r>
             <a:endParaRPr lang="en-US" sz="1300" dirty="0"/>
           </a:p>
@@ -6023,6 +6350,13 @@
             </a:outerShdw>
           </a:effectLst>
         </p:spPr>
+        <p:txBody>
+          <a:bodyPr/>
+          <a:lstStyle/>
+          <a:p>
+            <a:endParaRPr lang="en-US"/>
+          </a:p>
+        </p:txBody>
       </p:sp>
       <p:sp>
         <p:nvSpPr>
@@ -6091,6 +6425,13 @@
             </a:outerShdw>
           </a:effectLst>
         </p:spPr>
+        <p:txBody>
+          <a:bodyPr/>
+          <a:lstStyle/>
+          <a:p>
+            <a:endParaRPr lang="en-US"/>
+          </a:p>
+        </p:txBody>
       </p:sp>
       <p:sp>
         <p:nvSpPr>
@@ -6210,7 +6551,161 @@
                 <a:ea typeface="Calibri" pitchFamily="34" charset="-122"/>
                 <a:cs typeface="Calibri" pitchFamily="34" charset="-120"/>
               </a:rPr>
-              <a:t>16 canale PWM pe doar 2 fire (SDA 21 / SCL 22)</a:t>
+              <a:t>16 canale PWM pe doar 2 fire (SDA 21 = </a:t>
+            </a:r>
+            <a:r>
+              <a:rPr lang="en-US" sz="1350" dirty="0" err="1">
+                <a:solidFill>
+                  <a:srgbClr val="BFE9E4"/>
+                </a:solidFill>
+                <a:latin typeface="Calibri" pitchFamily="34" charset="0"/>
+                <a:ea typeface="Calibri" pitchFamily="34" charset="-122"/>
+                <a:cs typeface="Calibri" pitchFamily="34" charset="-120"/>
+              </a:rPr>
+              <a:t>linia</a:t>
+            </a:r>
+            <a:r>
+              <a:rPr lang="en-US" sz="1350" dirty="0">
+                <a:solidFill>
+                  <a:srgbClr val="BFE9E4"/>
+                </a:solidFill>
+                <a:latin typeface="Calibri" pitchFamily="34" charset="0"/>
+                <a:ea typeface="Calibri" pitchFamily="34" charset="-122"/>
+                <a:cs typeface="Calibri" pitchFamily="34" charset="-120"/>
+              </a:rPr>
+              <a:t> de date / SCL 22 = </a:t>
+            </a:r>
+            <a:r>
+              <a:rPr lang="en-US" sz="1350" dirty="0" err="1">
+                <a:solidFill>
+                  <a:srgbClr val="BFE9E4"/>
+                </a:solidFill>
+                <a:latin typeface="Calibri" pitchFamily="34" charset="0"/>
+                <a:ea typeface="Calibri" pitchFamily="34" charset="-122"/>
+                <a:cs typeface="Calibri" pitchFamily="34" charset="-120"/>
+              </a:rPr>
+              <a:t>linia</a:t>
+            </a:r>
+            <a:r>
+              <a:rPr lang="en-US" sz="1350" dirty="0">
+                <a:solidFill>
+                  <a:srgbClr val="BFE9E4"/>
+                </a:solidFill>
+                <a:latin typeface="Calibri" pitchFamily="34" charset="0"/>
+                <a:ea typeface="Calibri" pitchFamily="34" charset="-122"/>
+                <a:cs typeface="Calibri" pitchFamily="34" charset="-120"/>
+              </a:rPr>
+              <a:t> de </a:t>
+            </a:r>
+            <a:r>
+              <a:rPr lang="en-US" sz="1350" dirty="0" err="1">
+                <a:solidFill>
+                  <a:srgbClr val="BFE9E4"/>
+                </a:solidFill>
+                <a:latin typeface="Calibri" pitchFamily="34" charset="0"/>
+                <a:ea typeface="Calibri" pitchFamily="34" charset="-122"/>
+                <a:cs typeface="Calibri" pitchFamily="34" charset="-120"/>
+              </a:rPr>
+              <a:t>ceas</a:t>
+            </a:r>
+            <a:r>
+              <a:rPr lang="en-US" sz="1350" dirty="0">
+                <a:solidFill>
+                  <a:srgbClr val="BFE9E4"/>
+                </a:solidFill>
+                <a:latin typeface="Calibri" pitchFamily="34" charset="0"/>
+                <a:ea typeface="Calibri" pitchFamily="34" charset="-122"/>
+                <a:cs typeface="Calibri" pitchFamily="34" charset="-120"/>
+              </a:rPr>
+              <a:t> – </a:t>
+            </a:r>
+            <a:r>
+              <a:rPr lang="en-US" sz="1350" dirty="0" err="1">
+                <a:solidFill>
+                  <a:srgbClr val="BFE9E4"/>
+                </a:solidFill>
+                <a:latin typeface="Calibri" pitchFamily="34" charset="0"/>
+                <a:ea typeface="Calibri" pitchFamily="34" charset="-122"/>
+                <a:cs typeface="Calibri" pitchFamily="34" charset="-120"/>
+              </a:rPr>
+              <a:t>protocolul</a:t>
+            </a:r>
+            <a:r>
+              <a:rPr lang="en-US" sz="1350" dirty="0">
+                <a:solidFill>
+                  <a:srgbClr val="BFE9E4"/>
+                </a:solidFill>
+                <a:latin typeface="Calibri" pitchFamily="34" charset="0"/>
+                <a:ea typeface="Calibri" pitchFamily="34" charset="-122"/>
+                <a:cs typeface="Calibri" pitchFamily="34" charset="-120"/>
+              </a:rPr>
+              <a:t> </a:t>
+            </a:r>
+            <a:r>
+              <a:rPr lang="en-US" sz="1350" dirty="0" err="1">
+                <a:solidFill>
+                  <a:srgbClr val="BFE9E4"/>
+                </a:solidFill>
+                <a:latin typeface="Calibri" pitchFamily="34" charset="0"/>
+                <a:ea typeface="Calibri" pitchFamily="34" charset="-122"/>
+                <a:cs typeface="Calibri" pitchFamily="34" charset="-120"/>
+              </a:rPr>
+              <a:t>prin</a:t>
+            </a:r>
+            <a:r>
+              <a:rPr lang="en-US" sz="1350" dirty="0">
+                <a:solidFill>
+                  <a:srgbClr val="BFE9E4"/>
+                </a:solidFill>
+                <a:latin typeface="Calibri" pitchFamily="34" charset="0"/>
+                <a:ea typeface="Calibri" pitchFamily="34" charset="-122"/>
+                <a:cs typeface="Calibri" pitchFamily="34" charset="-120"/>
+              </a:rPr>
+              <a:t> care ESP32 “</a:t>
+            </a:r>
+            <a:r>
+              <a:rPr lang="en-US" sz="1350" dirty="0" err="1">
+                <a:solidFill>
+                  <a:srgbClr val="BFE9E4"/>
+                </a:solidFill>
+                <a:latin typeface="Calibri" pitchFamily="34" charset="0"/>
+                <a:ea typeface="Calibri" pitchFamily="34" charset="-122"/>
+                <a:cs typeface="Calibri" pitchFamily="34" charset="-120"/>
+              </a:rPr>
+              <a:t>vorbeste</a:t>
+            </a:r>
+            <a:r>
+              <a:rPr lang="en-US" sz="1350" dirty="0">
+                <a:solidFill>
+                  <a:srgbClr val="BFE9E4"/>
+                </a:solidFill>
+                <a:latin typeface="Calibri" pitchFamily="34" charset="0"/>
+                <a:ea typeface="Calibri" pitchFamily="34" charset="-122"/>
+                <a:cs typeface="Calibri" pitchFamily="34" charset="-120"/>
+              </a:rPr>
+              <a:t>” cu </a:t>
+            </a:r>
+            <a:r>
+              <a:rPr lang="en-US" sz="1350" dirty="0" err="1">
+                <a:solidFill>
+                  <a:srgbClr val="BFE9E4"/>
+                </a:solidFill>
+                <a:latin typeface="Calibri" pitchFamily="34" charset="0"/>
+                <a:ea typeface="Calibri" pitchFamily="34" charset="-122"/>
+                <a:cs typeface="Calibri" pitchFamily="34" charset="-120"/>
+              </a:rPr>
+              <a:t>driverul</a:t>
+            </a:r>
+            <a:r>
+              <a:rPr lang="en-US" sz="1350" dirty="0">
+                <a:solidFill>
+                  <a:srgbClr val="BFE9E4"/>
+                </a:solidFill>
+                <a:latin typeface="Calibri" pitchFamily="34" charset="0"/>
+                <a:ea typeface="Calibri" pitchFamily="34" charset="-122"/>
+                <a:cs typeface="Calibri" pitchFamily="34" charset="-120"/>
+              </a:rPr>
+              <a:t> PCA9685)</a:t>
             </a:r>
             <a:endParaRPr lang="en-US" sz="1350" dirty="0"/>
           </a:p>
@@ -6316,6 +6811,13 @@
             </a:outerShdw>
           </a:effectLst>
         </p:spPr>
+        <p:txBody>
+          <a:bodyPr/>
+          <a:lstStyle/>
+          <a:p>
+            <a:endParaRPr lang="en-US"/>
+          </a:p>
+        </p:txBody>
       </p:sp>
       <p:sp>
         <p:nvSpPr>
@@ -6336,6 +6838,13 @@
           </a:solidFill>
           <a:ln/>
         </p:spPr>
+        <p:txBody>
+          <a:bodyPr/>
+          <a:lstStyle/>
+          <a:p>
+            <a:endParaRPr lang="en-US"/>
+          </a:p>
+        </p:txBody>
       </p:sp>
       <p:sp>
         <p:nvSpPr>
@@ -6605,6 +7114,13 @@
             </a:outerShdw>
           </a:effectLst>
         </p:spPr>
+        <p:txBody>
+          <a:bodyPr/>
+          <a:lstStyle/>
+          <a:p>
+            <a:endParaRPr lang="en-US"/>
+          </a:p>
+        </p:txBody>
       </p:sp>
       <p:sp>
         <p:nvSpPr>
@@ -6673,6 +7189,13 @@
             </a:outerShdw>
           </a:effectLst>
         </p:spPr>
+        <p:txBody>
+          <a:bodyPr/>
+          <a:lstStyle/>
+          <a:p>
+            <a:endParaRPr lang="en-US"/>
+          </a:p>
+        </p:txBody>
       </p:sp>
       <p:sp>
         <p:nvSpPr>
@@ -6693,6 +7216,13 @@
           </a:solidFill>
           <a:ln/>
         </p:spPr>
+        <p:txBody>
+          <a:bodyPr/>
+          <a:lstStyle/>
+          <a:p>
+            <a:endParaRPr lang="en-US"/>
+          </a:p>
+        </p:txBody>
       </p:sp>
       <p:sp>
         <p:nvSpPr>
@@ -6894,6 +7424,13 @@
             </a:outerShdw>
           </a:effectLst>
         </p:spPr>
+        <p:txBody>
+          <a:bodyPr/>
+          <a:lstStyle/>
+          <a:p>
+            <a:endParaRPr lang="en-US"/>
+          </a:p>
+        </p:txBody>
       </p:sp>
       <p:sp>
         <p:nvSpPr>
@@ -7066,6 +7603,13 @@
             </a:outerShdw>
           </a:effectLst>
         </p:spPr>
+        <p:txBody>
+          <a:bodyPr/>
+          <a:lstStyle/>
+          <a:p>
+            <a:endParaRPr lang="en-US"/>
+          </a:p>
+        </p:txBody>
       </p:sp>
       <p:sp>
         <p:nvSpPr>
@@ -7086,6 +7630,13 @@
           </a:solidFill>
           <a:ln/>
         </p:spPr>
+        <p:txBody>
+          <a:bodyPr/>
+          <a:lstStyle/>
+          <a:p>
+            <a:endParaRPr lang="en-US"/>
+          </a:p>
+        </p:txBody>
       </p:sp>
       <p:sp>
         <p:nvSpPr>
@@ -7524,6 +8075,13 @@
             </a:outerShdw>
           </a:effectLst>
         </p:spPr>
+        <p:txBody>
+          <a:bodyPr/>
+          <a:lstStyle/>
+          <a:p>
+            <a:endParaRPr lang="en-US"/>
+          </a:p>
+        </p:txBody>
       </p:sp>
       <p:sp>
         <p:nvSpPr>
@@ -7592,6 +8150,13 @@
             </a:outerShdw>
           </a:effectLst>
         </p:spPr>
+        <p:txBody>
+          <a:bodyPr/>
+          <a:lstStyle/>
+          <a:p>
+            <a:endParaRPr lang="en-US"/>
+          </a:p>
+        </p:txBody>
       </p:sp>
       <p:sp>
         <p:nvSpPr>
@@ -7791,6 +8356,13 @@
             </a:outerShdw>
           </a:effectLst>
         </p:spPr>
+        <p:txBody>
+          <a:bodyPr/>
+          <a:lstStyle/>
+          <a:p>
+            <a:endParaRPr lang="en-US"/>
+          </a:p>
+        </p:txBody>
       </p:sp>
       <p:sp>
         <p:nvSpPr>
@@ -7859,6 +8431,13 @@
             </a:outerShdw>
           </a:effectLst>
         </p:spPr>
+        <p:txBody>
+          <a:bodyPr/>
+          <a:lstStyle/>
+          <a:p>
+            <a:endParaRPr lang="en-US"/>
+          </a:p>
+        </p:txBody>
       </p:sp>
       <p:sp>
         <p:nvSpPr>
@@ -8084,6 +8663,13 @@
             </a:outerShdw>
           </a:effectLst>
         </p:spPr>
+        <p:txBody>
+          <a:bodyPr/>
+          <a:lstStyle/>
+          <a:p>
+            <a:endParaRPr lang="en-US"/>
+          </a:p>
+        </p:txBody>
       </p:sp>
       <p:sp>
         <p:nvSpPr>
@@ -8350,6 +8936,13 @@
             </a:outerShdw>
           </a:effectLst>
         </p:spPr>
+        <p:txBody>
+          <a:bodyPr/>
+          <a:lstStyle/>
+          <a:p>
+            <a:endParaRPr lang="en-US"/>
+          </a:p>
+        </p:txBody>
       </p:sp>
       <p:sp>
         <p:nvSpPr>
@@ -8409,6 +9002,13 @@
           </a:solidFill>
           <a:ln/>
         </p:spPr>
+        <p:txBody>
+          <a:bodyPr/>
+          <a:lstStyle/>
+          <a:p>
+            <a:endParaRPr lang="en-US"/>
+          </a:p>
+        </p:txBody>
       </p:sp>
       <p:sp>
         <p:nvSpPr>
@@ -8510,6 +9110,13 @@
           </a:solidFill>
           <a:ln/>
         </p:spPr>
+        <p:txBody>
+          <a:bodyPr/>
+          <a:lstStyle/>
+          <a:p>
+            <a:endParaRPr lang="en-US"/>
+          </a:p>
+        </p:txBody>
       </p:sp>
       <p:sp>
         <p:nvSpPr>
@@ -8611,6 +9218,13 @@
           </a:solidFill>
           <a:ln/>
         </p:spPr>
+        <p:txBody>
+          <a:bodyPr/>
+          <a:lstStyle/>
+          <a:p>
+            <a:endParaRPr lang="en-US"/>
+          </a:p>
+        </p:txBody>
       </p:sp>
       <p:sp>
         <p:nvSpPr>
@@ -8712,6 +9326,13 @@
           </a:solidFill>
           <a:ln/>
         </p:spPr>
+        <p:txBody>
+          <a:bodyPr/>
+          <a:lstStyle/>
+          <a:p>
+            <a:endParaRPr lang="en-US"/>
+          </a:p>
+        </p:txBody>
       </p:sp>
       <p:sp>
         <p:nvSpPr>
@@ -8822,6 +9443,13 @@
             </a:outerShdw>
           </a:effectLst>
         </p:spPr>
+        <p:txBody>
+          <a:bodyPr/>
+          <a:lstStyle/>
+          <a:p>
+            <a:endParaRPr lang="en-US"/>
+          </a:p>
+        </p:txBody>
       </p:sp>
       <p:sp>
         <p:nvSpPr>
@@ -8842,6 +9470,13 @@
           </a:solidFill>
           <a:ln/>
         </p:spPr>
+        <p:txBody>
+          <a:bodyPr/>
+          <a:lstStyle/>
+          <a:p>
+            <a:endParaRPr lang="en-US"/>
+          </a:p>
+        </p:txBody>
       </p:sp>
       <p:sp>
         <p:nvSpPr>
@@ -8862,6 +9497,13 @@
           </a:solidFill>
           <a:ln/>
         </p:spPr>
+        <p:txBody>
+          <a:bodyPr/>
+          <a:lstStyle/>
+          <a:p>
+            <a:endParaRPr lang="en-US"/>
+          </a:p>
+        </p:txBody>
       </p:sp>
       <p:sp>
         <p:nvSpPr>
@@ -8882,6 +9524,13 @@
           </a:solidFill>
           <a:ln/>
         </p:spPr>
+        <p:txBody>
+          <a:bodyPr/>
+          <a:lstStyle/>
+          <a:p>
+            <a:endParaRPr lang="en-US"/>
+          </a:p>
+        </p:txBody>
       </p:sp>
       <p:sp>
         <p:nvSpPr>
@@ -8902,6 +9551,13 @@
           </a:solidFill>
           <a:ln/>
         </p:spPr>
+        <p:txBody>
+          <a:bodyPr/>
+          <a:lstStyle/>
+          <a:p>
+            <a:endParaRPr lang="en-US"/>
+          </a:p>
+        </p:txBody>
       </p:sp>
       <p:sp>
         <p:nvSpPr>
@@ -9353,6 +10009,13 @@
             </a:outerShdw>
           </a:effectLst>
         </p:spPr>
+        <p:txBody>
+          <a:bodyPr/>
+          <a:lstStyle/>
+          <a:p>
+            <a:endParaRPr lang="en-US"/>
+          </a:p>
+        </p:txBody>
       </p:sp>
       <p:sp>
         <p:nvSpPr>
@@ -9373,6 +10036,13 @@
           </a:solidFill>
           <a:ln/>
         </p:spPr>
+        <p:txBody>
+          <a:bodyPr/>
+          <a:lstStyle/>
+          <a:p>
+            <a:endParaRPr lang="en-US"/>
+          </a:p>
+        </p:txBody>
       </p:sp>
       <p:sp>
         <p:nvSpPr>
@@ -9503,6 +10173,13 @@
             </a:outerShdw>
           </a:effectLst>
         </p:spPr>
+        <p:txBody>
+          <a:bodyPr/>
+          <a:lstStyle/>
+          <a:p>
+            <a:endParaRPr lang="en-US"/>
+          </a:p>
+        </p:txBody>
       </p:sp>
       <p:sp>
         <p:nvSpPr>
@@ -9523,6 +10200,13 @@
           </a:solidFill>
           <a:ln/>
         </p:spPr>
+        <p:txBody>
+          <a:bodyPr/>
+          <a:lstStyle/>
+          <a:p>
+            <a:endParaRPr lang="en-US"/>
+          </a:p>
+        </p:txBody>
       </p:sp>
       <p:sp>
         <p:nvSpPr>
@@ -9653,6 +10337,13 @@
             </a:outerShdw>
           </a:effectLst>
         </p:spPr>
+        <p:txBody>
+          <a:bodyPr/>
+          <a:lstStyle/>
+          <a:p>
+            <a:endParaRPr lang="en-US"/>
+          </a:p>
+        </p:txBody>
       </p:sp>
       <p:sp>
         <p:nvSpPr>
@@ -9673,6 +10364,13 @@
           </a:solidFill>
           <a:ln/>
         </p:spPr>
+        <p:txBody>
+          <a:bodyPr/>
+          <a:lstStyle/>
+          <a:p>
+            <a:endParaRPr lang="en-US"/>
+          </a:p>
+        </p:txBody>
       </p:sp>
       <p:sp>
         <p:nvSpPr>
@@ -9803,6 +10501,13 @@
             </a:outerShdw>
           </a:effectLst>
         </p:spPr>
+        <p:txBody>
+          <a:bodyPr/>
+          <a:lstStyle/>
+          <a:p>
+            <a:endParaRPr lang="en-US"/>
+          </a:p>
+        </p:txBody>
       </p:sp>
       <p:sp>
         <p:nvSpPr>
@@ -9823,6 +10528,13 @@
           </a:solidFill>
           <a:ln/>
         </p:spPr>
+        <p:txBody>
+          <a:bodyPr/>
+          <a:lstStyle/>
+          <a:p>
+            <a:endParaRPr lang="en-US"/>
+          </a:p>
+        </p:txBody>
       </p:sp>
       <p:sp>
         <p:nvSpPr>
@@ -10008,6 +10720,13 @@
             </a:outerShdw>
           </a:effectLst>
         </p:spPr>
+        <p:txBody>
+          <a:bodyPr/>
+          <a:lstStyle/>
+          <a:p>
+            <a:endParaRPr lang="en-US"/>
+          </a:p>
+        </p:txBody>
       </p:sp>
       <p:sp>
         <p:nvSpPr>

--- a/Prezentare_Mana_Robotica.pptx
+++ b/Prezentare_Mana_Robotica.pptx
@@ -5,19 +5,21 @@
     <p:sldMasterId id="2147483648" r:id="rId1"/>
   </p:sldMasterIdLst>
   <p:notesMasterIdLst>
-    <p:notesMasterId r:id="rId12"/>
+    <p:notesMasterId r:id="rId14"/>
   </p:notesMasterIdLst>
   <p:sldIdLst>
     <p:sldId id="256" r:id="rId2"/>
     <p:sldId id="257" r:id="rId3"/>
-    <p:sldId id="258" r:id="rId4"/>
-    <p:sldId id="259" r:id="rId5"/>
-    <p:sldId id="260" r:id="rId6"/>
-    <p:sldId id="261" r:id="rId7"/>
-    <p:sldId id="262" r:id="rId8"/>
-    <p:sldId id="263" r:id="rId9"/>
-    <p:sldId id="264" r:id="rId10"/>
-    <p:sldId id="265" r:id="rId11"/>
+    <p:sldId id="268" r:id="rId4"/>
+    <p:sldId id="258" r:id="rId5"/>
+    <p:sldId id="259" r:id="rId6"/>
+    <p:sldId id="260" r:id="rId7"/>
+    <p:sldId id="261" r:id="rId8"/>
+    <p:sldId id="262" r:id="rId9"/>
+    <p:sldId id="263" r:id="rId10"/>
+    <p:sldId id="264" r:id="rId11"/>
+    <p:sldId id="265" r:id="rId12"/>
+    <p:sldId id="267" r:id="rId13"/>
   </p:sldIdLst>
   <p:sldSz cx="12192000" cy="6858000"/>
   <p:notesSz cx="6858000" cy="12192000"/>
@@ -702,6 +704,198 @@
 </p:notes>
 </file>
 
+<file path=ppt/notesSlides/notesSlide11.xml><?xml version="1.0" encoding="utf-8"?>
+<p:notes xmlns:a="http://schemas.openxmlformats.org/drawingml/2006/main" xmlns:r="http://schemas.openxmlformats.org/officeDocument/2006/relationships" xmlns:p="http://schemas.openxmlformats.org/presentationml/2006/main">
+  <p:cSld>
+    <p:spTree>
+      <p:nvGrpSpPr>
+        <p:cNvPr id="1" name=""/>
+        <p:cNvGrpSpPr/>
+        <p:nvPr/>
+      </p:nvGrpSpPr>
+      <p:grpSpPr>
+        <a:xfrm>
+          <a:off x="0" y="0"/>
+          <a:ext cx="0" cy="0"/>
+          <a:chOff x="0" y="0"/>
+          <a:chExt cx="0" cy="0"/>
+        </a:xfrm>
+      </p:grpSpPr>
+      <p:sp>
+        <p:nvSpPr>
+          <p:cNvPr id="2" name="Slide Image Placeholder 1"/>
+          <p:cNvSpPr>
+            <a:spLocks noGrp="1" noRot="1" noChangeAspect="1"/>
+          </p:cNvSpPr>
+          <p:nvPr>
+            <p:ph type="sldImg"/>
+          </p:nvPr>
+        </p:nvSpPr>
+        <p:spPr/>
+      </p:sp>
+      <p:sp>
+        <p:nvSpPr>
+          <p:cNvPr id="3" name="Notes Placeholder 2"/>
+          <p:cNvSpPr>
+            <a:spLocks noGrp="1"/>
+          </p:cNvSpPr>
+          <p:nvPr>
+            <p:ph type="body" idx="1"/>
+          </p:nvPr>
+        </p:nvSpPr>
+        <p:spPr/>
+        <p:txBody>
+          <a:bodyPr/>
+          <a:lstStyle/>
+          <a:p>
+            <a:endParaRPr lang="en-US" dirty="0"/>
+          </a:p>
+        </p:txBody>
+      </p:sp>
+      <p:sp>
+        <p:nvSpPr>
+          <p:cNvPr id="4" name="Slide Number Placeholder 3"/>
+          <p:cNvSpPr>
+            <a:spLocks noGrp="1"/>
+          </p:cNvSpPr>
+          <p:nvPr>
+            <p:ph type="sldNum" sz="quarter" idx="10"/>
+          </p:nvPr>
+        </p:nvSpPr>
+        <p:spPr/>
+        <p:txBody>
+          <a:bodyPr/>
+          <a:lstStyle/>
+          <a:p>
+            <a:fld id="{F7021451-1387-4CA6-816F-3879F97B5CBC}" type="slidenum">
+              <a:rPr lang="en-US"/>
+              <a:t>11</a:t>
+            </a:fld>
+            <a:endParaRPr lang="en-US"/>
+          </a:p>
+        </p:txBody>
+      </p:sp>
+    </p:spTree>
+    <p:extLst>
+      <p:ext uri="{BB962C8B-B14F-4D97-AF65-F5344CB8AC3E}">
+        <p14:creationId xmlns:p14="http://schemas.microsoft.com/office/powerpoint/2010/main" val="1024086991"/>
+      </p:ext>
+    </p:extLst>
+  </p:cSld>
+  <p:clrMapOvr>
+    <a:masterClrMapping/>
+  </p:clrMapOvr>
+</p:notes>
+</file>
+
+<file path=ppt/notesSlides/notesSlide12.xml><?xml version="1.0" encoding="utf-8"?>
+<p:notes xmlns:a="http://schemas.openxmlformats.org/drawingml/2006/main" xmlns:r="http://schemas.openxmlformats.org/officeDocument/2006/relationships" xmlns:p="http://schemas.openxmlformats.org/presentationml/2006/main">
+  <p:cSld>
+    <p:spTree>
+      <p:nvGrpSpPr>
+        <p:cNvPr id="1" name="">
+          <a:extLst>
+            <a:ext uri="{FF2B5EF4-FFF2-40B4-BE49-F238E27FC236}">
+              <a16:creationId xmlns:a16="http://schemas.microsoft.com/office/drawing/2014/main" id="{8A611F3B-FC60-DDA1-304D-41F165207B96}"/>
+            </a:ext>
+          </a:extLst>
+        </p:cNvPr>
+        <p:cNvGrpSpPr/>
+        <p:nvPr/>
+      </p:nvGrpSpPr>
+      <p:grpSpPr>
+        <a:xfrm>
+          <a:off x="0" y="0"/>
+          <a:ext cx="0" cy="0"/>
+          <a:chOff x="0" y="0"/>
+          <a:chExt cx="0" cy="0"/>
+        </a:xfrm>
+      </p:grpSpPr>
+      <p:sp>
+        <p:nvSpPr>
+          <p:cNvPr id="2" name="Slide Image Placeholder 1">
+            <a:extLst>
+              <a:ext uri="{FF2B5EF4-FFF2-40B4-BE49-F238E27FC236}">
+                <a16:creationId xmlns:a16="http://schemas.microsoft.com/office/drawing/2014/main" id="{230DB6CA-4AB6-FD0A-49EA-783C29C5E828}"/>
+              </a:ext>
+            </a:extLst>
+          </p:cNvPr>
+          <p:cNvSpPr>
+            <a:spLocks noGrp="1" noRot="1" noChangeAspect="1"/>
+          </p:cNvSpPr>
+          <p:nvPr>
+            <p:ph type="sldImg"/>
+          </p:nvPr>
+        </p:nvSpPr>
+        <p:spPr/>
+      </p:sp>
+      <p:sp>
+        <p:nvSpPr>
+          <p:cNvPr id="3" name="Notes Placeholder 2">
+            <a:extLst>
+              <a:ext uri="{FF2B5EF4-FFF2-40B4-BE49-F238E27FC236}">
+                <a16:creationId xmlns:a16="http://schemas.microsoft.com/office/drawing/2014/main" id="{0E95102C-B1A7-D154-D765-FECCE0CBFD5A}"/>
+              </a:ext>
+            </a:extLst>
+          </p:cNvPr>
+          <p:cNvSpPr>
+            <a:spLocks noGrp="1"/>
+          </p:cNvSpPr>
+          <p:nvPr>
+            <p:ph type="body" idx="1"/>
+          </p:nvPr>
+        </p:nvSpPr>
+        <p:spPr/>
+        <p:txBody>
+          <a:bodyPr/>
+          <a:lstStyle/>
+          <a:p>
+            <a:endParaRPr lang="en-US" dirty="0"/>
+          </a:p>
+        </p:txBody>
+      </p:sp>
+      <p:sp>
+        <p:nvSpPr>
+          <p:cNvPr id="4" name="Slide Number Placeholder 3">
+            <a:extLst>
+              <a:ext uri="{FF2B5EF4-FFF2-40B4-BE49-F238E27FC236}">
+                <a16:creationId xmlns:a16="http://schemas.microsoft.com/office/drawing/2014/main" id="{9111AC3E-2C1D-CF4B-DB21-0DF1873E24D2}"/>
+              </a:ext>
+            </a:extLst>
+          </p:cNvPr>
+          <p:cNvSpPr>
+            <a:spLocks noGrp="1"/>
+          </p:cNvSpPr>
+          <p:nvPr>
+            <p:ph type="sldNum" sz="quarter" idx="10"/>
+          </p:nvPr>
+        </p:nvSpPr>
+        <p:spPr/>
+        <p:txBody>
+          <a:bodyPr/>
+          <a:lstStyle/>
+          <a:p>
+            <a:fld id="{F7021451-1387-4CA6-816F-3879F97B5CBC}" type="slidenum">
+              <a:rPr lang="en-US"/>
+              <a:t>12</a:t>
+            </a:fld>
+            <a:endParaRPr lang="en-US"/>
+          </a:p>
+        </p:txBody>
+      </p:sp>
+    </p:spTree>
+    <p:extLst>
+      <p:ext uri="{BB962C8B-B14F-4D97-AF65-F5344CB8AC3E}">
+        <p14:creationId xmlns:p14="http://schemas.microsoft.com/office/powerpoint/2010/main" val="919427018"/>
+      </p:ext>
+    </p:extLst>
+  </p:cSld>
+  <p:clrMapOvr>
+    <a:masterClrMapping/>
+  </p:clrMapOvr>
+</p:notes>
+</file>
+
 <file path=ppt/notesSlides/notesSlide2.xml><?xml version="1.0" encoding="utf-8"?>
 <p:notes xmlns:a="http://schemas.openxmlformats.org/drawingml/2006/main" xmlns:r="http://schemas.openxmlformats.org/officeDocument/2006/relationships" xmlns:p="http://schemas.openxmlformats.org/presentationml/2006/main">
   <p:cSld>
@@ -791,7 +985,13 @@
   <p:cSld>
     <p:spTree>
       <p:nvGrpSpPr>
-        <p:cNvPr id="1" name=""/>
+        <p:cNvPr id="1" name="">
+          <a:extLst>
+            <a:ext uri="{FF2B5EF4-FFF2-40B4-BE49-F238E27FC236}">
+              <a16:creationId xmlns:a16="http://schemas.microsoft.com/office/drawing/2014/main" id="{D8947487-48BC-ADE1-D929-787C0FF25791}"/>
+            </a:ext>
+          </a:extLst>
+        </p:cNvPr>
         <p:cNvGrpSpPr/>
         <p:nvPr/>
       </p:nvGrpSpPr>
@@ -805,7 +1005,13 @@
       </p:grpSpPr>
       <p:sp>
         <p:nvSpPr>
-          <p:cNvPr id="2" name="Slide Image Placeholder 1"/>
+          <p:cNvPr id="2" name="Slide Image Placeholder 1">
+            <a:extLst>
+              <a:ext uri="{FF2B5EF4-FFF2-40B4-BE49-F238E27FC236}">
+                <a16:creationId xmlns:a16="http://schemas.microsoft.com/office/drawing/2014/main" id="{FCF25F2D-40E6-4EBE-A395-58713D82336C}"/>
+              </a:ext>
+            </a:extLst>
+          </p:cNvPr>
           <p:cNvSpPr>
             <a:spLocks noGrp="1" noRot="1" noChangeAspect="1"/>
           </p:cNvSpPr>
@@ -817,7 +1023,13 @@
       </p:sp>
       <p:sp>
         <p:nvSpPr>
-          <p:cNvPr id="3" name="Notes Placeholder 2"/>
+          <p:cNvPr id="3" name="Notes Placeholder 2">
+            <a:extLst>
+              <a:ext uri="{FF2B5EF4-FFF2-40B4-BE49-F238E27FC236}">
+                <a16:creationId xmlns:a16="http://schemas.microsoft.com/office/drawing/2014/main" id="{B27F5120-6AAB-D813-8791-5FCA4A0C7398}"/>
+              </a:ext>
+            </a:extLst>
+          </p:cNvPr>
           <p:cNvSpPr>
             <a:spLocks noGrp="1"/>
           </p:cNvSpPr>
@@ -836,7 +1048,13 @@
       </p:sp>
       <p:sp>
         <p:nvSpPr>
-          <p:cNvPr id="4" name="Slide Number Placeholder 3"/>
+          <p:cNvPr id="4" name="Slide Number Placeholder 3">
+            <a:extLst>
+              <a:ext uri="{FF2B5EF4-FFF2-40B4-BE49-F238E27FC236}">
+                <a16:creationId xmlns:a16="http://schemas.microsoft.com/office/drawing/2014/main" id="{65C5621F-7631-99D2-3CD8-6899E4448004}"/>
+              </a:ext>
+            </a:extLst>
+          </p:cNvPr>
           <p:cNvSpPr>
             <a:spLocks noGrp="1"/>
           </p:cNvSpPr>
@@ -860,7 +1078,7 @@
     </p:spTree>
     <p:extLst>
       <p:ext uri="{BB962C8B-B14F-4D97-AF65-F5344CB8AC3E}">
-        <p14:creationId xmlns:p14="http://schemas.microsoft.com/office/powerpoint/2010/main" val="1024086991"/>
+        <p14:creationId xmlns:p14="http://schemas.microsoft.com/office/powerpoint/2010/main" val="1638366537"/>
       </p:ext>
     </p:extLst>
   </p:cSld>
@@ -1882,45 +2100,6 @@
       </p:sp>
       <p:sp>
         <p:nvSpPr>
-          <p:cNvPr id="7" name="Text 4"/>
-          <p:cNvSpPr/>
-          <p:nvPr/>
-        </p:nvSpPr>
-        <p:spPr>
-          <a:xfrm>
-            <a:off x="777240" y="868680"/>
-            <a:ext cx="6035040" cy="320040"/>
-          </a:xfrm>
-          <a:prstGeom prst="rect">
-            <a:avLst/>
-          </a:prstGeom>
-          <a:noFill/>
-          <a:ln/>
-        </p:spPr>
-        <p:txBody>
-          <a:bodyPr wrap="square" lIns="0" tIns="0" rIns="0" bIns="0" rtlCol="0" anchor="ctr"/>
-          <a:lstStyle/>
-          <a:p>
-            <a:pPr marL="0" indent="0">
-              <a:buNone/>
-            </a:pPr>
-            <a:r>
-              <a:rPr lang="en-US" sz="1150" b="1" kern="0" spc="150" dirty="0">
-                <a:solidFill>
-                  <a:srgbClr val="BFE9E4"/>
-                </a:solidFill>
-                <a:latin typeface="Calibri" pitchFamily="34" charset="0"/>
-                <a:ea typeface="Calibri" pitchFamily="34" charset="-122"/>
-                <a:cs typeface="Calibri" pitchFamily="34" charset="-120"/>
-              </a:rPr>
-              <a:t>UNIVERSITATEA «LUCIAN BLAGA» DIN SIBIU  ·  FACULTATEA DE STIINTE</a:t>
-            </a:r>
-            <a:endParaRPr lang="en-US" sz="1150" dirty="0"/>
-          </a:p>
-        </p:txBody>
-      </p:sp>
-      <p:sp>
-        <p:nvSpPr>
           <p:cNvPr id="8" name="Text 5"/>
           <p:cNvSpPr/>
           <p:nvPr/>
@@ -2154,6 +2333,36 @@
           </a:p>
         </p:txBody>
       </p:sp>
+      <p:pic>
+        <p:nvPicPr>
+          <p:cNvPr id="15" name="Picture 14">
+            <a:extLst>
+              <a:ext uri="{FF2B5EF4-FFF2-40B4-BE49-F238E27FC236}">
+                <a16:creationId xmlns:a16="http://schemas.microsoft.com/office/drawing/2014/main" id="{1343C5EC-76F2-2653-D24D-78AF67C60CD1}"/>
+              </a:ext>
+            </a:extLst>
+          </p:cNvPr>
+          <p:cNvPicPr>
+            <a:picLocks noChangeAspect="1"/>
+          </p:cNvPicPr>
+          <p:nvPr/>
+        </p:nvPicPr>
+        <p:blipFill>
+          <a:blip r:embed="rId4"/>
+          <a:stretch>
+            <a:fillRect/>
+          </a:stretch>
+        </p:blipFill>
+        <p:spPr>
+          <a:xfrm>
+            <a:off x="4298950" y="312420"/>
+            <a:ext cx="3594100" cy="647700"/>
+          </a:xfrm>
+          <a:prstGeom prst="rect">
+            <a:avLst/>
+          </a:prstGeom>
+        </p:spPr>
+      </p:pic>
     </p:spTree>
   </p:cSld>
   <p:clrMapOvr>
@@ -2163,6 +2372,1075 @@
 </file>
 
 <file path=ppt/slides/slide10.xml><?xml version="1.0" encoding="utf-8"?>
+<p:sld xmlns:a="http://schemas.openxmlformats.org/drawingml/2006/main" xmlns:r="http://schemas.openxmlformats.org/officeDocument/2006/relationships" xmlns:p="http://schemas.openxmlformats.org/presentationml/2006/main">
+  <p:cSld name="Slide 9">
+    <p:bg>
+      <p:bgPr>
+        <a:solidFill>
+          <a:srgbClr val="FFFFFF"/>
+        </a:solidFill>
+        <a:effectLst/>
+      </p:bgPr>
+    </p:bg>
+    <p:spTree>
+      <p:nvGrpSpPr>
+        <p:cNvPr id="1" name=""/>
+        <p:cNvGrpSpPr/>
+        <p:nvPr/>
+      </p:nvGrpSpPr>
+      <p:grpSpPr>
+        <a:xfrm>
+          <a:off x="0" y="0"/>
+          <a:ext cx="0" cy="0"/>
+          <a:chOff x="0" y="0"/>
+          <a:chExt cx="0" cy="0"/>
+        </a:xfrm>
+      </p:grpSpPr>
+      <p:sp>
+        <p:nvSpPr>
+          <p:cNvPr id="2" name="Text 0"/>
+          <p:cNvSpPr/>
+          <p:nvPr/>
+        </p:nvSpPr>
+        <p:spPr>
+          <a:xfrm>
+            <a:off x="640080" y="475488"/>
+            <a:ext cx="8229600" cy="292608"/>
+          </a:xfrm>
+          <a:prstGeom prst="rect">
+            <a:avLst/>
+          </a:prstGeom>
+          <a:noFill/>
+          <a:ln/>
+        </p:spPr>
+        <p:txBody>
+          <a:bodyPr wrap="square" lIns="0" tIns="0" rIns="0" bIns="0" rtlCol="0" anchor="ctr"/>
+          <a:lstStyle/>
+          <a:p>
+            <a:pPr marL="0" indent="0" algn="l">
+              <a:buNone/>
+            </a:pPr>
+            <a:r>
+              <a:rPr lang="en-US" sz="1200" b="1" kern="0" spc="300" dirty="0">
+                <a:solidFill>
+                  <a:srgbClr val="0B7E77"/>
+                </a:solidFill>
+                <a:latin typeface="Calibri" pitchFamily="34" charset="0"/>
+                <a:ea typeface="Calibri" pitchFamily="34" charset="-122"/>
+                <a:cs typeface="Calibri" pitchFamily="34" charset="-120"/>
+              </a:rPr>
+              <a:t>VALIDARE</a:t>
+            </a:r>
+            <a:endParaRPr lang="en-US" sz="1200" dirty="0"/>
+          </a:p>
+        </p:txBody>
+      </p:sp>
+      <p:sp>
+        <p:nvSpPr>
+          <p:cNvPr id="3" name="Text 1"/>
+          <p:cNvSpPr/>
+          <p:nvPr/>
+        </p:nvSpPr>
+        <p:spPr>
+          <a:xfrm>
+            <a:off x="640080" y="768096"/>
+            <a:ext cx="10972800" cy="868680"/>
+          </a:xfrm>
+          <a:prstGeom prst="rect">
+            <a:avLst/>
+          </a:prstGeom>
+          <a:noFill/>
+          <a:ln/>
+        </p:spPr>
+        <p:txBody>
+          <a:bodyPr wrap="square" lIns="0" tIns="0" rIns="0" bIns="0" rtlCol="0" anchor="t"/>
+          <a:lstStyle/>
+          <a:p>
+            <a:pPr marL="0" indent="0" algn="l">
+              <a:buNone/>
+            </a:pPr>
+            <a:r>
+              <a:rPr lang="en-US" sz="3200" b="1" dirty="0">
+                <a:solidFill>
+                  <a:srgbClr val="0E1B2A"/>
+                </a:solidFill>
+                <a:latin typeface="Georgia" pitchFamily="34" charset="0"/>
+                <a:ea typeface="Georgia" pitchFamily="34" charset="-122"/>
+                <a:cs typeface="Georgia" pitchFamily="34" charset="-120"/>
+              </a:rPr>
+              <a:t>Testare si rezultate</a:t>
+            </a:r>
+            <a:endParaRPr lang="en-US" sz="3200" dirty="0"/>
+          </a:p>
+        </p:txBody>
+      </p:sp>
+      <p:sp>
+        <p:nvSpPr>
+          <p:cNvPr id="4" name="Shape 2"/>
+          <p:cNvSpPr/>
+          <p:nvPr/>
+        </p:nvSpPr>
+        <p:spPr>
+          <a:xfrm>
+            <a:off x="640080" y="1965960"/>
+            <a:ext cx="2487854" cy="1554480"/>
+          </a:xfrm>
+          <a:prstGeom prst="roundRect">
+            <a:avLst>
+              <a:gd name="adj" fmla="val 5294"/>
+            </a:avLst>
+          </a:prstGeom>
+          <a:solidFill>
+            <a:srgbClr val="EEF3F6"/>
+          </a:solidFill>
+          <a:ln/>
+          <a:effectLst>
+            <a:outerShdw blurRad="114300" dist="38100" dir="7200000" algn="bl" rotWithShape="0">
+              <a:srgbClr val="0E1B2A">
+                <a:alpha val="18000"/>
+              </a:srgbClr>
+            </a:outerShdw>
+          </a:effectLst>
+        </p:spPr>
+        <p:txBody>
+          <a:bodyPr/>
+          <a:lstStyle/>
+          <a:p>
+            <a:endParaRPr lang="en-US"/>
+          </a:p>
+        </p:txBody>
+      </p:sp>
+      <p:sp>
+        <p:nvSpPr>
+          <p:cNvPr id="5" name="Shape 3"/>
+          <p:cNvSpPr/>
+          <p:nvPr/>
+        </p:nvSpPr>
+        <p:spPr>
+          <a:xfrm>
+            <a:off x="640080" y="1965960"/>
+            <a:ext cx="2487854" cy="91440"/>
+          </a:xfrm>
+          <a:prstGeom prst="rect">
+            <a:avLst/>
+          </a:prstGeom>
+          <a:solidFill>
+            <a:srgbClr val="0B7E77"/>
+          </a:solidFill>
+          <a:ln/>
+        </p:spPr>
+        <p:txBody>
+          <a:bodyPr/>
+          <a:lstStyle/>
+          <a:p>
+            <a:endParaRPr lang="en-US"/>
+          </a:p>
+        </p:txBody>
+      </p:sp>
+      <p:sp>
+        <p:nvSpPr>
+          <p:cNvPr id="6" name="Text 4"/>
+          <p:cNvSpPr/>
+          <p:nvPr/>
+        </p:nvSpPr>
+        <p:spPr>
+          <a:xfrm>
+            <a:off x="777240" y="2221992"/>
+            <a:ext cx="2213534" cy="640080"/>
+          </a:xfrm>
+          <a:prstGeom prst="rect">
+            <a:avLst/>
+          </a:prstGeom>
+          <a:noFill/>
+          <a:ln/>
+        </p:spPr>
+        <p:txBody>
+          <a:bodyPr wrap="square" lIns="0" tIns="0" rIns="0" bIns="0" rtlCol="0" anchor="ctr"/>
+          <a:lstStyle/>
+          <a:p>
+            <a:pPr marL="0" indent="0" algn="ctr">
+              <a:buNone/>
+            </a:pPr>
+            <a:r>
+              <a:rPr lang="en-US" sz="2900" b="1" dirty="0">
+                <a:solidFill>
+                  <a:srgbClr val="0B7E77"/>
+                </a:solidFill>
+                <a:latin typeface="Georgia" pitchFamily="34" charset="0"/>
+                <a:ea typeface="Georgia" pitchFamily="34" charset="-122"/>
+                <a:cs typeface="Georgia" pitchFamily="34" charset="-120"/>
+              </a:rPr>
+              <a:t>10–25 ms</a:t>
+            </a:r>
+            <a:endParaRPr lang="en-US" sz="2900" dirty="0"/>
+          </a:p>
+        </p:txBody>
+      </p:sp>
+      <p:sp>
+        <p:nvSpPr>
+          <p:cNvPr id="7" name="Text 5"/>
+          <p:cNvSpPr/>
+          <p:nvPr/>
+        </p:nvSpPr>
+        <p:spPr>
+          <a:xfrm>
+            <a:off x="731520" y="2880360"/>
+            <a:ext cx="2304974" cy="548640"/>
+          </a:xfrm>
+          <a:prstGeom prst="rect">
+            <a:avLst/>
+          </a:prstGeom>
+          <a:noFill/>
+          <a:ln/>
+        </p:spPr>
+        <p:txBody>
+          <a:bodyPr wrap="square" lIns="0" tIns="0" rIns="0" bIns="0" rtlCol="0" anchor="t"/>
+          <a:lstStyle/>
+          <a:p>
+            <a:pPr marL="0" indent="0" algn="ctr">
+              <a:lnSpc>
+                <a:spcPct val="100000"/>
+              </a:lnSpc>
+              <a:buNone/>
+            </a:pPr>
+            <a:r>
+              <a:rPr lang="en-US" sz="1150" dirty="0">
+                <a:solidFill>
+                  <a:srgbClr val="5C6B79"/>
+                </a:solidFill>
+                <a:latin typeface="Calibri" pitchFamily="34" charset="0"/>
+                <a:ea typeface="Calibri" pitchFamily="34" charset="-122"/>
+                <a:cs typeface="Calibri" pitchFamily="34" charset="-120"/>
+              </a:rPr>
+              <a:t>latenta /finger</a:t>
+            </a:r>
+            <a:endParaRPr lang="en-US" sz="1150" dirty="0"/>
+          </a:p>
+          <a:p>
+            <a:pPr marL="0" indent="0" algn="ctr">
+              <a:lnSpc>
+                <a:spcPct val="100000"/>
+              </a:lnSpc>
+              <a:buNone/>
+            </a:pPr>
+            <a:r>
+              <a:rPr lang="en-US" sz="1150" dirty="0">
+                <a:solidFill>
+                  <a:srgbClr val="5C6B79"/>
+                </a:solidFill>
+                <a:latin typeface="Calibri" pitchFamily="34" charset="0"/>
+                <a:ea typeface="Calibri" pitchFamily="34" charset="-122"/>
+                <a:cs typeface="Calibri" pitchFamily="34" charset="-120"/>
+              </a:rPr>
+              <a:t>(end-to-end)</a:t>
+            </a:r>
+            <a:endParaRPr lang="en-US" sz="1150" dirty="0"/>
+          </a:p>
+        </p:txBody>
+      </p:sp>
+      <p:sp>
+        <p:nvSpPr>
+          <p:cNvPr id="8" name="Shape 6"/>
+          <p:cNvSpPr/>
+          <p:nvPr/>
+        </p:nvSpPr>
+        <p:spPr>
+          <a:xfrm>
+            <a:off x="3447974" y="1965960"/>
+            <a:ext cx="2487854" cy="1554480"/>
+          </a:xfrm>
+          <a:prstGeom prst="roundRect">
+            <a:avLst>
+              <a:gd name="adj" fmla="val 5294"/>
+            </a:avLst>
+          </a:prstGeom>
+          <a:solidFill>
+            <a:srgbClr val="EEF3F6"/>
+          </a:solidFill>
+          <a:ln/>
+          <a:effectLst>
+            <a:outerShdw blurRad="114300" dist="38100" dir="7200000" algn="bl" rotWithShape="0">
+              <a:srgbClr val="0E1B2A">
+                <a:alpha val="18000"/>
+              </a:srgbClr>
+            </a:outerShdw>
+          </a:effectLst>
+        </p:spPr>
+        <p:txBody>
+          <a:bodyPr/>
+          <a:lstStyle/>
+          <a:p>
+            <a:endParaRPr lang="en-US"/>
+          </a:p>
+        </p:txBody>
+      </p:sp>
+      <p:sp>
+        <p:nvSpPr>
+          <p:cNvPr id="9" name="Shape 7"/>
+          <p:cNvSpPr/>
+          <p:nvPr/>
+        </p:nvSpPr>
+        <p:spPr>
+          <a:xfrm>
+            <a:off x="3447974" y="1965960"/>
+            <a:ext cx="2487854" cy="91440"/>
+          </a:xfrm>
+          <a:prstGeom prst="rect">
+            <a:avLst/>
+          </a:prstGeom>
+          <a:solidFill>
+            <a:srgbClr val="0B7E77"/>
+          </a:solidFill>
+          <a:ln/>
+        </p:spPr>
+        <p:txBody>
+          <a:bodyPr/>
+          <a:lstStyle/>
+          <a:p>
+            <a:endParaRPr lang="en-US"/>
+          </a:p>
+        </p:txBody>
+      </p:sp>
+      <p:sp>
+        <p:nvSpPr>
+          <p:cNvPr id="10" name="Text 8"/>
+          <p:cNvSpPr/>
+          <p:nvPr/>
+        </p:nvSpPr>
+        <p:spPr>
+          <a:xfrm>
+            <a:off x="3585134" y="2221992"/>
+            <a:ext cx="2213534" cy="640080"/>
+          </a:xfrm>
+          <a:prstGeom prst="rect">
+            <a:avLst/>
+          </a:prstGeom>
+          <a:noFill/>
+          <a:ln/>
+        </p:spPr>
+        <p:txBody>
+          <a:bodyPr wrap="square" lIns="0" tIns="0" rIns="0" bIns="0" rtlCol="0" anchor="ctr"/>
+          <a:lstStyle/>
+          <a:p>
+            <a:pPr marL="0" indent="0" algn="ctr">
+              <a:buNone/>
+            </a:pPr>
+            <a:r>
+              <a:rPr lang="en-US" sz="2900" b="1" dirty="0">
+                <a:solidFill>
+                  <a:srgbClr val="0B7E77"/>
+                </a:solidFill>
+                <a:latin typeface="Georgia" pitchFamily="34" charset="0"/>
+                <a:ea typeface="Georgia" pitchFamily="34" charset="-122"/>
+                <a:cs typeface="Georgia" pitchFamily="34" charset="-120"/>
+              </a:rPr>
+              <a:t>20–30 ms</a:t>
+            </a:r>
+            <a:endParaRPr lang="en-US" sz="2900" dirty="0"/>
+          </a:p>
+        </p:txBody>
+      </p:sp>
+      <p:sp>
+        <p:nvSpPr>
+          <p:cNvPr id="11" name="Text 9"/>
+          <p:cNvSpPr/>
+          <p:nvPr/>
+        </p:nvSpPr>
+        <p:spPr>
+          <a:xfrm>
+            <a:off x="3539414" y="2880360"/>
+            <a:ext cx="2304974" cy="548640"/>
+          </a:xfrm>
+          <a:prstGeom prst="rect">
+            <a:avLst/>
+          </a:prstGeom>
+          <a:noFill/>
+          <a:ln/>
+        </p:spPr>
+        <p:txBody>
+          <a:bodyPr wrap="square" lIns="0" tIns="0" rIns="0" bIns="0" rtlCol="0" anchor="t"/>
+          <a:lstStyle/>
+          <a:p>
+            <a:pPr marL="0" indent="0" algn="ctr">
+              <a:lnSpc>
+                <a:spcPct val="100000"/>
+              </a:lnSpc>
+              <a:buNone/>
+            </a:pPr>
+            <a:r>
+              <a:rPr lang="en-US" sz="1150" dirty="0">
+                <a:solidFill>
+                  <a:srgbClr val="5C6B79"/>
+                </a:solidFill>
+                <a:latin typeface="Calibri" pitchFamily="34" charset="0"/>
+                <a:ea typeface="Calibri" pitchFamily="34" charset="-122"/>
+                <a:cs typeface="Calibri" pitchFamily="34" charset="-120"/>
+              </a:rPr>
+              <a:t>latenta /gesture</a:t>
+            </a:r>
+            <a:endParaRPr lang="en-US" sz="1150" dirty="0"/>
+          </a:p>
+          <a:p>
+            <a:pPr marL="0" indent="0" algn="ctr">
+              <a:lnSpc>
+                <a:spcPct val="100000"/>
+              </a:lnSpc>
+              <a:buNone/>
+            </a:pPr>
+            <a:r>
+              <a:rPr lang="en-US" sz="1150" dirty="0">
+                <a:solidFill>
+                  <a:srgbClr val="5C6B79"/>
+                </a:solidFill>
+                <a:latin typeface="Calibri" pitchFamily="34" charset="0"/>
+                <a:ea typeface="Calibri" pitchFamily="34" charset="-122"/>
+                <a:cs typeface="Calibri" pitchFamily="34" charset="-120"/>
+              </a:rPr>
+              <a:t>(cu FSM)</a:t>
+            </a:r>
+            <a:endParaRPr lang="en-US" sz="1150" dirty="0"/>
+          </a:p>
+        </p:txBody>
+      </p:sp>
+      <p:sp>
+        <p:nvSpPr>
+          <p:cNvPr id="12" name="Shape 10"/>
+          <p:cNvSpPr/>
+          <p:nvPr/>
+        </p:nvSpPr>
+        <p:spPr>
+          <a:xfrm>
+            <a:off x="6255868" y="1965960"/>
+            <a:ext cx="2487854" cy="1554480"/>
+          </a:xfrm>
+          <a:prstGeom prst="roundRect">
+            <a:avLst>
+              <a:gd name="adj" fmla="val 5294"/>
+            </a:avLst>
+          </a:prstGeom>
+          <a:solidFill>
+            <a:srgbClr val="EEF3F6"/>
+          </a:solidFill>
+          <a:ln/>
+          <a:effectLst>
+            <a:outerShdw blurRad="114300" dist="38100" dir="7200000" algn="bl" rotWithShape="0">
+              <a:srgbClr val="0E1B2A">
+                <a:alpha val="18000"/>
+              </a:srgbClr>
+            </a:outerShdw>
+          </a:effectLst>
+        </p:spPr>
+        <p:txBody>
+          <a:bodyPr/>
+          <a:lstStyle/>
+          <a:p>
+            <a:endParaRPr lang="en-US"/>
+          </a:p>
+        </p:txBody>
+      </p:sp>
+      <p:sp>
+        <p:nvSpPr>
+          <p:cNvPr id="13" name="Shape 11"/>
+          <p:cNvSpPr/>
+          <p:nvPr/>
+        </p:nvSpPr>
+        <p:spPr>
+          <a:xfrm>
+            <a:off x="6255868" y="1965960"/>
+            <a:ext cx="2487854" cy="91440"/>
+          </a:xfrm>
+          <a:prstGeom prst="rect">
+            <a:avLst/>
+          </a:prstGeom>
+          <a:solidFill>
+            <a:srgbClr val="0E1B2A"/>
+          </a:solidFill>
+          <a:ln/>
+        </p:spPr>
+        <p:txBody>
+          <a:bodyPr/>
+          <a:lstStyle/>
+          <a:p>
+            <a:endParaRPr lang="en-US"/>
+          </a:p>
+        </p:txBody>
+      </p:sp>
+      <p:sp>
+        <p:nvSpPr>
+          <p:cNvPr id="14" name="Text 12"/>
+          <p:cNvSpPr/>
+          <p:nvPr/>
+        </p:nvSpPr>
+        <p:spPr>
+          <a:xfrm>
+            <a:off x="6393028" y="2221992"/>
+            <a:ext cx="2213534" cy="640080"/>
+          </a:xfrm>
+          <a:prstGeom prst="rect">
+            <a:avLst/>
+          </a:prstGeom>
+          <a:noFill/>
+          <a:ln/>
+        </p:spPr>
+        <p:txBody>
+          <a:bodyPr wrap="square" lIns="0" tIns="0" rIns="0" bIns="0" rtlCol="0" anchor="ctr"/>
+          <a:lstStyle/>
+          <a:p>
+            <a:pPr marL="0" indent="0" algn="ctr">
+              <a:buNone/>
+            </a:pPr>
+            <a:r>
+              <a:rPr lang="en-US" sz="2900" b="1" dirty="0">
+                <a:solidFill>
+                  <a:srgbClr val="0E1B2A"/>
+                </a:solidFill>
+                <a:latin typeface="Georgia" pitchFamily="34" charset="0"/>
+                <a:ea typeface="Georgia" pitchFamily="34" charset="-122"/>
+                <a:cs typeface="Georgia" pitchFamily="34" charset="-120"/>
+              </a:rPr>
+              <a:t>&lt; 50 ms</a:t>
+            </a:r>
+            <a:endParaRPr lang="en-US" sz="2900" dirty="0"/>
+          </a:p>
+        </p:txBody>
+      </p:sp>
+      <p:sp>
+        <p:nvSpPr>
+          <p:cNvPr id="15" name="Text 13"/>
+          <p:cNvSpPr/>
+          <p:nvPr/>
+        </p:nvSpPr>
+        <p:spPr>
+          <a:xfrm>
+            <a:off x="6347308" y="2880360"/>
+            <a:ext cx="2304974" cy="548640"/>
+          </a:xfrm>
+          <a:prstGeom prst="rect">
+            <a:avLst/>
+          </a:prstGeom>
+          <a:noFill/>
+          <a:ln/>
+        </p:spPr>
+        <p:txBody>
+          <a:bodyPr wrap="square" lIns="0" tIns="0" rIns="0" bIns="0" rtlCol="0" anchor="t"/>
+          <a:lstStyle/>
+          <a:p>
+            <a:pPr marL="0" indent="0" algn="ctr">
+              <a:lnSpc>
+                <a:spcPct val="100000"/>
+              </a:lnSpc>
+              <a:buNone/>
+            </a:pPr>
+            <a:r>
+              <a:rPr lang="en-US" sz="1150" dirty="0">
+                <a:solidFill>
+                  <a:srgbClr val="5C6B79"/>
+                </a:solidFill>
+                <a:latin typeface="Calibri" pitchFamily="34" charset="0"/>
+                <a:ea typeface="Calibri" pitchFamily="34" charset="-122"/>
+                <a:cs typeface="Calibri" pitchFamily="34" charset="-120"/>
+              </a:rPr>
+              <a:t>prag de perceptie</a:t>
+            </a:r>
+            <a:endParaRPr lang="en-US" sz="1150" dirty="0"/>
+          </a:p>
+          <a:p>
+            <a:pPr marL="0" indent="0" algn="ctr">
+              <a:lnSpc>
+                <a:spcPct val="100000"/>
+              </a:lnSpc>
+              <a:buNone/>
+            </a:pPr>
+            <a:r>
+              <a:rPr lang="en-US" sz="1150" dirty="0">
+                <a:solidFill>
+                  <a:srgbClr val="5C6B79"/>
+                </a:solidFill>
+                <a:latin typeface="Calibri" pitchFamily="34" charset="0"/>
+                <a:ea typeface="Calibri" pitchFamily="34" charset="-122"/>
+                <a:cs typeface="Calibri" pitchFamily="34" charset="-120"/>
+              </a:rPr>
+              <a:t>vizuala umana</a:t>
+            </a:r>
+            <a:endParaRPr lang="en-US" sz="1150" dirty="0"/>
+          </a:p>
+        </p:txBody>
+      </p:sp>
+      <p:sp>
+        <p:nvSpPr>
+          <p:cNvPr id="16" name="Shape 14"/>
+          <p:cNvSpPr/>
+          <p:nvPr/>
+        </p:nvSpPr>
+        <p:spPr>
+          <a:xfrm>
+            <a:off x="9063761" y="1965960"/>
+            <a:ext cx="2487854" cy="1554480"/>
+          </a:xfrm>
+          <a:prstGeom prst="roundRect">
+            <a:avLst>
+              <a:gd name="adj" fmla="val 5294"/>
+            </a:avLst>
+          </a:prstGeom>
+          <a:solidFill>
+            <a:srgbClr val="EEF3F6"/>
+          </a:solidFill>
+          <a:ln/>
+          <a:effectLst>
+            <a:outerShdw blurRad="114300" dist="38100" dir="7200000" algn="bl" rotWithShape="0">
+              <a:srgbClr val="0E1B2A">
+                <a:alpha val="18000"/>
+              </a:srgbClr>
+            </a:outerShdw>
+          </a:effectLst>
+        </p:spPr>
+        <p:txBody>
+          <a:bodyPr/>
+          <a:lstStyle/>
+          <a:p>
+            <a:endParaRPr lang="en-US"/>
+          </a:p>
+        </p:txBody>
+      </p:sp>
+      <p:sp>
+        <p:nvSpPr>
+          <p:cNvPr id="17" name="Shape 15"/>
+          <p:cNvSpPr/>
+          <p:nvPr/>
+        </p:nvSpPr>
+        <p:spPr>
+          <a:xfrm>
+            <a:off x="9063761" y="1965960"/>
+            <a:ext cx="2487854" cy="91440"/>
+          </a:xfrm>
+          <a:prstGeom prst="rect">
+            <a:avLst/>
+          </a:prstGeom>
+          <a:solidFill>
+            <a:srgbClr val="E87A2C"/>
+          </a:solidFill>
+          <a:ln/>
+        </p:spPr>
+        <p:txBody>
+          <a:bodyPr/>
+          <a:lstStyle/>
+          <a:p>
+            <a:endParaRPr lang="en-US"/>
+          </a:p>
+        </p:txBody>
+      </p:sp>
+      <p:sp>
+        <p:nvSpPr>
+          <p:cNvPr id="18" name="Text 16"/>
+          <p:cNvSpPr/>
+          <p:nvPr/>
+        </p:nvSpPr>
+        <p:spPr>
+          <a:xfrm>
+            <a:off x="9200921" y="2221992"/>
+            <a:ext cx="2213534" cy="640080"/>
+          </a:xfrm>
+          <a:prstGeom prst="rect">
+            <a:avLst/>
+          </a:prstGeom>
+          <a:noFill/>
+          <a:ln/>
+        </p:spPr>
+        <p:txBody>
+          <a:bodyPr wrap="square" lIns="0" tIns="0" rIns="0" bIns="0" rtlCol="0" anchor="ctr"/>
+          <a:lstStyle/>
+          <a:p>
+            <a:pPr marL="0" indent="0" algn="ctr">
+              <a:buNone/>
+            </a:pPr>
+            <a:r>
+              <a:rPr lang="en-US" sz="2900" b="1" dirty="0">
+                <a:solidFill>
+                  <a:srgbClr val="E87A2C"/>
+                </a:solidFill>
+                <a:latin typeface="Georgia" pitchFamily="34" charset="0"/>
+                <a:ea typeface="Georgia" pitchFamily="34" charset="-122"/>
+                <a:cs typeface="Georgia" pitchFamily="34" charset="-120"/>
+              </a:rPr>
+              <a:t>~10 m</a:t>
+            </a:r>
+            <a:endParaRPr lang="en-US" sz="2900" dirty="0"/>
+          </a:p>
+        </p:txBody>
+      </p:sp>
+      <p:sp>
+        <p:nvSpPr>
+          <p:cNvPr id="19" name="Text 17"/>
+          <p:cNvSpPr/>
+          <p:nvPr/>
+        </p:nvSpPr>
+        <p:spPr>
+          <a:xfrm>
+            <a:off x="9155201" y="2880360"/>
+            <a:ext cx="2304974" cy="548640"/>
+          </a:xfrm>
+          <a:prstGeom prst="rect">
+            <a:avLst/>
+          </a:prstGeom>
+          <a:noFill/>
+          <a:ln/>
+        </p:spPr>
+        <p:txBody>
+          <a:bodyPr wrap="square" lIns="0" tIns="0" rIns="0" bIns="0" rtlCol="0" anchor="t"/>
+          <a:lstStyle/>
+          <a:p>
+            <a:pPr marL="0" indent="0" algn="ctr">
+              <a:lnSpc>
+                <a:spcPct val="100000"/>
+              </a:lnSpc>
+              <a:buNone/>
+            </a:pPr>
+            <a:r>
+              <a:rPr lang="en-US" sz="1150" dirty="0">
+                <a:solidFill>
+                  <a:srgbClr val="5C6B79"/>
+                </a:solidFill>
+                <a:latin typeface="Calibri" pitchFamily="34" charset="0"/>
+                <a:ea typeface="Calibri" pitchFamily="34" charset="-122"/>
+                <a:cs typeface="Calibri" pitchFamily="34" charset="-120"/>
+              </a:rPr>
+              <a:t>raza Wi-Fi</a:t>
+            </a:r>
+            <a:endParaRPr lang="en-US" sz="1150" dirty="0"/>
+          </a:p>
+          <a:p>
+            <a:pPr marL="0" indent="0" algn="ctr">
+              <a:lnSpc>
+                <a:spcPct val="100000"/>
+              </a:lnSpc>
+              <a:buNone/>
+            </a:pPr>
+            <a:r>
+              <a:rPr lang="en-US" sz="1150" dirty="0">
+                <a:solidFill>
+                  <a:srgbClr val="5C6B79"/>
+                </a:solidFill>
+                <a:latin typeface="Calibri" pitchFamily="34" charset="0"/>
+                <a:ea typeface="Calibri" pitchFamily="34" charset="-122"/>
+                <a:cs typeface="Calibri" pitchFamily="34" charset="-120"/>
+              </a:rPr>
+              <a:t>in interior</a:t>
+            </a:r>
+            <a:endParaRPr lang="en-US" sz="1150" dirty="0"/>
+          </a:p>
+        </p:txBody>
+      </p:sp>
+      <p:sp>
+        <p:nvSpPr>
+          <p:cNvPr id="20" name="Text 18"/>
+          <p:cNvSpPr/>
+          <p:nvPr/>
+        </p:nvSpPr>
+        <p:spPr>
+          <a:xfrm>
+            <a:off x="640080" y="3794760"/>
+            <a:ext cx="5760720" cy="320040"/>
+          </a:xfrm>
+          <a:prstGeom prst="rect">
+            <a:avLst/>
+          </a:prstGeom>
+          <a:noFill/>
+          <a:ln/>
+        </p:spPr>
+        <p:txBody>
+          <a:bodyPr wrap="square" lIns="0" tIns="0" rIns="0" bIns="0" rtlCol="0" anchor="ctr"/>
+          <a:lstStyle/>
+          <a:p>
+            <a:pPr marL="0" indent="0">
+              <a:buNone/>
+            </a:pPr>
+            <a:r>
+              <a:rPr lang="en-US" sz="1250" b="1" dirty="0">
+                <a:solidFill>
+                  <a:srgbClr val="0E1B2A"/>
+                </a:solidFill>
+                <a:latin typeface="Calibri" pitchFamily="34" charset="0"/>
+                <a:ea typeface="Calibri" pitchFamily="34" charset="-122"/>
+                <a:cs typeface="Calibri" pitchFamily="34" charset="-120"/>
+              </a:rPr>
+              <a:t>Latenta end-to-end vs. prag de perceptie (ms)</a:t>
+            </a:r>
+            <a:endParaRPr lang="en-US" sz="1250" dirty="0"/>
+          </a:p>
+        </p:txBody>
+      </p:sp>
+      <p:graphicFrame>
+        <p:nvGraphicFramePr>
+          <p:cNvPr id="21" name="Chart 0"/>
+          <p:cNvGraphicFramePr/>
+          <p:nvPr/>
+        </p:nvGraphicFramePr>
+        <p:xfrm>
+          <a:off x="640080" y="4114800"/>
+          <a:ext cx="5669280" cy="2148840"/>
+        </p:xfrm>
+        <a:graphic>
+          <a:graphicData uri="http://schemas.openxmlformats.org/drawingml/2006/chart">
+            <c:chart xmlns:c="http://schemas.openxmlformats.org/drawingml/2006/chart" xmlns:r="http://schemas.openxmlformats.org/officeDocument/2006/relationships" r:id="rId3"/>
+          </a:graphicData>
+        </a:graphic>
+      </p:graphicFrame>
+      <p:sp>
+        <p:nvSpPr>
+          <p:cNvPr id="22" name="Shape 19"/>
+          <p:cNvSpPr/>
+          <p:nvPr/>
+        </p:nvSpPr>
+        <p:spPr>
+          <a:xfrm>
+            <a:off x="6583680" y="3794760"/>
+            <a:ext cx="4967935" cy="2468880"/>
+          </a:xfrm>
+          <a:prstGeom prst="roundRect">
+            <a:avLst>
+              <a:gd name="adj" fmla="val 3333"/>
+            </a:avLst>
+          </a:prstGeom>
+          <a:solidFill>
+            <a:srgbClr val="E2ECEC"/>
+          </a:solidFill>
+          <a:ln/>
+          <a:effectLst>
+            <a:outerShdw blurRad="114300" dist="38100" dir="7200000" algn="bl" rotWithShape="0">
+              <a:srgbClr val="0E1B2A">
+                <a:alpha val="18000"/>
+              </a:srgbClr>
+            </a:outerShdw>
+          </a:effectLst>
+        </p:spPr>
+        <p:txBody>
+          <a:bodyPr/>
+          <a:lstStyle/>
+          <a:p>
+            <a:endParaRPr lang="en-US"/>
+          </a:p>
+        </p:txBody>
+      </p:sp>
+      <p:sp>
+        <p:nvSpPr>
+          <p:cNvPr id="23" name="Text 20"/>
+          <p:cNvSpPr/>
+          <p:nvPr/>
+        </p:nvSpPr>
+        <p:spPr>
+          <a:xfrm>
+            <a:off x="6903720" y="3977640"/>
+            <a:ext cx="4327855" cy="411480"/>
+          </a:xfrm>
+          <a:prstGeom prst="rect">
+            <a:avLst/>
+          </a:prstGeom>
+          <a:noFill/>
+          <a:ln/>
+        </p:spPr>
+        <p:txBody>
+          <a:bodyPr wrap="square" lIns="0" tIns="0" rIns="0" bIns="0" rtlCol="0" anchor="ctr"/>
+          <a:lstStyle/>
+          <a:p>
+            <a:pPr marL="0" indent="0">
+              <a:buNone/>
+            </a:pPr>
+            <a:r>
+              <a:rPr lang="en-US" sz="1550" b="1" dirty="0">
+                <a:solidFill>
+                  <a:srgbClr val="0B7E77"/>
+                </a:solidFill>
+                <a:latin typeface="Calibri" pitchFamily="34" charset="0"/>
+                <a:ea typeface="Calibri" pitchFamily="34" charset="-122"/>
+                <a:cs typeface="Calibri" pitchFamily="34" charset="-120"/>
+              </a:rPr>
+              <a:t>Robustete sub stres</a:t>
+            </a:r>
+            <a:endParaRPr lang="en-US" sz="1550" dirty="0"/>
+          </a:p>
+        </p:txBody>
+      </p:sp>
+      <p:sp>
+        <p:nvSpPr>
+          <p:cNvPr id="24" name="Text 21"/>
+          <p:cNvSpPr/>
+          <p:nvPr/>
+        </p:nvSpPr>
+        <p:spPr>
+          <a:xfrm>
+            <a:off x="6903720" y="4480560"/>
+            <a:ext cx="4327855" cy="1691640"/>
+          </a:xfrm>
+          <a:prstGeom prst="rect">
+            <a:avLst/>
+          </a:prstGeom>
+          <a:noFill/>
+          <a:ln/>
+        </p:spPr>
+        <p:txBody>
+          <a:bodyPr wrap="square" lIns="0" tIns="0" rIns="0" bIns="0" rtlCol="0" anchor="ctr"/>
+          <a:lstStyle/>
+          <a:p>
+            <a:pPr marL="342900" indent="-342900">
+              <a:lnSpc>
+                <a:spcPct val="108000"/>
+              </a:lnSpc>
+              <a:spcAft>
+                <a:spcPts val="900"/>
+              </a:spcAft>
+              <a:buSzPct val="100000"/>
+              <a:buChar char="•"/>
+            </a:pPr>
+            <a:r>
+              <a:rPr lang="en-US" sz="1250" dirty="0">
+                <a:solidFill>
+                  <a:srgbClr val="1B2A38"/>
+                </a:solidFill>
+                <a:latin typeface="Calibri" pitchFamily="34" charset="0"/>
+                <a:ea typeface="Calibri" pitchFamily="34" charset="-122"/>
+                <a:cs typeface="Calibri" pitchFamily="34" charset="-120"/>
+              </a:rPr>
+              <a:t>Protectie la suprasarcina: coada plina → HTTP 500 «Queue full», fara blocaje sau memory leak.</a:t>
+            </a:r>
+            <a:endParaRPr lang="en-US" sz="1250" dirty="0"/>
+          </a:p>
+          <a:p>
+            <a:pPr marL="342900" indent="-342900">
+              <a:lnSpc>
+                <a:spcPct val="108000"/>
+              </a:lnSpc>
+              <a:spcAft>
+                <a:spcPts val="900"/>
+              </a:spcAft>
+              <a:buSzPct val="100000"/>
+              <a:buChar char="•"/>
+            </a:pPr>
+            <a:r>
+              <a:rPr lang="en-US" sz="1250" dirty="0">
+                <a:solidFill>
+                  <a:srgbClr val="1B2A38"/>
+                </a:solidFill>
+                <a:latin typeface="Calibri" pitchFamily="34" charset="0"/>
+                <a:ea typeface="Calibri" pitchFamily="34" charset="-122"/>
+                <a:cs typeface="Calibri" pitchFamily="34" charset="-120"/>
+              </a:rPr>
+              <a:t>Stabilitate Wi-Fi pe sesiuni de 15–30 min, fara deconectari (WiFi.setSleep(false)).</a:t>
+            </a:r>
+            <a:endParaRPr lang="en-US" sz="1250" dirty="0"/>
+          </a:p>
+          <a:p>
+            <a:pPr marL="342900" indent="-342900">
+              <a:lnSpc>
+                <a:spcPct val="108000"/>
+              </a:lnSpc>
+              <a:spcAft>
+                <a:spcPts val="900"/>
+              </a:spcAft>
+              <a:buSzPct val="100000"/>
+              <a:buChar char="•"/>
+            </a:pPr>
+            <a:r>
+              <a:rPr lang="en-US" sz="1250" dirty="0">
+                <a:solidFill>
+                  <a:srgbClr val="1B2A38"/>
+                </a:solidFill>
+                <a:latin typeface="Calibri" pitchFamily="34" charset="0"/>
+                <a:ea typeface="Calibri" pitchFamily="34" charset="-122"/>
+                <a:cs typeface="Calibri" pitchFamily="34" charset="-120"/>
+              </a:rPr>
+              <a:t>Toleranta la defecte: comutare automata in mod Access Point la pierderea retelei.</a:t>
+            </a:r>
+            <a:endParaRPr lang="en-US" sz="1250" dirty="0"/>
+          </a:p>
+        </p:txBody>
+      </p:sp>
+      <p:sp>
+        <p:nvSpPr>
+          <p:cNvPr id="25" name="Text 22"/>
+          <p:cNvSpPr/>
+          <p:nvPr/>
+        </p:nvSpPr>
+        <p:spPr>
+          <a:xfrm>
+            <a:off x="640080" y="6437376"/>
+            <a:ext cx="7315200" cy="274320"/>
+          </a:xfrm>
+          <a:prstGeom prst="rect">
+            <a:avLst/>
+          </a:prstGeom>
+          <a:noFill/>
+          <a:ln/>
+        </p:spPr>
+        <p:txBody>
+          <a:bodyPr wrap="square" lIns="0" tIns="0" rIns="0" bIns="0" rtlCol="0" anchor="ctr"/>
+          <a:lstStyle/>
+          <a:p>
+            <a:pPr marL="0" indent="0" algn="l">
+              <a:buNone/>
+            </a:pPr>
+            <a:r>
+              <a:rPr lang="en-US" sz="900" dirty="0">
+                <a:solidFill>
+                  <a:srgbClr val="5C6B79"/>
+                </a:solidFill>
+                <a:latin typeface="Calibri" pitchFamily="34" charset="0"/>
+                <a:ea typeface="Calibri" pitchFamily="34" charset="-122"/>
+                <a:cs typeface="Calibri" pitchFamily="34" charset="-120"/>
+              </a:rPr>
+              <a:t>Mana robotica controlata web  ·  Mihai Albu</a:t>
+            </a:r>
+            <a:endParaRPr lang="en-US" sz="900" dirty="0"/>
+          </a:p>
+        </p:txBody>
+      </p:sp>
+      <p:sp>
+        <p:nvSpPr>
+          <p:cNvPr id="26" name="Text 23"/>
+          <p:cNvSpPr/>
+          <p:nvPr/>
+        </p:nvSpPr>
+        <p:spPr>
+          <a:xfrm>
+            <a:off x="11002975" y="6437376"/>
+            <a:ext cx="548640" cy="274320"/>
+          </a:xfrm>
+          <a:prstGeom prst="rect">
+            <a:avLst/>
+          </a:prstGeom>
+          <a:noFill/>
+          <a:ln/>
+        </p:spPr>
+        <p:txBody>
+          <a:bodyPr wrap="square" lIns="0" tIns="0" rIns="0" bIns="0" rtlCol="0" anchor="ctr"/>
+          <a:lstStyle/>
+          <a:p>
+            <a:pPr marL="0" indent="0" algn="r">
+              <a:buNone/>
+            </a:pPr>
+            <a:r>
+              <a:rPr lang="en-US" sz="900" b="1" dirty="0">
+                <a:solidFill>
+                  <a:srgbClr val="0B7E77"/>
+                </a:solidFill>
+                <a:latin typeface="Calibri" pitchFamily="34" charset="0"/>
+                <a:ea typeface="Calibri" pitchFamily="34" charset="-122"/>
+                <a:cs typeface="Calibri" pitchFamily="34" charset="-120"/>
+              </a:rPr>
+              <a:t>09</a:t>
+            </a:r>
+            <a:endParaRPr lang="en-US" sz="900" dirty="0"/>
+          </a:p>
+        </p:txBody>
+      </p:sp>
+    </p:spTree>
+  </p:cSld>
+  <p:clrMapOvr>
+    <a:masterClrMapping/>
+  </p:clrMapOvr>
+</p:sld>
+</file>
+
+<file path=ppt/slides/slide11.xml><?xml version="1.0" encoding="utf-8"?>
 <p:sld xmlns:a="http://schemas.openxmlformats.org/drawingml/2006/main" xmlns:r="http://schemas.openxmlformats.org/officeDocument/2006/relationships" xmlns:p="http://schemas.openxmlformats.org/presentationml/2006/main">
   <p:cSld name="Slide 10">
     <p:bg>
@@ -2768,16 +4046,127 @@
           </a:p>
         </p:txBody>
       </p:sp>
-      <p:sp>
-        <p:nvSpPr>
-          <p:cNvPr id="11" name="Text 9"/>
-          <p:cNvSpPr/>
-          <p:nvPr/>
-        </p:nvSpPr>
-        <p:spPr>
-          <a:xfrm>
-            <a:off x="640080" y="5989320"/>
-            <a:ext cx="10911535" cy="411480"/>
+    </p:spTree>
+  </p:cSld>
+  <p:clrMapOvr>
+    <a:masterClrMapping/>
+  </p:clrMapOvr>
+</p:sld>
+</file>
+
+<file path=ppt/slides/slide12.xml><?xml version="1.0" encoding="utf-8"?>
+<p:sld xmlns:a="http://schemas.openxmlformats.org/drawingml/2006/main" xmlns:r="http://schemas.openxmlformats.org/officeDocument/2006/relationships" xmlns:p="http://schemas.openxmlformats.org/presentationml/2006/main">
+  <p:cSld>
+    <p:bg>
+      <p:bgPr>
+        <a:solidFill>
+          <a:srgbClr val="0E1B2A"/>
+        </a:solidFill>
+        <a:effectLst/>
+      </p:bgPr>
+    </p:bg>
+    <p:spTree>
+      <p:nvGrpSpPr>
+        <p:cNvPr id="1" name="">
+          <a:extLst>
+            <a:ext uri="{FF2B5EF4-FFF2-40B4-BE49-F238E27FC236}">
+              <a16:creationId xmlns:a16="http://schemas.microsoft.com/office/drawing/2014/main" id="{3D37A69C-DD29-84CA-6975-9FA6B4DAA737}"/>
+            </a:ext>
+          </a:extLst>
+        </p:cNvPr>
+        <p:cNvGrpSpPr/>
+        <p:nvPr/>
+      </p:nvGrpSpPr>
+      <p:grpSpPr>
+        <a:xfrm>
+          <a:off x="0" y="0"/>
+          <a:ext cx="0" cy="0"/>
+          <a:chOff x="0" y="0"/>
+          <a:chExt cx="0" cy="0"/>
+        </a:xfrm>
+      </p:grpSpPr>
+      <p:sp>
+        <p:nvSpPr>
+          <p:cNvPr id="2" name="Shape 0">
+            <a:extLst>
+              <a:ext uri="{FF2B5EF4-FFF2-40B4-BE49-F238E27FC236}">
+                <a16:creationId xmlns:a16="http://schemas.microsoft.com/office/drawing/2014/main" id="{F2E5BCB0-6A56-1F1D-59C5-E5EA291DC06F}"/>
+              </a:ext>
+            </a:extLst>
+          </p:cNvPr>
+          <p:cNvSpPr/>
+          <p:nvPr/>
+        </p:nvSpPr>
+        <p:spPr>
+          <a:xfrm>
+            <a:off x="0" y="0"/>
+            <a:ext cx="201168" cy="6858000"/>
+          </a:xfrm>
+          <a:prstGeom prst="rect">
+            <a:avLst/>
+          </a:prstGeom>
+          <a:solidFill>
+            <a:srgbClr val="11A39A"/>
+          </a:solidFill>
+          <a:ln/>
+        </p:spPr>
+        <p:txBody>
+          <a:bodyPr/>
+          <a:lstStyle/>
+          <a:p>
+            <a:endParaRPr lang="en-US"/>
+          </a:p>
+        </p:txBody>
+      </p:sp>
+      <p:sp>
+        <p:nvSpPr>
+          <p:cNvPr id="3" name="Shape 1">
+            <a:extLst>
+              <a:ext uri="{FF2B5EF4-FFF2-40B4-BE49-F238E27FC236}">
+                <a16:creationId xmlns:a16="http://schemas.microsoft.com/office/drawing/2014/main" id="{36D9A6C9-B6E9-4009-0DE4-1B07FFF0B03C}"/>
+              </a:ext>
+            </a:extLst>
+          </p:cNvPr>
+          <p:cNvSpPr/>
+          <p:nvPr/>
+        </p:nvSpPr>
+        <p:spPr>
+          <a:xfrm>
+            <a:off x="-1005840" y="-1005840"/>
+            <a:ext cx="2377440" cy="2377440"/>
+          </a:xfrm>
+          <a:prstGeom prst="ellipse">
+            <a:avLst/>
+          </a:prstGeom>
+          <a:solidFill>
+            <a:srgbClr val="16293C"/>
+          </a:solidFill>
+          <a:ln/>
+        </p:spPr>
+        <p:txBody>
+          <a:bodyPr/>
+          <a:lstStyle/>
+          <a:p>
+            <a:endParaRPr lang="en-US"/>
+          </a:p>
+        </p:txBody>
+      </p:sp>
+      <p:sp>
+        <p:nvSpPr>
+          <p:cNvPr id="8" name="Text 5">
+            <a:extLst>
+              <a:ext uri="{FF2B5EF4-FFF2-40B4-BE49-F238E27FC236}">
+                <a16:creationId xmlns:a16="http://schemas.microsoft.com/office/drawing/2014/main" id="{F52B4366-7583-B900-4E37-BB7A2971E727}"/>
+              </a:ext>
+            </a:extLst>
+          </p:cNvPr>
+          <p:cNvSpPr/>
+          <p:nvPr/>
+        </p:nvSpPr>
+        <p:spPr>
+          <a:xfrm>
+            <a:off x="1096000" y="2560320"/>
+            <a:ext cx="10000000" cy="853440"/>
           </a:xfrm>
           <a:prstGeom prst="rect">
             <a:avLst/>
@@ -2793,7 +4182,7 @@
               <a:buNone/>
             </a:pPr>
             <a:r>
-              <a:rPr lang="en-US" sz="1500" b="1" i="1" dirty="0">
+              <a:rPr lang="en-US" sz="4400" b="1" dirty="0">
                 <a:solidFill>
                   <a:srgbClr val="FFFFFF"/>
                 </a:solidFill>
@@ -2801,13 +4190,264 @@
                 <a:ea typeface="Georgia" pitchFamily="34" charset="-122"/>
                 <a:cs typeface="Georgia" pitchFamily="34" charset="-120"/>
               </a:rPr>
-              <a:t>Va multumesc!  ·  Mihai Albu  ·  2026</a:t>
+              <a:t>Va </a:t>
+            </a:r>
+            <a:r>
+              <a:rPr lang="en-US" sz="4400" b="1" dirty="0" err="1">
+                <a:solidFill>
+                  <a:srgbClr val="FFFFFF"/>
+                </a:solidFill>
+                <a:latin typeface="Georgia" pitchFamily="34" charset="0"/>
+                <a:ea typeface="Georgia" pitchFamily="34" charset="-122"/>
+                <a:cs typeface="Georgia" pitchFamily="34" charset="-120"/>
+              </a:rPr>
+              <a:t>multumesc</a:t>
+            </a:r>
+            <a:r>
+              <a:rPr lang="en-US" sz="4400" b="1" dirty="0">
+                <a:solidFill>
+                  <a:srgbClr val="FFFFFF"/>
+                </a:solidFill>
+                <a:latin typeface="Georgia" pitchFamily="34" charset="0"/>
+                <a:ea typeface="Georgia" pitchFamily="34" charset="-122"/>
+                <a:cs typeface="Georgia" pitchFamily="34" charset="-120"/>
+              </a:rPr>
+              <a:t>!</a:t>
+            </a:r>
+            <a:endParaRPr lang="en-US" sz="4400" dirty="0"/>
+          </a:p>
+        </p:txBody>
+      </p:sp>
+      <p:sp>
+        <p:nvSpPr>
+          <p:cNvPr id="20" name="Text Kicker"/>
+          <p:cNvSpPr/>
+          <p:nvPr/>
+        </p:nvSpPr>
+        <p:spPr>
+          <a:xfrm>
+            <a:off x="1096000" y="2103120"/>
+            <a:ext cx="10000000" cy="292608"/>
+          </a:xfrm>
+          <a:prstGeom prst="rect">
+            <a:avLst/>
+          </a:prstGeom>
+          <a:noFill/>
+          <a:ln/>
+        </p:spPr>
+        <p:txBody>
+          <a:bodyPr wrap="square" lIns="0" tIns="0" rIns="0" bIns="0" rtlCol="0" anchor="ctr"/>
+          <a:lstStyle/>
+          <a:p>
+            <a:pPr marL="0" indent="0" algn="ctr">
+              <a:buNone/>
+            </a:pPr>
+            <a:r>
+              <a:rPr lang="en-US" sz="1200" b="1" kern="0" spc="300" dirty="0">
+                <a:solidFill>
+                  <a:srgbClr val="BFE9E4"/>
+                </a:solidFill>
+                <a:latin typeface="Calibri" pitchFamily="34" charset="0"/>
+                <a:ea typeface="Calibri" pitchFamily="34" charset="-122"/>
+                <a:cs typeface="Calibri" pitchFamily="34" charset="-120"/>
+              </a:rPr>
+              <a:t>LUCRARE DE LICENTA · 2026</a:t>
+            </a:r>
+            <a:endParaRPr lang="en-US" sz="1200" dirty="0"/>
+          </a:p>
+        </p:txBody>
+      </p:sp>
+      <p:sp>
+        <p:nvSpPr>
+          <p:cNvPr id="21" name="Text Subtitle"/>
+          <p:cNvSpPr/>
+          <p:nvPr/>
+        </p:nvSpPr>
+        <p:spPr>
+          <a:xfrm>
+            <a:off x="2096000" y="3527928"/>
+            <a:ext cx="8000000" cy="502920"/>
+          </a:xfrm>
+          <a:prstGeom prst="rect">
+            <a:avLst/>
+          </a:prstGeom>
+          <a:noFill/>
+          <a:ln/>
+        </p:spPr>
+        <p:txBody>
+          <a:bodyPr wrap="square" lIns="0" tIns="0" rIns="0" bIns="0" rtlCol="0" anchor="ctr"/>
+          <a:lstStyle/>
+          <a:p>
+            <a:pPr marL="0" indent="0" algn="ctr">
+              <a:buNone/>
+            </a:pPr>
+            <a:r>
+              <a:rPr lang="en-US" sz="1600" i="1" dirty="0">
+                <a:solidFill>
+                  <a:srgbClr val="BFE9E4"/>
+                </a:solidFill>
+                <a:latin typeface="Calibri" pitchFamily="34" charset="0"/>
+                <a:ea typeface="Calibri" pitchFamily="34" charset="-122"/>
+                <a:cs typeface="Calibri" pitchFamily="34" charset="-120"/>
+              </a:rPr>
+              <a:t>Proiectarea si implementarea unei maini robotice controlate printr-o aplicatie web in timp real</a:t>
+            </a:r>
+            <a:endParaRPr lang="en-US" sz="1600" i="1" dirty="0"/>
+          </a:p>
+        </p:txBody>
+      </p:sp>
+      <p:sp>
+        <p:nvSpPr>
+          <p:cNvPr id="22" name="Text Divider"/>
+          <p:cNvSpPr/>
+          <p:nvPr/>
+        </p:nvSpPr>
+        <p:spPr>
+          <a:xfrm>
+            <a:off x="5822584" y="4218432"/>
+            <a:ext cx="548640" cy="45720"/>
+          </a:xfrm>
+          <a:prstGeom prst="rect">
+            <a:avLst/>
+          </a:prstGeom>
+          <a:solidFill>
+            <a:srgbClr val="11A39A"/>
+          </a:solidFill>
+          <a:ln/>
+        </p:spPr>
+        <p:txBody>
+          <a:bodyPr/>
+          <a:lstStyle/>
+          <a:p>
+            <a:endParaRPr lang="en-US"/>
+          </a:p>
+        </p:txBody>
+      </p:sp>
+      <p:sp>
+        <p:nvSpPr>
+          <p:cNvPr id="23" name="Text Author"/>
+          <p:cNvSpPr/>
+          <p:nvPr/>
+        </p:nvSpPr>
+        <p:spPr>
+          <a:xfrm>
+            <a:off x="2096000" y="4419600"/>
+            <a:ext cx="8000000" cy="411480"/>
+          </a:xfrm>
+          <a:prstGeom prst="rect">
+            <a:avLst/>
+          </a:prstGeom>
+          <a:noFill/>
+          <a:ln/>
+        </p:spPr>
+        <p:txBody>
+          <a:bodyPr wrap="square" lIns="0" tIns="0" rIns="0" bIns="0" rtlCol="0" anchor="ctr"/>
+          <a:lstStyle/>
+          <a:p>
+            <a:pPr marL="0" indent="0" algn="ctr">
+              <a:buNone/>
+            </a:pPr>
+            <a:r>
+              <a:rPr lang="en-US" sz="1500" b="1" dirty="0">
+                <a:solidFill>
+                  <a:srgbClr val="FFFFFF"/>
+                </a:solidFill>
+                <a:latin typeface="Calibri" pitchFamily="34" charset="0"/>
+                <a:ea typeface="Calibri" pitchFamily="34" charset="-122"/>
+                <a:cs typeface="Calibri" pitchFamily="34" charset="-120"/>
+              </a:rPr>
+              <a:t>Mihai Albu</a:t>
+            </a:r>
+            <a:r>
+              <a:rPr lang="en-US" sz="1500" dirty="0">
+                <a:solidFill>
+                  <a:srgbClr val="8FA3B3"/>
+                </a:solidFill>
+                <a:latin typeface="Calibri" pitchFamily="34" charset="0"/>
+                <a:ea typeface="Calibri" pitchFamily="34" charset="-122"/>
+                <a:cs typeface="Calibri" pitchFamily="34" charset="-120"/>
+              </a:rPr>
+              <a:t>  ·  Coordonator stiintific: Lect. univ. dr. Maria Flori</a:t>
             </a:r>
             <a:endParaRPr lang="en-US" sz="1500" dirty="0"/>
           </a:p>
         </p:txBody>
       </p:sp>
+      <p:sp>
+        <p:nvSpPr>
+          <p:cNvPr id="24" name="Text University"/>
+          <p:cNvSpPr/>
+          <p:nvPr/>
+        </p:nvSpPr>
+        <p:spPr>
+          <a:xfrm>
+            <a:off x="2096000" y="4876800"/>
+            <a:ext cx="8000000" cy="365760"/>
+          </a:xfrm>
+          <a:prstGeom prst="rect">
+            <a:avLst/>
+          </a:prstGeom>
+          <a:noFill/>
+          <a:ln/>
+        </p:spPr>
+        <p:txBody>
+          <a:bodyPr wrap="square" lIns="0" tIns="0" rIns="0" bIns="0" rtlCol="0" anchor="ctr"/>
+          <a:lstStyle/>
+          <a:p>
+            <a:pPr marL="0" indent="0" algn="ctr">
+              <a:buNone/>
+            </a:pPr>
+            <a:r>
+              <a:rPr lang="en-US" sz="1150" dirty="0">
+                <a:solidFill>
+                  <a:srgbClr val="8FA3B3"/>
+                </a:solidFill>
+                <a:latin typeface="Calibri" pitchFamily="34" charset="0"/>
+                <a:ea typeface="Calibri" pitchFamily="34" charset="-122"/>
+                <a:cs typeface="Calibri" pitchFamily="34" charset="-120"/>
+              </a:rPr>
+              <a:t>Universitatea „Lucian Blaga” din Sibiu  ·  Facultatea de Stiinte  ·  Informatica</a:t>
+            </a:r>
+            <a:endParaRPr lang="en-US" sz="1150" dirty="0"/>
+          </a:p>
+        </p:txBody>
+      </p:sp>
+      <p:pic>
+        <p:nvPicPr>
+          <p:cNvPr id="15" name="Picture 14">
+            <a:extLst>
+              <a:ext uri="{FF2B5EF4-FFF2-40B4-BE49-F238E27FC236}">
+                <a16:creationId xmlns:a16="http://schemas.microsoft.com/office/drawing/2014/main" id="{937C1802-1480-DA1C-61A3-A09CC6A5FFEE}"/>
+              </a:ext>
+            </a:extLst>
+          </p:cNvPr>
+          <p:cNvPicPr>
+            <a:picLocks noChangeAspect="1"/>
+          </p:cNvPicPr>
+          <p:nvPr/>
+        </p:nvPicPr>
+        <p:blipFill>
+          <a:blip r:embed="rId3"/>
+          <a:stretch>
+            <a:fillRect/>
+          </a:stretch>
+        </p:blipFill>
+        <p:spPr>
+          <a:xfrm>
+            <a:off x="4894950" y="5486400"/>
+            <a:ext cx="2402100" cy="432574"/>
+          </a:xfrm>
+          <a:prstGeom prst="rect">
+            <a:avLst/>
+          </a:prstGeom>
+        </p:spPr>
+      </p:pic>
     </p:spTree>
+    <p:extLst>
+      <p:ext uri="{BB962C8B-B14F-4D97-AF65-F5344CB8AC3E}">
+        <p14:creationId xmlns:p14="http://schemas.microsoft.com/office/powerpoint/2010/main" val="3194983628"/>
+      </p:ext>
+    </p:extLst>
   </p:cSld>
   <p:clrMapOvr>
     <a:masterClrMapping/>
@@ -2873,7 +4513,7 @@
                 <a:ea typeface="Calibri" pitchFamily="34" charset="-122"/>
                 <a:cs typeface="Calibri" pitchFamily="34" charset="-120"/>
               </a:rPr>
-              <a:t>DE CE ACEASTA TEMA</a:t>
+              <a:t>SCOPUL LUCRARII</a:t>
             </a:r>
             <a:endParaRPr lang="en-US" sz="1200" dirty="0"/>
           </a:p>
@@ -2904,7 +4544,7 @@
               <a:buNone/>
             </a:pPr>
             <a:r>
-              <a:rPr lang="en-US" sz="3200" b="1" dirty="0">
+              <a:rPr lang="en-US" sz="3200" b="1" dirty="0" err="1">
                 <a:solidFill>
                   <a:srgbClr val="0E1B2A"/>
                 </a:solidFill>
@@ -2912,139 +4552,44 @@
                 <a:ea typeface="Georgia" pitchFamily="34" charset="-122"/>
                 <a:cs typeface="Georgia" pitchFamily="34" charset="-120"/>
               </a:rPr>
-              <a:t>Motivatia alegerii temei</a:t>
-            </a:r>
-            <a:endParaRPr lang="en-US" sz="3200" dirty="0"/>
-          </a:p>
-        </p:txBody>
-      </p:sp>
-      <p:sp>
-        <p:nvSpPr>
-          <p:cNvPr id="4" name="Shape 2"/>
-          <p:cNvSpPr/>
-          <p:nvPr/>
-        </p:nvSpPr>
-        <p:spPr>
-          <a:xfrm>
-            <a:off x="640080" y="1874520"/>
-            <a:ext cx="4572000" cy="3977640"/>
-          </a:xfrm>
-          <a:prstGeom prst="roundRect">
-            <a:avLst>
-              <a:gd name="adj" fmla="val 2069"/>
-            </a:avLst>
-          </a:prstGeom>
-          <a:solidFill>
-            <a:srgbClr val="11A39A"/>
-          </a:solidFill>
-          <a:ln/>
-          <a:effectLst>
-            <a:outerShdw blurRad="114300" dist="38100" dir="7200000" algn="bl" rotWithShape="0">
-              <a:srgbClr val="0E1B2A">
-                <a:alpha val="18000"/>
-              </a:srgbClr>
-            </a:outerShdw>
-          </a:effectLst>
-        </p:spPr>
-        <p:txBody>
-          <a:bodyPr/>
-          <a:lstStyle/>
-          <a:p>
-            <a:endParaRPr lang="en-US"/>
-          </a:p>
-        </p:txBody>
-      </p:sp>
-      <p:sp>
-        <p:nvSpPr>
-          <p:cNvPr id="5" name="Text 3"/>
-          <p:cNvSpPr/>
-          <p:nvPr/>
-        </p:nvSpPr>
-        <p:spPr>
-          <a:xfrm>
-            <a:off x="777240" y="1783080"/>
-            <a:ext cx="1097280" cy="1097280"/>
-          </a:xfrm>
-          <a:prstGeom prst="rect">
-            <a:avLst/>
-          </a:prstGeom>
-          <a:noFill/>
-          <a:ln/>
-        </p:spPr>
-        <p:txBody>
-          <a:bodyPr wrap="square" lIns="0" tIns="0" rIns="0" bIns="0" rtlCol="0" anchor="ctr"/>
-          <a:lstStyle/>
-          <a:p>
-            <a:pPr marL="0" indent="0">
-              <a:buNone/>
-            </a:pPr>
-            <a:r>
-              <a:rPr lang="en-US" sz="7200" b="1" dirty="0">
-                <a:solidFill>
-                  <a:srgbClr val="BFE9E4"/>
+              <a:t>Scopul</a:t>
+            </a:r>
+            <a:r>
+              <a:rPr lang="en-US" sz="3200" b="1" dirty="0">
+                <a:solidFill>
+                  <a:srgbClr val="0E1B2A"/>
                 </a:solidFill>
                 <a:latin typeface="Georgia" pitchFamily="34" charset="0"/>
                 <a:ea typeface="Georgia" pitchFamily="34" charset="-122"/>
                 <a:cs typeface="Georgia" pitchFamily="34" charset="-120"/>
               </a:rPr>
-              <a:t>“</a:t>
-            </a:r>
-            <a:endParaRPr lang="en-US" sz="7200" dirty="0"/>
-          </a:p>
-        </p:txBody>
-      </p:sp>
-      <p:sp>
-        <p:nvSpPr>
-          <p:cNvPr id="6" name="Text 4"/>
-          <p:cNvSpPr/>
-          <p:nvPr/>
-        </p:nvSpPr>
-        <p:spPr>
-          <a:xfrm>
-            <a:off x="1051560" y="2697480"/>
-            <a:ext cx="3931920" cy="1828800"/>
-          </a:xfrm>
-          <a:prstGeom prst="rect">
-            <a:avLst/>
-          </a:prstGeom>
-          <a:noFill/>
-          <a:ln/>
-        </p:spPr>
-        <p:txBody>
-          <a:bodyPr wrap="square" lIns="0" tIns="0" rIns="0" bIns="0" rtlCol="0" anchor="t"/>
-          <a:lstStyle/>
-          <a:p>
-            <a:pPr marL="0" indent="0">
-              <a:lnSpc>
-                <a:spcPct val="115000"/>
-              </a:lnSpc>
-              <a:buNone/>
-            </a:pPr>
-            <a:r>
-              <a:rPr lang="en-US" sz="1900" i="1" dirty="0">
-                <a:solidFill>
-                  <a:srgbClr val="FFFFFF"/>
+              <a:t> </a:t>
+            </a:r>
+            <a:r>
+              <a:rPr lang="en-US" sz="3200" b="1" dirty="0" err="1">
+                <a:solidFill>
+                  <a:srgbClr val="0E1B2A"/>
                 </a:solidFill>
                 <a:latin typeface="Georgia" pitchFamily="34" charset="0"/>
                 <a:ea typeface="Georgia" pitchFamily="34" charset="-122"/>
                 <a:cs typeface="Georgia" pitchFamily="34" charset="-120"/>
               </a:rPr>
-              <a:t>Multe proiecte se concentreaza pe hardware, dar neglijeaza software-ul — la fel de important, daca nu chiar mai important.</a:t>
-            </a:r>
-            <a:endParaRPr lang="en-US" sz="1900" dirty="0"/>
-          </a:p>
-        </p:txBody>
-      </p:sp>
-      <p:sp>
-        <p:nvSpPr>
-          <p:cNvPr id="7" name="Text 5"/>
-          <p:cNvSpPr/>
-          <p:nvPr/>
-        </p:nvSpPr>
-        <p:spPr>
-          <a:xfrm>
-            <a:off x="1051560" y="5074920"/>
-            <a:ext cx="3931920" cy="548640"/>
+              <a:t>temei</a:t>
+            </a:r>
+            <a:endParaRPr lang="en-US" sz="3200" dirty="0"/>
+          </a:p>
+        </p:txBody>
+      </p:sp>
+      <p:sp>
+        <p:nvSpPr>
+          <p:cNvPr id="30" name="Text Lead"/>
+          <p:cNvSpPr/>
+          <p:nvPr/>
+        </p:nvSpPr>
+        <p:spPr>
+          <a:xfrm>
+            <a:off x="640080" y="1783080"/>
+            <a:ext cx="10972800" cy="822960"/>
           </a:xfrm>
           <a:prstGeom prst="rect">
             <a:avLst/>
@@ -3056,33 +4601,36 @@
           <a:bodyPr wrap="square" lIns="0" tIns="0" rIns="0" bIns="0" rtlCol="0" anchor="t"/>
           <a:lstStyle/>
           <a:p>
-            <a:pPr marL="0" indent="0">
-              <a:buNone/>
-            </a:pPr>
-            <a:r>
-              <a:rPr lang="en-US" sz="1200" b="1" dirty="0">
-                <a:solidFill>
-                  <a:srgbClr val="BFE9E4"/>
-                </a:solidFill>
-                <a:latin typeface="Calibri" pitchFamily="34" charset="0"/>
-                <a:ea typeface="Calibri" pitchFamily="34" charset="-122"/>
-                <a:cs typeface="Calibri" pitchFamily="34" charset="-120"/>
-              </a:rPr>
-              <a:t>— observatia care a definit directia proiectului</a:t>
-            </a:r>
-            <a:endParaRPr lang="en-US" sz="1200" dirty="0"/>
-          </a:p>
-        </p:txBody>
-      </p:sp>
-      <p:sp>
-        <p:nvSpPr>
-          <p:cNvPr id="8" name="Shape 6"/>
-          <p:cNvSpPr/>
-          <p:nvPr/>
-        </p:nvSpPr>
-        <p:spPr>
-          <a:xfrm>
-            <a:off x="5715000" y="1920240"/>
+            <a:pPr marL="0" indent="0" algn="l">
+              <a:lnSpc>
+                <a:spcPct val="120000"/>
+              </a:lnSpc>
+              <a:buNone/>
+            </a:pPr>
+            <a:r>
+              <a:rPr lang="en-US" sz="1700" dirty="0">
+                <a:solidFill>
+                  <a:srgbClr val="5C6B79"/>
+                </a:solidFill>
+                <a:latin typeface="Calibri" pitchFamily="34" charset="0"/>
+                <a:ea typeface="Calibri" pitchFamily="34" charset="-122"/>
+                <a:cs typeface="Calibri" pitchFamily="34" charset="-120"/>
+              </a:rPr>
+              <a:t>Proiectarea si implementarea unui sistem integrat hardware-software care controleaza o mana robotica cu cinci grade de libertate, printr-o interfata web accesibila din orice browser, cu raspuns in timp real si fara instalarea unei aplicatii dedicate.</a:t>
+            </a:r>
+            <a:endParaRPr lang="en-US" sz="1700" dirty="0"/>
+          </a:p>
+        </p:txBody>
+      </p:sp>
+      <p:sp>
+        <p:nvSpPr>
+          <p:cNvPr id="31" name="Shape Circle 1"/>
+          <p:cNvSpPr/>
+          <p:nvPr/>
+        </p:nvSpPr>
+        <p:spPr>
+          <a:xfrm>
+            <a:off x="2033016" y="3063240"/>
             <a:ext cx="566928" cy="566928"/>
           </a:xfrm>
           <a:prstGeom prst="ellipse">
@@ -3103,13 +4651,13 @@
       </p:sp>
       <p:sp>
         <p:nvSpPr>
-          <p:cNvPr id="9" name="Text 7"/>
-          <p:cNvSpPr/>
-          <p:nvPr/>
-        </p:nvSpPr>
-        <p:spPr>
-          <a:xfrm>
-            <a:off x="5715000" y="1920240"/>
+          <p:cNvPr id="32" name="Text Num 1"/>
+          <p:cNvSpPr/>
+          <p:nvPr/>
+        </p:nvSpPr>
+        <p:spPr>
+          <a:xfrm>
+            <a:off x="2033016" y="3063240"/>
             <a:ext cx="566928" cy="566928"/>
           </a:xfrm>
           <a:prstGeom prst="rect">
@@ -3142,30 +4690,30 @@
       </p:sp>
       <p:sp>
         <p:nvSpPr>
-          <p:cNvPr id="10" name="Text 8"/>
-          <p:cNvSpPr/>
-          <p:nvPr/>
-        </p:nvSpPr>
-        <p:spPr>
-          <a:xfrm>
-            <a:off x="6446520" y="1865376"/>
-            <a:ext cx="5029200" cy="457200"/>
-          </a:xfrm>
-          <a:prstGeom prst="rect">
-            <a:avLst/>
-          </a:prstGeom>
-          <a:noFill/>
-          <a:ln/>
-        </p:spPr>
-        <p:txBody>
-          <a:bodyPr wrap="square" lIns="0" tIns="0" rIns="0" bIns="0" rtlCol="0" anchor="ctr"/>
-          <a:lstStyle/>
-          <a:p>
-            <a:pPr marL="0" indent="0">
-              <a:buNone/>
-            </a:pPr>
-            <a:r>
-              <a:rPr lang="en-US" sz="1700" b="1" dirty="0">
+          <p:cNvPr id="33" name="Text Title 1"/>
+          <p:cNvSpPr/>
+          <p:nvPr/>
+        </p:nvSpPr>
+        <p:spPr>
+          <a:xfrm>
+            <a:off x="640080" y="3767328"/>
+            <a:ext cx="3352800" cy="502920"/>
+          </a:xfrm>
+          <a:prstGeom prst="rect">
+            <a:avLst/>
+          </a:prstGeom>
+          <a:noFill/>
+          <a:ln/>
+        </p:spPr>
+        <p:txBody>
+          <a:bodyPr wrap="square" lIns="0" tIns="0" rIns="0" bIns="0" rtlCol="0" anchor="t"/>
+          <a:lstStyle/>
+          <a:p>
+            <a:pPr marL="0" indent="0" algn="ctr">
+              <a:buNone/>
+            </a:pPr>
+            <a:r>
+              <a:rPr lang="en-US" sz="1500" b="1" dirty="0">
                 <a:solidFill>
                   <a:srgbClr val="0E1B2A"/>
                 </a:solidFill>
@@ -3173,22 +4721,22 @@
                 <a:ea typeface="Calibri" pitchFamily="34" charset="-122"/>
                 <a:cs typeface="Calibri" pitchFamily="34" charset="-120"/>
               </a:rPr>
-              <a:t>Tema intens studiata</a:t>
-            </a:r>
-            <a:endParaRPr lang="en-US" sz="1700" dirty="0"/>
-          </a:p>
-        </p:txBody>
-      </p:sp>
-      <p:sp>
-        <p:nvSpPr>
-          <p:cNvPr id="11" name="Text 9"/>
-          <p:cNvSpPr/>
-          <p:nvPr/>
-        </p:nvSpPr>
-        <p:spPr>
-          <a:xfrm>
-            <a:off x="6446520" y="2359152"/>
-            <a:ext cx="5074920" cy="868680"/>
+              <a:t>Control precis, deget cu deget</a:t>
+            </a:r>
+            <a:endParaRPr lang="en-US" sz="1500" dirty="0"/>
+          </a:p>
+        </p:txBody>
+      </p:sp>
+      <p:sp>
+        <p:nvSpPr>
+          <p:cNvPr id="34" name="Text Desc 1"/>
+          <p:cNvSpPr/>
+          <p:nvPr/>
+        </p:nvSpPr>
+        <p:spPr>
+          <a:xfrm>
+            <a:off x="640080" y="4290440"/>
+            <a:ext cx="3352800" cy="1188720"/>
           </a:xfrm>
           <a:prstGeom prst="rect">
             <a:avLst/>
@@ -3200,14 +4748,14 @@
           <a:bodyPr wrap="square" lIns="0" tIns="0" rIns="0" bIns="0" rtlCol="0" anchor="t"/>
           <a:lstStyle/>
           <a:p>
-            <a:pPr marL="0" indent="0">
+            <a:pPr marL="0" indent="0" algn="ctr">
               <a:lnSpc>
-                <a:spcPct val="108000"/>
+                <a:spcPct val="112000"/>
               </a:lnSpc>
               <a:buNone/>
             </a:pPr>
             <a:r>
-              <a:rPr lang="en-US" sz="1350" dirty="0">
+              <a:rPr lang="en-US" sz="1250" dirty="0">
                 <a:solidFill>
                   <a:srgbClr val="5C6B79"/>
                 </a:solidFill>
@@ -3215,21 +4763,21 @@
                 <a:ea typeface="Calibri" pitchFamily="34" charset="-122"/>
                 <a:cs typeface="Calibri" pitchFamily="34" charset="-120"/>
               </a:rPr>
-              <a:t>Mainile robotice au aplicatii in medicina, industrie, protezare si chiar explorare spatiala.</a:t>
-            </a:r>
-            <a:endParaRPr lang="en-US" sz="1350" dirty="0"/>
-          </a:p>
-        </p:txBody>
-      </p:sp>
-      <p:sp>
-        <p:nvSpPr>
-          <p:cNvPr id="12" name="Shape 10"/>
-          <p:cNvSpPr/>
-          <p:nvPr/>
-        </p:nvSpPr>
-        <p:spPr>
-          <a:xfrm>
-            <a:off x="5715000" y="3246120"/>
+              <a:t>Fiecare deget este actionat independent printr-un servomotor dedicat, cu o rezolutie unghiulara minima de 1°.</a:t>
+            </a:r>
+            <a:endParaRPr lang="en-US" sz="1250" dirty="0"/>
+          </a:p>
+        </p:txBody>
+      </p:sp>
+      <p:sp>
+        <p:nvSpPr>
+          <p:cNvPr id="35" name="Shape Circle 2"/>
+          <p:cNvSpPr/>
+          <p:nvPr/>
+        </p:nvSpPr>
+        <p:spPr>
+          <a:xfrm>
+            <a:off x="5843016" y="3063240"/>
             <a:ext cx="566928" cy="566928"/>
           </a:xfrm>
           <a:prstGeom prst="ellipse">
@@ -3250,13 +4798,13 @@
       </p:sp>
       <p:sp>
         <p:nvSpPr>
-          <p:cNvPr id="13" name="Text 11"/>
-          <p:cNvSpPr/>
-          <p:nvPr/>
-        </p:nvSpPr>
-        <p:spPr>
-          <a:xfrm>
-            <a:off x="5715000" y="3246120"/>
+          <p:cNvPr id="36" name="Text Num 2"/>
+          <p:cNvSpPr/>
+          <p:nvPr/>
+        </p:nvSpPr>
+        <p:spPr>
+          <a:xfrm>
+            <a:off x="5843016" y="3063240"/>
             <a:ext cx="566928" cy="566928"/>
           </a:xfrm>
           <a:prstGeom prst="rect">
@@ -3289,30 +4837,30 @@
       </p:sp>
       <p:sp>
         <p:nvSpPr>
-          <p:cNvPr id="14" name="Text 12"/>
-          <p:cNvSpPr/>
-          <p:nvPr/>
-        </p:nvSpPr>
-        <p:spPr>
-          <a:xfrm>
-            <a:off x="6446520" y="3191256"/>
-            <a:ext cx="5029200" cy="457200"/>
-          </a:xfrm>
-          <a:prstGeom prst="rect">
-            <a:avLst/>
-          </a:prstGeom>
-          <a:noFill/>
-          <a:ln/>
-        </p:spPr>
-        <p:txBody>
-          <a:bodyPr wrap="square" lIns="0" tIns="0" rIns="0" bIns="0" rtlCol="0" anchor="ctr"/>
-          <a:lstStyle/>
-          <a:p>
-            <a:pPr marL="0" indent="0">
-              <a:buNone/>
-            </a:pPr>
-            <a:r>
-              <a:rPr lang="en-US" sz="1700" b="1" dirty="0">
+          <p:cNvPr id="37" name="Text Title 2"/>
+          <p:cNvSpPr/>
+          <p:nvPr/>
+        </p:nvSpPr>
+        <p:spPr>
+          <a:xfrm>
+            <a:off x="4450080" y="3767328"/>
+            <a:ext cx="3352800" cy="502920"/>
+          </a:xfrm>
+          <a:prstGeom prst="rect">
+            <a:avLst/>
+          </a:prstGeom>
+          <a:noFill/>
+          <a:ln/>
+        </p:spPr>
+        <p:txBody>
+          <a:bodyPr wrap="square" lIns="0" tIns="0" rIns="0" bIns="0" rtlCol="0" anchor="t"/>
+          <a:lstStyle/>
+          <a:p>
+            <a:pPr marL="0" indent="0" algn="ctr">
+              <a:buNone/>
+            </a:pPr>
+            <a:r>
+              <a:rPr lang="en-US" sz="1500" b="1" dirty="0">
                 <a:solidFill>
                   <a:srgbClr val="0E1B2A"/>
                 </a:solidFill>
@@ -3320,22 +4868,22 @@
                 <a:ea typeface="Calibri" pitchFamily="34" charset="-122"/>
                 <a:cs typeface="Calibri" pitchFamily="34" charset="-120"/>
               </a:rPr>
-              <a:t>Provocarea reala e in software</a:t>
-            </a:r>
-            <a:endParaRPr lang="en-US" sz="1700" dirty="0"/>
-          </a:p>
-        </p:txBody>
-      </p:sp>
-      <p:sp>
-        <p:nvSpPr>
-          <p:cNvPr id="15" name="Text 13"/>
-          <p:cNvSpPr/>
-          <p:nvPr/>
-        </p:nvSpPr>
-        <p:spPr>
-          <a:xfrm>
-            <a:off x="6446520" y="3685032"/>
-            <a:ext cx="5074920" cy="868680"/>
+              <a:t>Comunicare in timp real</a:t>
+            </a:r>
+            <a:endParaRPr lang="en-US" sz="1500" dirty="0"/>
+          </a:p>
+        </p:txBody>
+      </p:sp>
+      <p:sp>
+        <p:nvSpPr>
+          <p:cNvPr id="38" name="Text Desc 2"/>
+          <p:cNvSpPr/>
+          <p:nvPr/>
+        </p:nvSpPr>
+        <p:spPr>
+          <a:xfrm>
+            <a:off x="4450080" y="4290440"/>
+            <a:ext cx="3352800" cy="1188720"/>
           </a:xfrm>
           <a:prstGeom prst="rect">
             <a:avLst/>
@@ -3347,14 +4895,14 @@
           <a:bodyPr wrap="square" lIns="0" tIns="0" rIns="0" bIns="0" rtlCol="0" anchor="t"/>
           <a:lstStyle/>
           <a:p>
-            <a:pPr marL="0" indent="0">
+            <a:pPr marL="0" indent="0" algn="ctr">
               <a:lnSpc>
-                <a:spcPct val="108000"/>
+                <a:spcPct val="112000"/>
               </a:lnSpc>
               <a:buNone/>
             </a:pPr>
             <a:r>
-              <a:rPr lang="en-US" sz="1350" dirty="0">
+              <a:rPr lang="en-US" sz="1250" dirty="0">
                 <a:solidFill>
                   <a:srgbClr val="5C6B79"/>
                 </a:solidFill>
@@ -3362,21 +4910,21 @@
                 <a:ea typeface="Calibri" pitchFamily="34" charset="-122"/>
                 <a:cs typeface="Calibri" pitchFamily="34" charset="-120"/>
               </a:rPr>
-              <a:t>Designurile simple se opresc la mecanica; saltul de performanta cere control in timp real si o arhitectura solida.</a:t>
-            </a:r>
-            <a:endParaRPr lang="en-US" sz="1350" dirty="0"/>
-          </a:p>
-        </p:txBody>
-      </p:sp>
-      <p:sp>
-        <p:nvSpPr>
-          <p:cNvPr id="16" name="Shape 14"/>
-          <p:cNvSpPr/>
-          <p:nvPr/>
-        </p:nvSpPr>
-        <p:spPr>
-          <a:xfrm>
-            <a:off x="5715000" y="4572000"/>
+              <a:t>Server web asincron pe ESP32, cu latente end-to-end de 10-30 ms, sub pragul de perceptie umana.</a:t>
+            </a:r>
+            <a:endParaRPr lang="en-US" sz="1250" dirty="0"/>
+          </a:p>
+        </p:txBody>
+      </p:sp>
+      <p:sp>
+        <p:nvSpPr>
+          <p:cNvPr id="39" name="Shape Circle 3"/>
+          <p:cNvSpPr/>
+          <p:nvPr/>
+        </p:nvSpPr>
+        <p:spPr>
+          <a:xfrm>
+            <a:off x="9653016" y="3063240"/>
             <a:ext cx="566928" cy="566928"/>
           </a:xfrm>
           <a:prstGeom prst="ellipse">
@@ -3397,13 +4945,13 @@
       </p:sp>
       <p:sp>
         <p:nvSpPr>
-          <p:cNvPr id="17" name="Text 15"/>
-          <p:cNvSpPr/>
-          <p:nvPr/>
-        </p:nvSpPr>
-        <p:spPr>
-          <a:xfrm>
-            <a:off x="5715000" y="4572000"/>
+          <p:cNvPr id="40" name="Text Num 3"/>
+          <p:cNvSpPr/>
+          <p:nvPr/>
+        </p:nvSpPr>
+        <p:spPr>
+          <a:xfrm>
+            <a:off x="9653016" y="3063240"/>
             <a:ext cx="566928" cy="566928"/>
           </a:xfrm>
           <a:prstGeom prst="rect">
@@ -3436,30 +4984,30 @@
       </p:sp>
       <p:sp>
         <p:nvSpPr>
-          <p:cNvPr id="18" name="Text 16"/>
-          <p:cNvSpPr/>
-          <p:nvPr/>
-        </p:nvSpPr>
-        <p:spPr>
-          <a:xfrm>
-            <a:off x="6446520" y="4517136"/>
-            <a:ext cx="5029200" cy="457200"/>
-          </a:xfrm>
-          <a:prstGeom prst="rect">
-            <a:avLst/>
-          </a:prstGeom>
-          <a:noFill/>
-          <a:ln/>
-        </p:spPr>
-        <p:txBody>
-          <a:bodyPr wrap="square" lIns="0" tIns="0" rIns="0" bIns="0" rtlCol="0" anchor="ctr"/>
-          <a:lstStyle/>
-          <a:p>
-            <a:pPr marL="0" indent="0">
-              <a:buNone/>
-            </a:pPr>
-            <a:r>
-              <a:rPr lang="en-US" sz="1700" b="1" dirty="0">
+          <p:cNvPr id="41" name="Text Title 3"/>
+          <p:cNvSpPr/>
+          <p:nvPr/>
+        </p:nvSpPr>
+        <p:spPr>
+          <a:xfrm>
+            <a:off x="8260080" y="3767328"/>
+            <a:ext cx="3352800" cy="502920"/>
+          </a:xfrm>
+          <a:prstGeom prst="rect">
+            <a:avLst/>
+          </a:prstGeom>
+          <a:noFill/>
+          <a:ln/>
+        </p:spPr>
+        <p:txBody>
+          <a:bodyPr wrap="square" lIns="0" tIns="0" rIns="0" bIns="0" rtlCol="0" anchor="t"/>
+          <a:lstStyle/>
+          <a:p>
+            <a:pPr marL="0" indent="0" algn="ctr">
+              <a:buNone/>
+            </a:pPr>
+            <a:r>
+              <a:rPr lang="en-US" sz="1500" b="1" dirty="0">
                 <a:solidFill>
                   <a:srgbClr val="0E1B2A"/>
                 </a:solidFill>
@@ -3467,22 +5015,22 @@
                 <a:ea typeface="Calibri" pitchFamily="34" charset="-122"/>
                 <a:cs typeface="Calibri" pitchFamily="34" charset="-120"/>
               </a:rPr>
-              <a:t>Accesibila si unui student</a:t>
-            </a:r>
-            <a:endParaRPr lang="en-US" sz="1700" dirty="0"/>
-          </a:p>
-        </p:txBody>
-      </p:sp>
-      <p:sp>
-        <p:nvSpPr>
-          <p:cNvPr id="19" name="Text 17"/>
-          <p:cNvSpPr/>
-          <p:nvPr/>
-        </p:nvSpPr>
-        <p:spPr>
-          <a:xfrm>
-            <a:off x="6446520" y="5010912"/>
-            <a:ext cx="5074920" cy="868680"/>
+              <a:t>Arhitectura robusta si scalabila</a:t>
+            </a:r>
+            <a:endParaRPr lang="en-US" sz="1500" dirty="0"/>
+          </a:p>
+        </p:txBody>
+      </p:sp>
+      <p:sp>
+        <p:nvSpPr>
+          <p:cNvPr id="42" name="Text Desc 3"/>
+          <p:cNvSpPr/>
+          <p:nvPr/>
+        </p:nvSpPr>
+        <p:spPr>
+          <a:xfrm>
+            <a:off x="8260080" y="4290440"/>
+            <a:ext cx="3352800" cy="1188720"/>
           </a:xfrm>
           <a:prstGeom prst="rect">
             <a:avLst/>
@@ -3494,14 +5042,14 @@
           <a:bodyPr wrap="square" lIns="0" tIns="0" rIns="0" bIns="0" rtlCol="0" anchor="t"/>
           <a:lstStyle/>
           <a:p>
-            <a:pPr marL="0" indent="0">
+            <a:pPr marL="0" indent="0" algn="ctr">
               <a:lnSpc>
-                <a:spcPct val="108000"/>
+                <a:spcPct val="112000"/>
               </a:lnSpc>
               <a:buNone/>
             </a:pPr>
             <a:r>
-              <a:rPr lang="en-US" sz="1350" dirty="0">
+              <a:rPr lang="en-US" sz="1250" dirty="0">
                 <a:solidFill>
                   <a:srgbClr val="5C6B79"/>
                 </a:solidFill>
@@ -3509,9 +5057,9 @@
                 <a:ea typeface="Calibri" pitchFamily="34" charset="-122"/>
                 <a:cs typeface="Calibri" pitchFamily="34" charset="-120"/>
               </a:rPr>
-              <a:t>Proiectul demonstreaza ca tema poate fi abordata printr-o integrare atenta hardware–software.</a:t>
-            </a:r>
-            <a:endParaRPr lang="en-US" sz="1350" dirty="0"/>
+              <a:t>Separare dual-core si masina de stari (FSM) non-blocanta, pregatita pentru extinderi (senzori, EMG, control AI).</a:t>
+            </a:r>
+            <a:endParaRPr lang="en-US" sz="1250" dirty="0"/>
           </a:p>
         </p:txBody>
       </p:sp>
@@ -3602,6 +5150,923 @@
 </file>
 
 <file path=ppt/slides/slide3.xml><?xml version="1.0" encoding="utf-8"?>
+<p:sld xmlns:a="http://schemas.openxmlformats.org/drawingml/2006/main" xmlns:r="http://schemas.openxmlformats.org/officeDocument/2006/relationships" xmlns:p="http://schemas.openxmlformats.org/presentationml/2006/main">
+  <p:cSld>
+    <p:bg>
+      <p:bgPr>
+        <a:solidFill>
+          <a:srgbClr val="FFFFFF"/>
+        </a:solidFill>
+        <a:effectLst/>
+      </p:bgPr>
+    </p:bg>
+    <p:spTree>
+      <p:nvGrpSpPr>
+        <p:cNvPr id="1" name="">
+          <a:extLst>
+            <a:ext uri="{FF2B5EF4-FFF2-40B4-BE49-F238E27FC236}">
+              <a16:creationId xmlns:a16="http://schemas.microsoft.com/office/drawing/2014/main" id="{2B971FC3-8B42-EA48-7E64-82B769EFD9F6}"/>
+            </a:ext>
+          </a:extLst>
+        </p:cNvPr>
+        <p:cNvGrpSpPr/>
+        <p:nvPr/>
+      </p:nvGrpSpPr>
+      <p:grpSpPr>
+        <a:xfrm>
+          <a:off x="0" y="0"/>
+          <a:ext cx="0" cy="0"/>
+          <a:chOff x="0" y="0"/>
+          <a:chExt cx="0" cy="0"/>
+        </a:xfrm>
+      </p:grpSpPr>
+      <p:sp>
+        <p:nvSpPr>
+          <p:cNvPr id="2" name="Text 0">
+            <a:extLst>
+              <a:ext uri="{FF2B5EF4-FFF2-40B4-BE49-F238E27FC236}">
+                <a16:creationId xmlns:a16="http://schemas.microsoft.com/office/drawing/2014/main" id="{55A29F5E-ADF7-61E2-9D60-BA1673F6A1E6}"/>
+              </a:ext>
+            </a:extLst>
+          </p:cNvPr>
+          <p:cNvSpPr/>
+          <p:nvPr/>
+        </p:nvSpPr>
+        <p:spPr>
+          <a:xfrm>
+            <a:off x="640080" y="475488"/>
+            <a:ext cx="8229600" cy="292608"/>
+          </a:xfrm>
+          <a:prstGeom prst="rect">
+            <a:avLst/>
+          </a:prstGeom>
+          <a:noFill/>
+          <a:ln/>
+        </p:spPr>
+        <p:txBody>
+          <a:bodyPr wrap="square" lIns="0" tIns="0" rIns="0" bIns="0" rtlCol="0" anchor="ctr"/>
+          <a:lstStyle/>
+          <a:p>
+            <a:pPr marL="0" indent="0" algn="l">
+              <a:buNone/>
+            </a:pPr>
+            <a:r>
+              <a:rPr lang="en-US" sz="1200" b="1" kern="0" spc="300" dirty="0">
+                <a:solidFill>
+                  <a:srgbClr val="0B7E77"/>
+                </a:solidFill>
+                <a:latin typeface="Calibri" pitchFamily="34" charset="0"/>
+                <a:ea typeface="Calibri" pitchFamily="34" charset="-122"/>
+                <a:cs typeface="Calibri" pitchFamily="34" charset="-120"/>
+              </a:rPr>
+              <a:t>DE CE ACEASTA TEMA</a:t>
+            </a:r>
+            <a:endParaRPr lang="en-US" sz="1200" dirty="0"/>
+          </a:p>
+        </p:txBody>
+      </p:sp>
+      <p:sp>
+        <p:nvSpPr>
+          <p:cNvPr id="3" name="Text 1">
+            <a:extLst>
+              <a:ext uri="{FF2B5EF4-FFF2-40B4-BE49-F238E27FC236}">
+                <a16:creationId xmlns:a16="http://schemas.microsoft.com/office/drawing/2014/main" id="{D36A6D5A-4BE1-57E5-55AE-8200236DFF3A}"/>
+              </a:ext>
+            </a:extLst>
+          </p:cNvPr>
+          <p:cNvSpPr/>
+          <p:nvPr/>
+        </p:nvSpPr>
+        <p:spPr>
+          <a:xfrm>
+            <a:off x="640080" y="768096"/>
+            <a:ext cx="10972800" cy="868680"/>
+          </a:xfrm>
+          <a:prstGeom prst="rect">
+            <a:avLst/>
+          </a:prstGeom>
+          <a:noFill/>
+          <a:ln/>
+        </p:spPr>
+        <p:txBody>
+          <a:bodyPr wrap="square" lIns="0" tIns="0" rIns="0" bIns="0" rtlCol="0" anchor="t"/>
+          <a:lstStyle/>
+          <a:p>
+            <a:pPr marL="0" indent="0" algn="l">
+              <a:buNone/>
+            </a:pPr>
+            <a:r>
+              <a:rPr lang="en-US" sz="3200" b="1" dirty="0">
+                <a:solidFill>
+                  <a:srgbClr val="0E1B2A"/>
+                </a:solidFill>
+                <a:latin typeface="Georgia" pitchFamily="34" charset="0"/>
+                <a:ea typeface="Georgia" pitchFamily="34" charset="-122"/>
+                <a:cs typeface="Georgia" pitchFamily="34" charset="-120"/>
+              </a:rPr>
+              <a:t>Motivatia alegerii temei</a:t>
+            </a:r>
+            <a:endParaRPr lang="en-US" sz="3200" dirty="0"/>
+          </a:p>
+        </p:txBody>
+      </p:sp>
+      <p:sp>
+        <p:nvSpPr>
+          <p:cNvPr id="4" name="Shape 2">
+            <a:extLst>
+              <a:ext uri="{FF2B5EF4-FFF2-40B4-BE49-F238E27FC236}">
+                <a16:creationId xmlns:a16="http://schemas.microsoft.com/office/drawing/2014/main" id="{3675F717-6A1C-50B0-AA7D-20D01822E6AD}"/>
+              </a:ext>
+            </a:extLst>
+          </p:cNvPr>
+          <p:cNvSpPr/>
+          <p:nvPr/>
+        </p:nvSpPr>
+        <p:spPr>
+          <a:xfrm>
+            <a:off x="640080" y="1874520"/>
+            <a:ext cx="4572000" cy="3977640"/>
+          </a:xfrm>
+          <a:prstGeom prst="roundRect">
+            <a:avLst>
+              <a:gd name="adj" fmla="val 2069"/>
+            </a:avLst>
+          </a:prstGeom>
+          <a:solidFill>
+            <a:srgbClr val="11A39A"/>
+          </a:solidFill>
+          <a:ln/>
+          <a:effectLst>
+            <a:outerShdw blurRad="114300" dist="38100" dir="7200000" algn="bl" rotWithShape="0">
+              <a:srgbClr val="0E1B2A">
+                <a:alpha val="18000"/>
+              </a:srgbClr>
+            </a:outerShdw>
+          </a:effectLst>
+        </p:spPr>
+        <p:txBody>
+          <a:bodyPr/>
+          <a:lstStyle/>
+          <a:p>
+            <a:endParaRPr lang="en-US"/>
+          </a:p>
+        </p:txBody>
+      </p:sp>
+      <p:sp>
+        <p:nvSpPr>
+          <p:cNvPr id="5" name="Text 3">
+            <a:extLst>
+              <a:ext uri="{FF2B5EF4-FFF2-40B4-BE49-F238E27FC236}">
+                <a16:creationId xmlns:a16="http://schemas.microsoft.com/office/drawing/2014/main" id="{8C622931-AE25-E4CB-2EC3-EEBC3BB942C6}"/>
+              </a:ext>
+            </a:extLst>
+          </p:cNvPr>
+          <p:cNvSpPr/>
+          <p:nvPr/>
+        </p:nvSpPr>
+        <p:spPr>
+          <a:xfrm>
+            <a:off x="777240" y="1783080"/>
+            <a:ext cx="1097280" cy="1097280"/>
+          </a:xfrm>
+          <a:prstGeom prst="rect">
+            <a:avLst/>
+          </a:prstGeom>
+          <a:noFill/>
+          <a:ln/>
+        </p:spPr>
+        <p:txBody>
+          <a:bodyPr wrap="square" lIns="0" tIns="0" rIns="0" bIns="0" rtlCol="0" anchor="ctr"/>
+          <a:lstStyle/>
+          <a:p>
+            <a:pPr marL="0" indent="0">
+              <a:buNone/>
+            </a:pPr>
+            <a:r>
+              <a:rPr lang="en-US" sz="7200" b="1" dirty="0">
+                <a:solidFill>
+                  <a:srgbClr val="BFE9E4"/>
+                </a:solidFill>
+                <a:latin typeface="Georgia" pitchFamily="34" charset="0"/>
+                <a:ea typeface="Georgia" pitchFamily="34" charset="-122"/>
+                <a:cs typeface="Georgia" pitchFamily="34" charset="-120"/>
+              </a:rPr>
+              <a:t>“</a:t>
+            </a:r>
+            <a:endParaRPr lang="en-US" sz="7200" dirty="0"/>
+          </a:p>
+        </p:txBody>
+      </p:sp>
+      <p:sp>
+        <p:nvSpPr>
+          <p:cNvPr id="6" name="Text 4">
+            <a:extLst>
+              <a:ext uri="{FF2B5EF4-FFF2-40B4-BE49-F238E27FC236}">
+                <a16:creationId xmlns:a16="http://schemas.microsoft.com/office/drawing/2014/main" id="{A8A30002-104E-087F-AF3C-0AB5BE3B6324}"/>
+              </a:ext>
+            </a:extLst>
+          </p:cNvPr>
+          <p:cNvSpPr/>
+          <p:nvPr/>
+        </p:nvSpPr>
+        <p:spPr>
+          <a:xfrm>
+            <a:off x="1051560" y="2697480"/>
+            <a:ext cx="3931920" cy="1828800"/>
+          </a:xfrm>
+          <a:prstGeom prst="rect">
+            <a:avLst/>
+          </a:prstGeom>
+          <a:noFill/>
+          <a:ln/>
+        </p:spPr>
+        <p:txBody>
+          <a:bodyPr wrap="square" lIns="0" tIns="0" rIns="0" bIns="0" rtlCol="0" anchor="t"/>
+          <a:lstStyle/>
+          <a:p>
+            <a:pPr marL="0" indent="0">
+              <a:lnSpc>
+                <a:spcPct val="115000"/>
+              </a:lnSpc>
+              <a:buNone/>
+            </a:pPr>
+            <a:r>
+              <a:rPr lang="en-US" sz="1900" i="1" dirty="0">
+                <a:solidFill>
+                  <a:srgbClr val="FFFFFF"/>
+                </a:solidFill>
+                <a:latin typeface="Georgia" pitchFamily="34" charset="0"/>
+                <a:ea typeface="Georgia" pitchFamily="34" charset="-122"/>
+                <a:cs typeface="Georgia" pitchFamily="34" charset="-120"/>
+              </a:rPr>
+              <a:t>Multe proiecte se concentreaza pe hardware, dar neglijeaza software-ul — la fel de important, daca nu chiar mai important.</a:t>
+            </a:r>
+            <a:endParaRPr lang="en-US" sz="1900" dirty="0"/>
+          </a:p>
+        </p:txBody>
+      </p:sp>
+      <p:sp>
+        <p:nvSpPr>
+          <p:cNvPr id="7" name="Text 5">
+            <a:extLst>
+              <a:ext uri="{FF2B5EF4-FFF2-40B4-BE49-F238E27FC236}">
+                <a16:creationId xmlns:a16="http://schemas.microsoft.com/office/drawing/2014/main" id="{4012960B-373C-7F8D-F399-2D5BEF6E6DEB}"/>
+              </a:ext>
+            </a:extLst>
+          </p:cNvPr>
+          <p:cNvSpPr/>
+          <p:nvPr/>
+        </p:nvSpPr>
+        <p:spPr>
+          <a:xfrm>
+            <a:off x="1051560" y="5074920"/>
+            <a:ext cx="3931920" cy="548640"/>
+          </a:xfrm>
+          <a:prstGeom prst="rect">
+            <a:avLst/>
+          </a:prstGeom>
+          <a:noFill/>
+          <a:ln/>
+        </p:spPr>
+        <p:txBody>
+          <a:bodyPr wrap="square" lIns="0" tIns="0" rIns="0" bIns="0" rtlCol="0" anchor="t"/>
+          <a:lstStyle/>
+          <a:p>
+            <a:pPr marL="0" indent="0">
+              <a:buNone/>
+            </a:pPr>
+            <a:r>
+              <a:rPr lang="en-US" sz="1200" b="1" dirty="0">
+                <a:solidFill>
+                  <a:srgbClr val="BFE9E4"/>
+                </a:solidFill>
+                <a:latin typeface="Calibri" pitchFamily="34" charset="0"/>
+                <a:ea typeface="Calibri" pitchFamily="34" charset="-122"/>
+                <a:cs typeface="Calibri" pitchFamily="34" charset="-120"/>
+              </a:rPr>
+              <a:t>— observatia care a definit directia proiectului</a:t>
+            </a:r>
+            <a:endParaRPr lang="en-US" sz="1200" dirty="0"/>
+          </a:p>
+        </p:txBody>
+      </p:sp>
+      <p:sp>
+        <p:nvSpPr>
+          <p:cNvPr id="8" name="Shape 6">
+            <a:extLst>
+              <a:ext uri="{FF2B5EF4-FFF2-40B4-BE49-F238E27FC236}">
+                <a16:creationId xmlns:a16="http://schemas.microsoft.com/office/drawing/2014/main" id="{CB757157-D6F7-A6B1-A997-DF52BC2F9509}"/>
+              </a:ext>
+            </a:extLst>
+          </p:cNvPr>
+          <p:cNvSpPr/>
+          <p:nvPr/>
+        </p:nvSpPr>
+        <p:spPr>
+          <a:xfrm>
+            <a:off x="5715000" y="1920240"/>
+            <a:ext cx="566928" cy="566928"/>
+          </a:xfrm>
+          <a:prstGeom prst="ellipse">
+            <a:avLst/>
+          </a:prstGeom>
+          <a:solidFill>
+            <a:srgbClr val="0E1B2A"/>
+          </a:solidFill>
+          <a:ln/>
+        </p:spPr>
+        <p:txBody>
+          <a:bodyPr/>
+          <a:lstStyle/>
+          <a:p>
+            <a:endParaRPr lang="en-US"/>
+          </a:p>
+        </p:txBody>
+      </p:sp>
+      <p:sp>
+        <p:nvSpPr>
+          <p:cNvPr id="9" name="Text 7">
+            <a:extLst>
+              <a:ext uri="{FF2B5EF4-FFF2-40B4-BE49-F238E27FC236}">
+                <a16:creationId xmlns:a16="http://schemas.microsoft.com/office/drawing/2014/main" id="{4452FEA6-4FFE-9349-F74A-7C3B87DE8D61}"/>
+              </a:ext>
+            </a:extLst>
+          </p:cNvPr>
+          <p:cNvSpPr/>
+          <p:nvPr/>
+        </p:nvSpPr>
+        <p:spPr>
+          <a:xfrm>
+            <a:off x="5715000" y="1920240"/>
+            <a:ext cx="566928" cy="566928"/>
+          </a:xfrm>
+          <a:prstGeom prst="rect">
+            <a:avLst/>
+          </a:prstGeom>
+          <a:noFill/>
+          <a:ln/>
+        </p:spPr>
+        <p:txBody>
+          <a:bodyPr wrap="square" lIns="0" tIns="0" rIns="0" bIns="0" rtlCol="0" anchor="ctr"/>
+          <a:lstStyle/>
+          <a:p>
+            <a:pPr marL="0" indent="0" algn="ctr">
+              <a:buNone/>
+            </a:pPr>
+            <a:r>
+              <a:rPr lang="en-US" sz="2000" b="1" dirty="0">
+                <a:solidFill>
+                  <a:srgbClr val="BFE9E4"/>
+                </a:solidFill>
+                <a:latin typeface="Georgia" pitchFamily="34" charset="0"/>
+                <a:ea typeface="Georgia" pitchFamily="34" charset="-122"/>
+                <a:cs typeface="Georgia" pitchFamily="34" charset="-120"/>
+              </a:rPr>
+              <a:t>1</a:t>
+            </a:r>
+            <a:endParaRPr lang="en-US" sz="2000" dirty="0"/>
+          </a:p>
+        </p:txBody>
+      </p:sp>
+      <p:sp>
+        <p:nvSpPr>
+          <p:cNvPr id="10" name="Text 8">
+            <a:extLst>
+              <a:ext uri="{FF2B5EF4-FFF2-40B4-BE49-F238E27FC236}">
+                <a16:creationId xmlns:a16="http://schemas.microsoft.com/office/drawing/2014/main" id="{909BB214-A8DB-2F43-1E0C-48EC2733EEC0}"/>
+              </a:ext>
+            </a:extLst>
+          </p:cNvPr>
+          <p:cNvSpPr/>
+          <p:nvPr/>
+        </p:nvSpPr>
+        <p:spPr>
+          <a:xfrm>
+            <a:off x="6446520" y="1865376"/>
+            <a:ext cx="5029200" cy="457200"/>
+          </a:xfrm>
+          <a:prstGeom prst="rect">
+            <a:avLst/>
+          </a:prstGeom>
+          <a:noFill/>
+          <a:ln/>
+        </p:spPr>
+        <p:txBody>
+          <a:bodyPr wrap="square" lIns="0" tIns="0" rIns="0" bIns="0" rtlCol="0" anchor="ctr"/>
+          <a:lstStyle/>
+          <a:p>
+            <a:pPr marL="0" indent="0">
+              <a:buNone/>
+            </a:pPr>
+            <a:r>
+              <a:rPr lang="en-US" sz="1700" b="1" dirty="0">
+                <a:solidFill>
+                  <a:srgbClr val="0E1B2A"/>
+                </a:solidFill>
+                <a:latin typeface="Calibri" pitchFamily="34" charset="0"/>
+                <a:ea typeface="Calibri" pitchFamily="34" charset="-122"/>
+                <a:cs typeface="Calibri" pitchFamily="34" charset="-120"/>
+              </a:rPr>
+              <a:t>Tema intens studiata</a:t>
+            </a:r>
+            <a:endParaRPr lang="en-US" sz="1700" dirty="0"/>
+          </a:p>
+        </p:txBody>
+      </p:sp>
+      <p:sp>
+        <p:nvSpPr>
+          <p:cNvPr id="11" name="Text 9">
+            <a:extLst>
+              <a:ext uri="{FF2B5EF4-FFF2-40B4-BE49-F238E27FC236}">
+                <a16:creationId xmlns:a16="http://schemas.microsoft.com/office/drawing/2014/main" id="{485B7218-E53B-DFB8-99C3-DABDD76D9635}"/>
+              </a:ext>
+            </a:extLst>
+          </p:cNvPr>
+          <p:cNvSpPr/>
+          <p:nvPr/>
+        </p:nvSpPr>
+        <p:spPr>
+          <a:xfrm>
+            <a:off x="6446520" y="2359152"/>
+            <a:ext cx="5074920" cy="868680"/>
+          </a:xfrm>
+          <a:prstGeom prst="rect">
+            <a:avLst/>
+          </a:prstGeom>
+          <a:noFill/>
+          <a:ln/>
+        </p:spPr>
+        <p:txBody>
+          <a:bodyPr wrap="square" lIns="0" tIns="0" rIns="0" bIns="0" rtlCol="0" anchor="t"/>
+          <a:lstStyle/>
+          <a:p>
+            <a:pPr marL="0" indent="0">
+              <a:lnSpc>
+                <a:spcPct val="108000"/>
+              </a:lnSpc>
+              <a:buNone/>
+            </a:pPr>
+            <a:r>
+              <a:rPr lang="en-US" sz="1350" dirty="0">
+                <a:solidFill>
+                  <a:srgbClr val="5C6B79"/>
+                </a:solidFill>
+                <a:latin typeface="Calibri" pitchFamily="34" charset="0"/>
+                <a:ea typeface="Calibri" pitchFamily="34" charset="-122"/>
+                <a:cs typeface="Calibri" pitchFamily="34" charset="-120"/>
+              </a:rPr>
+              <a:t>Mainile robotice au aplicatii in medicina, industrie, protezare si chiar explorare spatiala.</a:t>
+            </a:r>
+            <a:endParaRPr lang="en-US" sz="1350" dirty="0"/>
+          </a:p>
+        </p:txBody>
+      </p:sp>
+      <p:sp>
+        <p:nvSpPr>
+          <p:cNvPr id="12" name="Shape 10">
+            <a:extLst>
+              <a:ext uri="{FF2B5EF4-FFF2-40B4-BE49-F238E27FC236}">
+                <a16:creationId xmlns:a16="http://schemas.microsoft.com/office/drawing/2014/main" id="{A47CB9C7-B238-EC1D-B60E-75A47DAB5758}"/>
+              </a:ext>
+            </a:extLst>
+          </p:cNvPr>
+          <p:cNvSpPr/>
+          <p:nvPr/>
+        </p:nvSpPr>
+        <p:spPr>
+          <a:xfrm>
+            <a:off x="5715000" y="3246120"/>
+            <a:ext cx="566928" cy="566928"/>
+          </a:xfrm>
+          <a:prstGeom prst="ellipse">
+            <a:avLst/>
+          </a:prstGeom>
+          <a:solidFill>
+            <a:srgbClr val="0E1B2A"/>
+          </a:solidFill>
+          <a:ln/>
+        </p:spPr>
+        <p:txBody>
+          <a:bodyPr/>
+          <a:lstStyle/>
+          <a:p>
+            <a:endParaRPr lang="en-US"/>
+          </a:p>
+        </p:txBody>
+      </p:sp>
+      <p:sp>
+        <p:nvSpPr>
+          <p:cNvPr id="13" name="Text 11">
+            <a:extLst>
+              <a:ext uri="{FF2B5EF4-FFF2-40B4-BE49-F238E27FC236}">
+                <a16:creationId xmlns:a16="http://schemas.microsoft.com/office/drawing/2014/main" id="{61BA6064-12D5-204A-7E7C-D4433EB85B06}"/>
+              </a:ext>
+            </a:extLst>
+          </p:cNvPr>
+          <p:cNvSpPr/>
+          <p:nvPr/>
+        </p:nvSpPr>
+        <p:spPr>
+          <a:xfrm>
+            <a:off x="5715000" y="3246120"/>
+            <a:ext cx="566928" cy="566928"/>
+          </a:xfrm>
+          <a:prstGeom prst="rect">
+            <a:avLst/>
+          </a:prstGeom>
+          <a:noFill/>
+          <a:ln/>
+        </p:spPr>
+        <p:txBody>
+          <a:bodyPr wrap="square" lIns="0" tIns="0" rIns="0" bIns="0" rtlCol="0" anchor="ctr"/>
+          <a:lstStyle/>
+          <a:p>
+            <a:pPr marL="0" indent="0" algn="ctr">
+              <a:buNone/>
+            </a:pPr>
+            <a:r>
+              <a:rPr lang="en-US" sz="2000" b="1" dirty="0">
+                <a:solidFill>
+                  <a:srgbClr val="BFE9E4"/>
+                </a:solidFill>
+                <a:latin typeface="Georgia" pitchFamily="34" charset="0"/>
+                <a:ea typeface="Georgia" pitchFamily="34" charset="-122"/>
+                <a:cs typeface="Georgia" pitchFamily="34" charset="-120"/>
+              </a:rPr>
+              <a:t>2</a:t>
+            </a:r>
+            <a:endParaRPr lang="en-US" sz="2000" dirty="0"/>
+          </a:p>
+        </p:txBody>
+      </p:sp>
+      <p:sp>
+        <p:nvSpPr>
+          <p:cNvPr id="14" name="Text 12">
+            <a:extLst>
+              <a:ext uri="{FF2B5EF4-FFF2-40B4-BE49-F238E27FC236}">
+                <a16:creationId xmlns:a16="http://schemas.microsoft.com/office/drawing/2014/main" id="{A3268EE2-FF4B-E096-3DED-E2C8DD7B6206}"/>
+              </a:ext>
+            </a:extLst>
+          </p:cNvPr>
+          <p:cNvSpPr/>
+          <p:nvPr/>
+        </p:nvSpPr>
+        <p:spPr>
+          <a:xfrm>
+            <a:off x="6446520" y="3191256"/>
+            <a:ext cx="5029200" cy="457200"/>
+          </a:xfrm>
+          <a:prstGeom prst="rect">
+            <a:avLst/>
+          </a:prstGeom>
+          <a:noFill/>
+          <a:ln/>
+        </p:spPr>
+        <p:txBody>
+          <a:bodyPr wrap="square" lIns="0" tIns="0" rIns="0" bIns="0" rtlCol="0" anchor="ctr"/>
+          <a:lstStyle/>
+          <a:p>
+            <a:pPr marL="0" indent="0">
+              <a:buNone/>
+            </a:pPr>
+            <a:r>
+              <a:rPr lang="en-US" sz="1700" b="1" dirty="0">
+                <a:solidFill>
+                  <a:srgbClr val="0E1B2A"/>
+                </a:solidFill>
+                <a:latin typeface="Calibri" pitchFamily="34" charset="0"/>
+                <a:ea typeface="Calibri" pitchFamily="34" charset="-122"/>
+                <a:cs typeface="Calibri" pitchFamily="34" charset="-120"/>
+              </a:rPr>
+              <a:t>Provocarea reala e in software</a:t>
+            </a:r>
+            <a:endParaRPr lang="en-US" sz="1700" dirty="0"/>
+          </a:p>
+        </p:txBody>
+      </p:sp>
+      <p:sp>
+        <p:nvSpPr>
+          <p:cNvPr id="15" name="Text 13">
+            <a:extLst>
+              <a:ext uri="{FF2B5EF4-FFF2-40B4-BE49-F238E27FC236}">
+                <a16:creationId xmlns:a16="http://schemas.microsoft.com/office/drawing/2014/main" id="{A6EB11B6-AD26-85DF-F913-A4BE19F0EFDE}"/>
+              </a:ext>
+            </a:extLst>
+          </p:cNvPr>
+          <p:cNvSpPr/>
+          <p:nvPr/>
+        </p:nvSpPr>
+        <p:spPr>
+          <a:xfrm>
+            <a:off x="6446520" y="3685032"/>
+            <a:ext cx="5074920" cy="868680"/>
+          </a:xfrm>
+          <a:prstGeom prst="rect">
+            <a:avLst/>
+          </a:prstGeom>
+          <a:noFill/>
+          <a:ln/>
+        </p:spPr>
+        <p:txBody>
+          <a:bodyPr wrap="square" lIns="0" tIns="0" rIns="0" bIns="0" rtlCol="0" anchor="t"/>
+          <a:lstStyle/>
+          <a:p>
+            <a:pPr marL="0" indent="0">
+              <a:lnSpc>
+                <a:spcPct val="108000"/>
+              </a:lnSpc>
+              <a:buNone/>
+            </a:pPr>
+            <a:r>
+              <a:rPr lang="en-US" sz="1350" dirty="0">
+                <a:solidFill>
+                  <a:srgbClr val="5C6B79"/>
+                </a:solidFill>
+                <a:latin typeface="Calibri" pitchFamily="34" charset="0"/>
+                <a:ea typeface="Calibri" pitchFamily="34" charset="-122"/>
+                <a:cs typeface="Calibri" pitchFamily="34" charset="-120"/>
+              </a:rPr>
+              <a:t>Designurile simple se opresc la mecanica; saltul de performanta cere control in timp real si o arhitectura solida.</a:t>
+            </a:r>
+            <a:endParaRPr lang="en-US" sz="1350" dirty="0"/>
+          </a:p>
+        </p:txBody>
+      </p:sp>
+      <p:sp>
+        <p:nvSpPr>
+          <p:cNvPr id="16" name="Shape 14">
+            <a:extLst>
+              <a:ext uri="{FF2B5EF4-FFF2-40B4-BE49-F238E27FC236}">
+                <a16:creationId xmlns:a16="http://schemas.microsoft.com/office/drawing/2014/main" id="{6D6C9EF2-00CE-93A0-3292-0EC6EE1E387A}"/>
+              </a:ext>
+            </a:extLst>
+          </p:cNvPr>
+          <p:cNvSpPr/>
+          <p:nvPr/>
+        </p:nvSpPr>
+        <p:spPr>
+          <a:xfrm>
+            <a:off x="5715000" y="4572000"/>
+            <a:ext cx="566928" cy="566928"/>
+          </a:xfrm>
+          <a:prstGeom prst="ellipse">
+            <a:avLst/>
+          </a:prstGeom>
+          <a:solidFill>
+            <a:srgbClr val="0E1B2A"/>
+          </a:solidFill>
+          <a:ln/>
+        </p:spPr>
+        <p:txBody>
+          <a:bodyPr/>
+          <a:lstStyle/>
+          <a:p>
+            <a:endParaRPr lang="en-US"/>
+          </a:p>
+        </p:txBody>
+      </p:sp>
+      <p:sp>
+        <p:nvSpPr>
+          <p:cNvPr id="17" name="Text 15">
+            <a:extLst>
+              <a:ext uri="{FF2B5EF4-FFF2-40B4-BE49-F238E27FC236}">
+                <a16:creationId xmlns:a16="http://schemas.microsoft.com/office/drawing/2014/main" id="{779E64C1-6B98-9EC5-ED2B-B999CB374754}"/>
+              </a:ext>
+            </a:extLst>
+          </p:cNvPr>
+          <p:cNvSpPr/>
+          <p:nvPr/>
+        </p:nvSpPr>
+        <p:spPr>
+          <a:xfrm>
+            <a:off x="5715000" y="4572000"/>
+            <a:ext cx="566928" cy="566928"/>
+          </a:xfrm>
+          <a:prstGeom prst="rect">
+            <a:avLst/>
+          </a:prstGeom>
+          <a:noFill/>
+          <a:ln/>
+        </p:spPr>
+        <p:txBody>
+          <a:bodyPr wrap="square" lIns="0" tIns="0" rIns="0" bIns="0" rtlCol="0" anchor="ctr"/>
+          <a:lstStyle/>
+          <a:p>
+            <a:pPr marL="0" indent="0" algn="ctr">
+              <a:buNone/>
+            </a:pPr>
+            <a:r>
+              <a:rPr lang="en-US" sz="2000" b="1" dirty="0">
+                <a:solidFill>
+                  <a:srgbClr val="BFE9E4"/>
+                </a:solidFill>
+                <a:latin typeface="Georgia" pitchFamily="34" charset="0"/>
+                <a:ea typeface="Georgia" pitchFamily="34" charset="-122"/>
+                <a:cs typeface="Georgia" pitchFamily="34" charset="-120"/>
+              </a:rPr>
+              <a:t>3</a:t>
+            </a:r>
+            <a:endParaRPr lang="en-US" sz="2000" dirty="0"/>
+          </a:p>
+        </p:txBody>
+      </p:sp>
+      <p:sp>
+        <p:nvSpPr>
+          <p:cNvPr id="18" name="Text 16">
+            <a:extLst>
+              <a:ext uri="{FF2B5EF4-FFF2-40B4-BE49-F238E27FC236}">
+                <a16:creationId xmlns:a16="http://schemas.microsoft.com/office/drawing/2014/main" id="{FAF5752E-6B94-4607-DEF1-D82B1C373DC9}"/>
+              </a:ext>
+            </a:extLst>
+          </p:cNvPr>
+          <p:cNvSpPr/>
+          <p:nvPr/>
+        </p:nvSpPr>
+        <p:spPr>
+          <a:xfrm>
+            <a:off x="6446520" y="4517136"/>
+            <a:ext cx="5029200" cy="457200"/>
+          </a:xfrm>
+          <a:prstGeom prst="rect">
+            <a:avLst/>
+          </a:prstGeom>
+          <a:noFill/>
+          <a:ln/>
+        </p:spPr>
+        <p:txBody>
+          <a:bodyPr wrap="square" lIns="0" tIns="0" rIns="0" bIns="0" rtlCol="0" anchor="ctr"/>
+          <a:lstStyle/>
+          <a:p>
+            <a:pPr marL="0" indent="0">
+              <a:buNone/>
+            </a:pPr>
+            <a:r>
+              <a:rPr lang="en-US" sz="1700" b="1" dirty="0">
+                <a:solidFill>
+                  <a:srgbClr val="0E1B2A"/>
+                </a:solidFill>
+                <a:latin typeface="Calibri" pitchFamily="34" charset="0"/>
+                <a:ea typeface="Calibri" pitchFamily="34" charset="-122"/>
+                <a:cs typeface="Calibri" pitchFamily="34" charset="-120"/>
+              </a:rPr>
+              <a:t>Accesibila si unui student</a:t>
+            </a:r>
+            <a:endParaRPr lang="en-US" sz="1700" dirty="0"/>
+          </a:p>
+        </p:txBody>
+      </p:sp>
+      <p:sp>
+        <p:nvSpPr>
+          <p:cNvPr id="19" name="Text 17">
+            <a:extLst>
+              <a:ext uri="{FF2B5EF4-FFF2-40B4-BE49-F238E27FC236}">
+                <a16:creationId xmlns:a16="http://schemas.microsoft.com/office/drawing/2014/main" id="{139C0893-461B-2F49-DF47-EF6ED4F60B23}"/>
+              </a:ext>
+            </a:extLst>
+          </p:cNvPr>
+          <p:cNvSpPr/>
+          <p:nvPr/>
+        </p:nvSpPr>
+        <p:spPr>
+          <a:xfrm>
+            <a:off x="6446520" y="5010912"/>
+            <a:ext cx="5074920" cy="868680"/>
+          </a:xfrm>
+          <a:prstGeom prst="rect">
+            <a:avLst/>
+          </a:prstGeom>
+          <a:noFill/>
+          <a:ln/>
+        </p:spPr>
+        <p:txBody>
+          <a:bodyPr wrap="square" lIns="0" tIns="0" rIns="0" bIns="0" rtlCol="0" anchor="t"/>
+          <a:lstStyle/>
+          <a:p>
+            <a:pPr marL="0" indent="0">
+              <a:lnSpc>
+                <a:spcPct val="108000"/>
+              </a:lnSpc>
+              <a:buNone/>
+            </a:pPr>
+            <a:r>
+              <a:rPr lang="en-US" sz="1350" dirty="0">
+                <a:solidFill>
+                  <a:srgbClr val="5C6B79"/>
+                </a:solidFill>
+                <a:latin typeface="Calibri" pitchFamily="34" charset="0"/>
+                <a:ea typeface="Calibri" pitchFamily="34" charset="-122"/>
+                <a:cs typeface="Calibri" pitchFamily="34" charset="-120"/>
+              </a:rPr>
+              <a:t>Proiectul demonstreaza ca tema poate fi abordata printr-o integrare atenta hardware–software.</a:t>
+            </a:r>
+            <a:endParaRPr lang="en-US" sz="1350" dirty="0"/>
+          </a:p>
+        </p:txBody>
+      </p:sp>
+      <p:sp>
+        <p:nvSpPr>
+          <p:cNvPr id="20" name="Text 18">
+            <a:extLst>
+              <a:ext uri="{FF2B5EF4-FFF2-40B4-BE49-F238E27FC236}">
+                <a16:creationId xmlns:a16="http://schemas.microsoft.com/office/drawing/2014/main" id="{0709546F-6109-8834-73F9-596F2F78CA2B}"/>
+              </a:ext>
+            </a:extLst>
+          </p:cNvPr>
+          <p:cNvSpPr/>
+          <p:nvPr/>
+        </p:nvSpPr>
+        <p:spPr>
+          <a:xfrm>
+            <a:off x="640080" y="6437376"/>
+            <a:ext cx="7315200" cy="274320"/>
+          </a:xfrm>
+          <a:prstGeom prst="rect">
+            <a:avLst/>
+          </a:prstGeom>
+          <a:noFill/>
+          <a:ln/>
+        </p:spPr>
+        <p:txBody>
+          <a:bodyPr wrap="square" lIns="0" tIns="0" rIns="0" bIns="0" rtlCol="0" anchor="ctr"/>
+          <a:lstStyle/>
+          <a:p>
+            <a:pPr marL="0" indent="0" algn="l">
+              <a:buNone/>
+            </a:pPr>
+            <a:r>
+              <a:rPr lang="en-US" sz="900" dirty="0">
+                <a:solidFill>
+                  <a:srgbClr val="5C6B79"/>
+                </a:solidFill>
+                <a:latin typeface="Calibri" pitchFamily="34" charset="0"/>
+                <a:ea typeface="Calibri" pitchFamily="34" charset="-122"/>
+                <a:cs typeface="Calibri" pitchFamily="34" charset="-120"/>
+              </a:rPr>
+              <a:t>Mana robotica controlata web  ·  Mihai Albu</a:t>
+            </a:r>
+            <a:endParaRPr lang="en-US" sz="900" dirty="0"/>
+          </a:p>
+        </p:txBody>
+      </p:sp>
+      <p:sp>
+        <p:nvSpPr>
+          <p:cNvPr id="21" name="Text 19">
+            <a:extLst>
+              <a:ext uri="{FF2B5EF4-FFF2-40B4-BE49-F238E27FC236}">
+                <a16:creationId xmlns:a16="http://schemas.microsoft.com/office/drawing/2014/main" id="{5E1484DE-1E93-9333-10F2-F1E2FC0BF477}"/>
+              </a:ext>
+            </a:extLst>
+          </p:cNvPr>
+          <p:cNvSpPr/>
+          <p:nvPr/>
+        </p:nvSpPr>
+        <p:spPr>
+          <a:xfrm>
+            <a:off x="11002975" y="6437376"/>
+            <a:ext cx="548640" cy="274320"/>
+          </a:xfrm>
+          <a:prstGeom prst="rect">
+            <a:avLst/>
+          </a:prstGeom>
+          <a:noFill/>
+          <a:ln/>
+        </p:spPr>
+        <p:txBody>
+          <a:bodyPr wrap="square" lIns="0" tIns="0" rIns="0" bIns="0" rtlCol="0" anchor="ctr"/>
+          <a:lstStyle/>
+          <a:p>
+            <a:pPr marL="0" indent="0" algn="r">
+              <a:buNone/>
+            </a:pPr>
+            <a:r>
+              <a:rPr lang="en-US" sz="900" b="1" dirty="0">
+                <a:solidFill>
+                  <a:srgbClr val="0B7E77"/>
+                </a:solidFill>
+                <a:latin typeface="Calibri" pitchFamily="34" charset="0"/>
+                <a:ea typeface="Calibri" pitchFamily="34" charset="-122"/>
+                <a:cs typeface="Calibri" pitchFamily="34" charset="-120"/>
+              </a:rPr>
+              <a:t>02</a:t>
+            </a:r>
+            <a:endParaRPr lang="en-US" sz="900" dirty="0"/>
+          </a:p>
+        </p:txBody>
+      </p:sp>
+    </p:spTree>
+    <p:extLst>
+      <p:ext uri="{BB962C8B-B14F-4D97-AF65-F5344CB8AC3E}">
+        <p14:creationId xmlns:p14="http://schemas.microsoft.com/office/powerpoint/2010/main" val="1880254725"/>
+      </p:ext>
+    </p:extLst>
+  </p:cSld>
+  <p:clrMapOvr>
+    <a:masterClrMapping/>
+  </p:clrMapOvr>
+</p:sld>
+</file>
+
+<file path=ppt/slides/slide4.xml><?xml version="1.0" encoding="utf-8"?>
 <p:sld xmlns:a="http://schemas.openxmlformats.org/drawingml/2006/main" xmlns:r="http://schemas.openxmlformats.org/officeDocument/2006/relationships" xmlns:p="http://schemas.openxmlformats.org/presentationml/2006/main">
   <p:cSld name="Slide 3">
     <p:bg>
@@ -5101,7 +7566,7 @@
 </p:sld>
 </file>
 
-<file path=ppt/slides/slide4.xml><?xml version="1.0" encoding="utf-8"?>
+<file path=ppt/slides/slide5.xml><?xml version="1.0" encoding="utf-8"?>
 <p:sld xmlns:a="http://schemas.openxmlformats.org/drawingml/2006/main" xmlns:r="http://schemas.openxmlformats.org/officeDocument/2006/relationships" xmlns:p="http://schemas.openxmlformats.org/presentationml/2006/main">
   <p:cSld name="Slide 4">
     <p:bg>
@@ -5916,7 +8381,7 @@
 </p:sld>
 </file>
 
-<file path=ppt/slides/slide5.xml><?xml version="1.0" encoding="utf-8"?>
+<file path=ppt/slides/slide6.xml><?xml version="1.0" encoding="utf-8"?>
 <p:sld xmlns:a="http://schemas.openxmlformats.org/drawingml/2006/main" xmlns:r="http://schemas.openxmlformats.org/officeDocument/2006/relationships" xmlns:p="http://schemas.openxmlformats.org/presentationml/2006/main">
   <p:cSld name="Slide 5">
     <p:bg>
@@ -6985,7 +9450,7 @@
 </p:sld>
 </file>
 
-<file path=ppt/slides/slide6.xml><?xml version="1.0" encoding="utf-8"?>
+<file path=ppt/slides/slide7.xml><?xml version="1.0" encoding="utf-8"?>
 <p:sld xmlns:a="http://schemas.openxmlformats.org/drawingml/2006/main" xmlns:r="http://schemas.openxmlformats.org/officeDocument/2006/relationships" xmlns:p="http://schemas.openxmlformats.org/presentationml/2006/main">
   <p:cSld name="Slide 6">
     <p:bg>
@@ -7946,7 +10411,7 @@
 </p:sld>
 </file>
 
-<file path=ppt/slides/slide7.xml><?xml version="1.0" encoding="utf-8"?>
+<file path=ppt/slides/slide8.xml><?xml version="1.0" encoding="utf-8"?>
 <p:sld xmlns:a="http://schemas.openxmlformats.org/drawingml/2006/main" xmlns:r="http://schemas.openxmlformats.org/officeDocument/2006/relationships" xmlns:p="http://schemas.openxmlformats.org/presentationml/2006/main">
   <p:cSld name="Slide 7">
     <p:bg>
@@ -8807,7 +11272,7 @@
 </p:sld>
 </file>
 
-<file path=ppt/slides/slide8.xml><?xml version="1.0" encoding="utf-8"?>
+<file path=ppt/slides/slide9.xml><?xml version="1.0" encoding="utf-8"?>
 <p:sld xmlns:a="http://schemas.openxmlformats.org/drawingml/2006/main" xmlns:r="http://schemas.openxmlformats.org/officeDocument/2006/relationships" xmlns:p="http://schemas.openxmlformats.org/presentationml/2006/main">
   <p:cSld name="Slide 8">
     <p:bg>
@@ -9865,1075 +12330,6 @@
                 <a:cs typeface="Calibri" pitchFamily="34" charset="-120"/>
               </a:rPr>
               <a:t>08</a:t>
-            </a:r>
-            <a:endParaRPr lang="en-US" sz="900" dirty="0"/>
-          </a:p>
-        </p:txBody>
-      </p:sp>
-    </p:spTree>
-  </p:cSld>
-  <p:clrMapOvr>
-    <a:masterClrMapping/>
-  </p:clrMapOvr>
-</p:sld>
-</file>
-
-<file path=ppt/slides/slide9.xml><?xml version="1.0" encoding="utf-8"?>
-<p:sld xmlns:a="http://schemas.openxmlformats.org/drawingml/2006/main" xmlns:r="http://schemas.openxmlformats.org/officeDocument/2006/relationships" xmlns:p="http://schemas.openxmlformats.org/presentationml/2006/main">
-  <p:cSld name="Slide 9">
-    <p:bg>
-      <p:bgPr>
-        <a:solidFill>
-          <a:srgbClr val="FFFFFF"/>
-        </a:solidFill>
-        <a:effectLst/>
-      </p:bgPr>
-    </p:bg>
-    <p:spTree>
-      <p:nvGrpSpPr>
-        <p:cNvPr id="1" name=""/>
-        <p:cNvGrpSpPr/>
-        <p:nvPr/>
-      </p:nvGrpSpPr>
-      <p:grpSpPr>
-        <a:xfrm>
-          <a:off x="0" y="0"/>
-          <a:ext cx="0" cy="0"/>
-          <a:chOff x="0" y="0"/>
-          <a:chExt cx="0" cy="0"/>
-        </a:xfrm>
-      </p:grpSpPr>
-      <p:sp>
-        <p:nvSpPr>
-          <p:cNvPr id="2" name="Text 0"/>
-          <p:cNvSpPr/>
-          <p:nvPr/>
-        </p:nvSpPr>
-        <p:spPr>
-          <a:xfrm>
-            <a:off x="640080" y="475488"/>
-            <a:ext cx="8229600" cy="292608"/>
-          </a:xfrm>
-          <a:prstGeom prst="rect">
-            <a:avLst/>
-          </a:prstGeom>
-          <a:noFill/>
-          <a:ln/>
-        </p:spPr>
-        <p:txBody>
-          <a:bodyPr wrap="square" lIns="0" tIns="0" rIns="0" bIns="0" rtlCol="0" anchor="ctr"/>
-          <a:lstStyle/>
-          <a:p>
-            <a:pPr marL="0" indent="0" algn="l">
-              <a:buNone/>
-            </a:pPr>
-            <a:r>
-              <a:rPr lang="en-US" sz="1200" b="1" kern="0" spc="300" dirty="0">
-                <a:solidFill>
-                  <a:srgbClr val="0B7E77"/>
-                </a:solidFill>
-                <a:latin typeface="Calibri" pitchFamily="34" charset="0"/>
-                <a:ea typeface="Calibri" pitchFamily="34" charset="-122"/>
-                <a:cs typeface="Calibri" pitchFamily="34" charset="-120"/>
-              </a:rPr>
-              <a:t>VALIDARE</a:t>
-            </a:r>
-            <a:endParaRPr lang="en-US" sz="1200" dirty="0"/>
-          </a:p>
-        </p:txBody>
-      </p:sp>
-      <p:sp>
-        <p:nvSpPr>
-          <p:cNvPr id="3" name="Text 1"/>
-          <p:cNvSpPr/>
-          <p:nvPr/>
-        </p:nvSpPr>
-        <p:spPr>
-          <a:xfrm>
-            <a:off x="640080" y="768096"/>
-            <a:ext cx="10972800" cy="868680"/>
-          </a:xfrm>
-          <a:prstGeom prst="rect">
-            <a:avLst/>
-          </a:prstGeom>
-          <a:noFill/>
-          <a:ln/>
-        </p:spPr>
-        <p:txBody>
-          <a:bodyPr wrap="square" lIns="0" tIns="0" rIns="0" bIns="0" rtlCol="0" anchor="t"/>
-          <a:lstStyle/>
-          <a:p>
-            <a:pPr marL="0" indent="0" algn="l">
-              <a:buNone/>
-            </a:pPr>
-            <a:r>
-              <a:rPr lang="en-US" sz="3200" b="1" dirty="0">
-                <a:solidFill>
-                  <a:srgbClr val="0E1B2A"/>
-                </a:solidFill>
-                <a:latin typeface="Georgia" pitchFamily="34" charset="0"/>
-                <a:ea typeface="Georgia" pitchFamily="34" charset="-122"/>
-                <a:cs typeface="Georgia" pitchFamily="34" charset="-120"/>
-              </a:rPr>
-              <a:t>Testare si rezultate</a:t>
-            </a:r>
-            <a:endParaRPr lang="en-US" sz="3200" dirty="0"/>
-          </a:p>
-        </p:txBody>
-      </p:sp>
-      <p:sp>
-        <p:nvSpPr>
-          <p:cNvPr id="4" name="Shape 2"/>
-          <p:cNvSpPr/>
-          <p:nvPr/>
-        </p:nvSpPr>
-        <p:spPr>
-          <a:xfrm>
-            <a:off x="640080" y="1965960"/>
-            <a:ext cx="2487854" cy="1554480"/>
-          </a:xfrm>
-          <a:prstGeom prst="roundRect">
-            <a:avLst>
-              <a:gd name="adj" fmla="val 5294"/>
-            </a:avLst>
-          </a:prstGeom>
-          <a:solidFill>
-            <a:srgbClr val="EEF3F6"/>
-          </a:solidFill>
-          <a:ln/>
-          <a:effectLst>
-            <a:outerShdw blurRad="114300" dist="38100" dir="7200000" algn="bl" rotWithShape="0">
-              <a:srgbClr val="0E1B2A">
-                <a:alpha val="18000"/>
-              </a:srgbClr>
-            </a:outerShdw>
-          </a:effectLst>
-        </p:spPr>
-        <p:txBody>
-          <a:bodyPr/>
-          <a:lstStyle/>
-          <a:p>
-            <a:endParaRPr lang="en-US"/>
-          </a:p>
-        </p:txBody>
-      </p:sp>
-      <p:sp>
-        <p:nvSpPr>
-          <p:cNvPr id="5" name="Shape 3"/>
-          <p:cNvSpPr/>
-          <p:nvPr/>
-        </p:nvSpPr>
-        <p:spPr>
-          <a:xfrm>
-            <a:off x="640080" y="1965960"/>
-            <a:ext cx="2487854" cy="91440"/>
-          </a:xfrm>
-          <a:prstGeom prst="rect">
-            <a:avLst/>
-          </a:prstGeom>
-          <a:solidFill>
-            <a:srgbClr val="0B7E77"/>
-          </a:solidFill>
-          <a:ln/>
-        </p:spPr>
-        <p:txBody>
-          <a:bodyPr/>
-          <a:lstStyle/>
-          <a:p>
-            <a:endParaRPr lang="en-US"/>
-          </a:p>
-        </p:txBody>
-      </p:sp>
-      <p:sp>
-        <p:nvSpPr>
-          <p:cNvPr id="6" name="Text 4"/>
-          <p:cNvSpPr/>
-          <p:nvPr/>
-        </p:nvSpPr>
-        <p:spPr>
-          <a:xfrm>
-            <a:off x="777240" y="2221992"/>
-            <a:ext cx="2213534" cy="640080"/>
-          </a:xfrm>
-          <a:prstGeom prst="rect">
-            <a:avLst/>
-          </a:prstGeom>
-          <a:noFill/>
-          <a:ln/>
-        </p:spPr>
-        <p:txBody>
-          <a:bodyPr wrap="square" lIns="0" tIns="0" rIns="0" bIns="0" rtlCol="0" anchor="ctr"/>
-          <a:lstStyle/>
-          <a:p>
-            <a:pPr marL="0" indent="0" algn="ctr">
-              <a:buNone/>
-            </a:pPr>
-            <a:r>
-              <a:rPr lang="en-US" sz="2900" b="1" dirty="0">
-                <a:solidFill>
-                  <a:srgbClr val="0B7E77"/>
-                </a:solidFill>
-                <a:latin typeface="Georgia" pitchFamily="34" charset="0"/>
-                <a:ea typeface="Georgia" pitchFamily="34" charset="-122"/>
-                <a:cs typeface="Georgia" pitchFamily="34" charset="-120"/>
-              </a:rPr>
-              <a:t>10–25 ms</a:t>
-            </a:r>
-            <a:endParaRPr lang="en-US" sz="2900" dirty="0"/>
-          </a:p>
-        </p:txBody>
-      </p:sp>
-      <p:sp>
-        <p:nvSpPr>
-          <p:cNvPr id="7" name="Text 5"/>
-          <p:cNvSpPr/>
-          <p:nvPr/>
-        </p:nvSpPr>
-        <p:spPr>
-          <a:xfrm>
-            <a:off x="731520" y="2880360"/>
-            <a:ext cx="2304974" cy="548640"/>
-          </a:xfrm>
-          <a:prstGeom prst="rect">
-            <a:avLst/>
-          </a:prstGeom>
-          <a:noFill/>
-          <a:ln/>
-        </p:spPr>
-        <p:txBody>
-          <a:bodyPr wrap="square" lIns="0" tIns="0" rIns="0" bIns="0" rtlCol="0" anchor="t"/>
-          <a:lstStyle/>
-          <a:p>
-            <a:pPr marL="0" indent="0" algn="ctr">
-              <a:lnSpc>
-                <a:spcPct val="100000"/>
-              </a:lnSpc>
-              <a:buNone/>
-            </a:pPr>
-            <a:r>
-              <a:rPr lang="en-US" sz="1150" dirty="0">
-                <a:solidFill>
-                  <a:srgbClr val="5C6B79"/>
-                </a:solidFill>
-                <a:latin typeface="Calibri" pitchFamily="34" charset="0"/>
-                <a:ea typeface="Calibri" pitchFamily="34" charset="-122"/>
-                <a:cs typeface="Calibri" pitchFamily="34" charset="-120"/>
-              </a:rPr>
-              <a:t>latenta /finger</a:t>
-            </a:r>
-            <a:endParaRPr lang="en-US" sz="1150" dirty="0"/>
-          </a:p>
-          <a:p>
-            <a:pPr marL="0" indent="0" algn="ctr">
-              <a:lnSpc>
-                <a:spcPct val="100000"/>
-              </a:lnSpc>
-              <a:buNone/>
-            </a:pPr>
-            <a:r>
-              <a:rPr lang="en-US" sz="1150" dirty="0">
-                <a:solidFill>
-                  <a:srgbClr val="5C6B79"/>
-                </a:solidFill>
-                <a:latin typeface="Calibri" pitchFamily="34" charset="0"/>
-                <a:ea typeface="Calibri" pitchFamily="34" charset="-122"/>
-                <a:cs typeface="Calibri" pitchFamily="34" charset="-120"/>
-              </a:rPr>
-              <a:t>(end-to-end)</a:t>
-            </a:r>
-            <a:endParaRPr lang="en-US" sz="1150" dirty="0"/>
-          </a:p>
-        </p:txBody>
-      </p:sp>
-      <p:sp>
-        <p:nvSpPr>
-          <p:cNvPr id="8" name="Shape 6"/>
-          <p:cNvSpPr/>
-          <p:nvPr/>
-        </p:nvSpPr>
-        <p:spPr>
-          <a:xfrm>
-            <a:off x="3447974" y="1965960"/>
-            <a:ext cx="2487854" cy="1554480"/>
-          </a:xfrm>
-          <a:prstGeom prst="roundRect">
-            <a:avLst>
-              <a:gd name="adj" fmla="val 5294"/>
-            </a:avLst>
-          </a:prstGeom>
-          <a:solidFill>
-            <a:srgbClr val="EEF3F6"/>
-          </a:solidFill>
-          <a:ln/>
-          <a:effectLst>
-            <a:outerShdw blurRad="114300" dist="38100" dir="7200000" algn="bl" rotWithShape="0">
-              <a:srgbClr val="0E1B2A">
-                <a:alpha val="18000"/>
-              </a:srgbClr>
-            </a:outerShdw>
-          </a:effectLst>
-        </p:spPr>
-        <p:txBody>
-          <a:bodyPr/>
-          <a:lstStyle/>
-          <a:p>
-            <a:endParaRPr lang="en-US"/>
-          </a:p>
-        </p:txBody>
-      </p:sp>
-      <p:sp>
-        <p:nvSpPr>
-          <p:cNvPr id="9" name="Shape 7"/>
-          <p:cNvSpPr/>
-          <p:nvPr/>
-        </p:nvSpPr>
-        <p:spPr>
-          <a:xfrm>
-            <a:off x="3447974" y="1965960"/>
-            <a:ext cx="2487854" cy="91440"/>
-          </a:xfrm>
-          <a:prstGeom prst="rect">
-            <a:avLst/>
-          </a:prstGeom>
-          <a:solidFill>
-            <a:srgbClr val="0B7E77"/>
-          </a:solidFill>
-          <a:ln/>
-        </p:spPr>
-        <p:txBody>
-          <a:bodyPr/>
-          <a:lstStyle/>
-          <a:p>
-            <a:endParaRPr lang="en-US"/>
-          </a:p>
-        </p:txBody>
-      </p:sp>
-      <p:sp>
-        <p:nvSpPr>
-          <p:cNvPr id="10" name="Text 8"/>
-          <p:cNvSpPr/>
-          <p:nvPr/>
-        </p:nvSpPr>
-        <p:spPr>
-          <a:xfrm>
-            <a:off x="3585134" y="2221992"/>
-            <a:ext cx="2213534" cy="640080"/>
-          </a:xfrm>
-          <a:prstGeom prst="rect">
-            <a:avLst/>
-          </a:prstGeom>
-          <a:noFill/>
-          <a:ln/>
-        </p:spPr>
-        <p:txBody>
-          <a:bodyPr wrap="square" lIns="0" tIns="0" rIns="0" bIns="0" rtlCol="0" anchor="ctr"/>
-          <a:lstStyle/>
-          <a:p>
-            <a:pPr marL="0" indent="0" algn="ctr">
-              <a:buNone/>
-            </a:pPr>
-            <a:r>
-              <a:rPr lang="en-US" sz="2900" b="1" dirty="0">
-                <a:solidFill>
-                  <a:srgbClr val="0B7E77"/>
-                </a:solidFill>
-                <a:latin typeface="Georgia" pitchFamily="34" charset="0"/>
-                <a:ea typeface="Georgia" pitchFamily="34" charset="-122"/>
-                <a:cs typeface="Georgia" pitchFamily="34" charset="-120"/>
-              </a:rPr>
-              <a:t>20–30 ms</a:t>
-            </a:r>
-            <a:endParaRPr lang="en-US" sz="2900" dirty="0"/>
-          </a:p>
-        </p:txBody>
-      </p:sp>
-      <p:sp>
-        <p:nvSpPr>
-          <p:cNvPr id="11" name="Text 9"/>
-          <p:cNvSpPr/>
-          <p:nvPr/>
-        </p:nvSpPr>
-        <p:spPr>
-          <a:xfrm>
-            <a:off x="3539414" y="2880360"/>
-            <a:ext cx="2304974" cy="548640"/>
-          </a:xfrm>
-          <a:prstGeom prst="rect">
-            <a:avLst/>
-          </a:prstGeom>
-          <a:noFill/>
-          <a:ln/>
-        </p:spPr>
-        <p:txBody>
-          <a:bodyPr wrap="square" lIns="0" tIns="0" rIns="0" bIns="0" rtlCol="0" anchor="t"/>
-          <a:lstStyle/>
-          <a:p>
-            <a:pPr marL="0" indent="0" algn="ctr">
-              <a:lnSpc>
-                <a:spcPct val="100000"/>
-              </a:lnSpc>
-              <a:buNone/>
-            </a:pPr>
-            <a:r>
-              <a:rPr lang="en-US" sz="1150" dirty="0">
-                <a:solidFill>
-                  <a:srgbClr val="5C6B79"/>
-                </a:solidFill>
-                <a:latin typeface="Calibri" pitchFamily="34" charset="0"/>
-                <a:ea typeface="Calibri" pitchFamily="34" charset="-122"/>
-                <a:cs typeface="Calibri" pitchFamily="34" charset="-120"/>
-              </a:rPr>
-              <a:t>latenta /gesture</a:t>
-            </a:r>
-            <a:endParaRPr lang="en-US" sz="1150" dirty="0"/>
-          </a:p>
-          <a:p>
-            <a:pPr marL="0" indent="0" algn="ctr">
-              <a:lnSpc>
-                <a:spcPct val="100000"/>
-              </a:lnSpc>
-              <a:buNone/>
-            </a:pPr>
-            <a:r>
-              <a:rPr lang="en-US" sz="1150" dirty="0">
-                <a:solidFill>
-                  <a:srgbClr val="5C6B79"/>
-                </a:solidFill>
-                <a:latin typeface="Calibri" pitchFamily="34" charset="0"/>
-                <a:ea typeface="Calibri" pitchFamily="34" charset="-122"/>
-                <a:cs typeface="Calibri" pitchFamily="34" charset="-120"/>
-              </a:rPr>
-              <a:t>(cu FSM)</a:t>
-            </a:r>
-            <a:endParaRPr lang="en-US" sz="1150" dirty="0"/>
-          </a:p>
-        </p:txBody>
-      </p:sp>
-      <p:sp>
-        <p:nvSpPr>
-          <p:cNvPr id="12" name="Shape 10"/>
-          <p:cNvSpPr/>
-          <p:nvPr/>
-        </p:nvSpPr>
-        <p:spPr>
-          <a:xfrm>
-            <a:off x="6255868" y="1965960"/>
-            <a:ext cx="2487854" cy="1554480"/>
-          </a:xfrm>
-          <a:prstGeom prst="roundRect">
-            <a:avLst>
-              <a:gd name="adj" fmla="val 5294"/>
-            </a:avLst>
-          </a:prstGeom>
-          <a:solidFill>
-            <a:srgbClr val="EEF3F6"/>
-          </a:solidFill>
-          <a:ln/>
-          <a:effectLst>
-            <a:outerShdw blurRad="114300" dist="38100" dir="7200000" algn="bl" rotWithShape="0">
-              <a:srgbClr val="0E1B2A">
-                <a:alpha val="18000"/>
-              </a:srgbClr>
-            </a:outerShdw>
-          </a:effectLst>
-        </p:spPr>
-        <p:txBody>
-          <a:bodyPr/>
-          <a:lstStyle/>
-          <a:p>
-            <a:endParaRPr lang="en-US"/>
-          </a:p>
-        </p:txBody>
-      </p:sp>
-      <p:sp>
-        <p:nvSpPr>
-          <p:cNvPr id="13" name="Shape 11"/>
-          <p:cNvSpPr/>
-          <p:nvPr/>
-        </p:nvSpPr>
-        <p:spPr>
-          <a:xfrm>
-            <a:off x="6255868" y="1965960"/>
-            <a:ext cx="2487854" cy="91440"/>
-          </a:xfrm>
-          <a:prstGeom prst="rect">
-            <a:avLst/>
-          </a:prstGeom>
-          <a:solidFill>
-            <a:srgbClr val="0E1B2A"/>
-          </a:solidFill>
-          <a:ln/>
-        </p:spPr>
-        <p:txBody>
-          <a:bodyPr/>
-          <a:lstStyle/>
-          <a:p>
-            <a:endParaRPr lang="en-US"/>
-          </a:p>
-        </p:txBody>
-      </p:sp>
-      <p:sp>
-        <p:nvSpPr>
-          <p:cNvPr id="14" name="Text 12"/>
-          <p:cNvSpPr/>
-          <p:nvPr/>
-        </p:nvSpPr>
-        <p:spPr>
-          <a:xfrm>
-            <a:off x="6393028" y="2221992"/>
-            <a:ext cx="2213534" cy="640080"/>
-          </a:xfrm>
-          <a:prstGeom prst="rect">
-            <a:avLst/>
-          </a:prstGeom>
-          <a:noFill/>
-          <a:ln/>
-        </p:spPr>
-        <p:txBody>
-          <a:bodyPr wrap="square" lIns="0" tIns="0" rIns="0" bIns="0" rtlCol="0" anchor="ctr"/>
-          <a:lstStyle/>
-          <a:p>
-            <a:pPr marL="0" indent="0" algn="ctr">
-              <a:buNone/>
-            </a:pPr>
-            <a:r>
-              <a:rPr lang="en-US" sz="2900" b="1" dirty="0">
-                <a:solidFill>
-                  <a:srgbClr val="0E1B2A"/>
-                </a:solidFill>
-                <a:latin typeface="Georgia" pitchFamily="34" charset="0"/>
-                <a:ea typeface="Georgia" pitchFamily="34" charset="-122"/>
-                <a:cs typeface="Georgia" pitchFamily="34" charset="-120"/>
-              </a:rPr>
-              <a:t>&lt; 50 ms</a:t>
-            </a:r>
-            <a:endParaRPr lang="en-US" sz="2900" dirty="0"/>
-          </a:p>
-        </p:txBody>
-      </p:sp>
-      <p:sp>
-        <p:nvSpPr>
-          <p:cNvPr id="15" name="Text 13"/>
-          <p:cNvSpPr/>
-          <p:nvPr/>
-        </p:nvSpPr>
-        <p:spPr>
-          <a:xfrm>
-            <a:off x="6347308" y="2880360"/>
-            <a:ext cx="2304974" cy="548640"/>
-          </a:xfrm>
-          <a:prstGeom prst="rect">
-            <a:avLst/>
-          </a:prstGeom>
-          <a:noFill/>
-          <a:ln/>
-        </p:spPr>
-        <p:txBody>
-          <a:bodyPr wrap="square" lIns="0" tIns="0" rIns="0" bIns="0" rtlCol="0" anchor="t"/>
-          <a:lstStyle/>
-          <a:p>
-            <a:pPr marL="0" indent="0" algn="ctr">
-              <a:lnSpc>
-                <a:spcPct val="100000"/>
-              </a:lnSpc>
-              <a:buNone/>
-            </a:pPr>
-            <a:r>
-              <a:rPr lang="en-US" sz="1150" dirty="0">
-                <a:solidFill>
-                  <a:srgbClr val="5C6B79"/>
-                </a:solidFill>
-                <a:latin typeface="Calibri" pitchFamily="34" charset="0"/>
-                <a:ea typeface="Calibri" pitchFamily="34" charset="-122"/>
-                <a:cs typeface="Calibri" pitchFamily="34" charset="-120"/>
-              </a:rPr>
-              <a:t>prag de perceptie</a:t>
-            </a:r>
-            <a:endParaRPr lang="en-US" sz="1150" dirty="0"/>
-          </a:p>
-          <a:p>
-            <a:pPr marL="0" indent="0" algn="ctr">
-              <a:lnSpc>
-                <a:spcPct val="100000"/>
-              </a:lnSpc>
-              <a:buNone/>
-            </a:pPr>
-            <a:r>
-              <a:rPr lang="en-US" sz="1150" dirty="0">
-                <a:solidFill>
-                  <a:srgbClr val="5C6B79"/>
-                </a:solidFill>
-                <a:latin typeface="Calibri" pitchFamily="34" charset="0"/>
-                <a:ea typeface="Calibri" pitchFamily="34" charset="-122"/>
-                <a:cs typeface="Calibri" pitchFamily="34" charset="-120"/>
-              </a:rPr>
-              <a:t>vizuala umana</a:t>
-            </a:r>
-            <a:endParaRPr lang="en-US" sz="1150" dirty="0"/>
-          </a:p>
-        </p:txBody>
-      </p:sp>
-      <p:sp>
-        <p:nvSpPr>
-          <p:cNvPr id="16" name="Shape 14"/>
-          <p:cNvSpPr/>
-          <p:nvPr/>
-        </p:nvSpPr>
-        <p:spPr>
-          <a:xfrm>
-            <a:off x="9063761" y="1965960"/>
-            <a:ext cx="2487854" cy="1554480"/>
-          </a:xfrm>
-          <a:prstGeom prst="roundRect">
-            <a:avLst>
-              <a:gd name="adj" fmla="val 5294"/>
-            </a:avLst>
-          </a:prstGeom>
-          <a:solidFill>
-            <a:srgbClr val="EEF3F6"/>
-          </a:solidFill>
-          <a:ln/>
-          <a:effectLst>
-            <a:outerShdw blurRad="114300" dist="38100" dir="7200000" algn="bl" rotWithShape="0">
-              <a:srgbClr val="0E1B2A">
-                <a:alpha val="18000"/>
-              </a:srgbClr>
-            </a:outerShdw>
-          </a:effectLst>
-        </p:spPr>
-        <p:txBody>
-          <a:bodyPr/>
-          <a:lstStyle/>
-          <a:p>
-            <a:endParaRPr lang="en-US"/>
-          </a:p>
-        </p:txBody>
-      </p:sp>
-      <p:sp>
-        <p:nvSpPr>
-          <p:cNvPr id="17" name="Shape 15"/>
-          <p:cNvSpPr/>
-          <p:nvPr/>
-        </p:nvSpPr>
-        <p:spPr>
-          <a:xfrm>
-            <a:off x="9063761" y="1965960"/>
-            <a:ext cx="2487854" cy="91440"/>
-          </a:xfrm>
-          <a:prstGeom prst="rect">
-            <a:avLst/>
-          </a:prstGeom>
-          <a:solidFill>
-            <a:srgbClr val="E87A2C"/>
-          </a:solidFill>
-          <a:ln/>
-        </p:spPr>
-        <p:txBody>
-          <a:bodyPr/>
-          <a:lstStyle/>
-          <a:p>
-            <a:endParaRPr lang="en-US"/>
-          </a:p>
-        </p:txBody>
-      </p:sp>
-      <p:sp>
-        <p:nvSpPr>
-          <p:cNvPr id="18" name="Text 16"/>
-          <p:cNvSpPr/>
-          <p:nvPr/>
-        </p:nvSpPr>
-        <p:spPr>
-          <a:xfrm>
-            <a:off x="9200921" y="2221992"/>
-            <a:ext cx="2213534" cy="640080"/>
-          </a:xfrm>
-          <a:prstGeom prst="rect">
-            <a:avLst/>
-          </a:prstGeom>
-          <a:noFill/>
-          <a:ln/>
-        </p:spPr>
-        <p:txBody>
-          <a:bodyPr wrap="square" lIns="0" tIns="0" rIns="0" bIns="0" rtlCol="0" anchor="ctr"/>
-          <a:lstStyle/>
-          <a:p>
-            <a:pPr marL="0" indent="0" algn="ctr">
-              <a:buNone/>
-            </a:pPr>
-            <a:r>
-              <a:rPr lang="en-US" sz="2900" b="1" dirty="0">
-                <a:solidFill>
-                  <a:srgbClr val="E87A2C"/>
-                </a:solidFill>
-                <a:latin typeface="Georgia" pitchFamily="34" charset="0"/>
-                <a:ea typeface="Georgia" pitchFamily="34" charset="-122"/>
-                <a:cs typeface="Georgia" pitchFamily="34" charset="-120"/>
-              </a:rPr>
-              <a:t>~10 m</a:t>
-            </a:r>
-            <a:endParaRPr lang="en-US" sz="2900" dirty="0"/>
-          </a:p>
-        </p:txBody>
-      </p:sp>
-      <p:sp>
-        <p:nvSpPr>
-          <p:cNvPr id="19" name="Text 17"/>
-          <p:cNvSpPr/>
-          <p:nvPr/>
-        </p:nvSpPr>
-        <p:spPr>
-          <a:xfrm>
-            <a:off x="9155201" y="2880360"/>
-            <a:ext cx="2304974" cy="548640"/>
-          </a:xfrm>
-          <a:prstGeom prst="rect">
-            <a:avLst/>
-          </a:prstGeom>
-          <a:noFill/>
-          <a:ln/>
-        </p:spPr>
-        <p:txBody>
-          <a:bodyPr wrap="square" lIns="0" tIns="0" rIns="0" bIns="0" rtlCol="0" anchor="t"/>
-          <a:lstStyle/>
-          <a:p>
-            <a:pPr marL="0" indent="0" algn="ctr">
-              <a:lnSpc>
-                <a:spcPct val="100000"/>
-              </a:lnSpc>
-              <a:buNone/>
-            </a:pPr>
-            <a:r>
-              <a:rPr lang="en-US" sz="1150" dirty="0">
-                <a:solidFill>
-                  <a:srgbClr val="5C6B79"/>
-                </a:solidFill>
-                <a:latin typeface="Calibri" pitchFamily="34" charset="0"/>
-                <a:ea typeface="Calibri" pitchFamily="34" charset="-122"/>
-                <a:cs typeface="Calibri" pitchFamily="34" charset="-120"/>
-              </a:rPr>
-              <a:t>raza Wi-Fi</a:t>
-            </a:r>
-            <a:endParaRPr lang="en-US" sz="1150" dirty="0"/>
-          </a:p>
-          <a:p>
-            <a:pPr marL="0" indent="0" algn="ctr">
-              <a:lnSpc>
-                <a:spcPct val="100000"/>
-              </a:lnSpc>
-              <a:buNone/>
-            </a:pPr>
-            <a:r>
-              <a:rPr lang="en-US" sz="1150" dirty="0">
-                <a:solidFill>
-                  <a:srgbClr val="5C6B79"/>
-                </a:solidFill>
-                <a:latin typeface="Calibri" pitchFamily="34" charset="0"/>
-                <a:ea typeface="Calibri" pitchFamily="34" charset="-122"/>
-                <a:cs typeface="Calibri" pitchFamily="34" charset="-120"/>
-              </a:rPr>
-              <a:t>in interior</a:t>
-            </a:r>
-            <a:endParaRPr lang="en-US" sz="1150" dirty="0"/>
-          </a:p>
-        </p:txBody>
-      </p:sp>
-      <p:sp>
-        <p:nvSpPr>
-          <p:cNvPr id="20" name="Text 18"/>
-          <p:cNvSpPr/>
-          <p:nvPr/>
-        </p:nvSpPr>
-        <p:spPr>
-          <a:xfrm>
-            <a:off x="640080" y="3794760"/>
-            <a:ext cx="5760720" cy="320040"/>
-          </a:xfrm>
-          <a:prstGeom prst="rect">
-            <a:avLst/>
-          </a:prstGeom>
-          <a:noFill/>
-          <a:ln/>
-        </p:spPr>
-        <p:txBody>
-          <a:bodyPr wrap="square" lIns="0" tIns="0" rIns="0" bIns="0" rtlCol="0" anchor="ctr"/>
-          <a:lstStyle/>
-          <a:p>
-            <a:pPr marL="0" indent="0">
-              <a:buNone/>
-            </a:pPr>
-            <a:r>
-              <a:rPr lang="en-US" sz="1250" b="1" dirty="0">
-                <a:solidFill>
-                  <a:srgbClr val="0E1B2A"/>
-                </a:solidFill>
-                <a:latin typeface="Calibri" pitchFamily="34" charset="0"/>
-                <a:ea typeface="Calibri" pitchFamily="34" charset="-122"/>
-                <a:cs typeface="Calibri" pitchFamily="34" charset="-120"/>
-              </a:rPr>
-              <a:t>Latenta end-to-end vs. prag de perceptie (ms)</a:t>
-            </a:r>
-            <a:endParaRPr lang="en-US" sz="1250" dirty="0"/>
-          </a:p>
-        </p:txBody>
-      </p:sp>
-      <p:graphicFrame>
-        <p:nvGraphicFramePr>
-          <p:cNvPr id="21" name="Chart 0"/>
-          <p:cNvGraphicFramePr/>
-          <p:nvPr/>
-        </p:nvGraphicFramePr>
-        <p:xfrm>
-          <a:off x="640080" y="4114800"/>
-          <a:ext cx="5669280" cy="2148840"/>
-        </p:xfrm>
-        <a:graphic>
-          <a:graphicData uri="http://schemas.openxmlformats.org/drawingml/2006/chart">
-            <c:chart xmlns:c="http://schemas.openxmlformats.org/drawingml/2006/chart" xmlns:r="http://schemas.openxmlformats.org/officeDocument/2006/relationships" r:id="rId3"/>
-          </a:graphicData>
-        </a:graphic>
-      </p:graphicFrame>
-      <p:sp>
-        <p:nvSpPr>
-          <p:cNvPr id="22" name="Shape 19"/>
-          <p:cNvSpPr/>
-          <p:nvPr/>
-        </p:nvSpPr>
-        <p:spPr>
-          <a:xfrm>
-            <a:off x="6583680" y="3794760"/>
-            <a:ext cx="4967935" cy="2468880"/>
-          </a:xfrm>
-          <a:prstGeom prst="roundRect">
-            <a:avLst>
-              <a:gd name="adj" fmla="val 3333"/>
-            </a:avLst>
-          </a:prstGeom>
-          <a:solidFill>
-            <a:srgbClr val="E2ECEC"/>
-          </a:solidFill>
-          <a:ln/>
-          <a:effectLst>
-            <a:outerShdw blurRad="114300" dist="38100" dir="7200000" algn="bl" rotWithShape="0">
-              <a:srgbClr val="0E1B2A">
-                <a:alpha val="18000"/>
-              </a:srgbClr>
-            </a:outerShdw>
-          </a:effectLst>
-        </p:spPr>
-        <p:txBody>
-          <a:bodyPr/>
-          <a:lstStyle/>
-          <a:p>
-            <a:endParaRPr lang="en-US"/>
-          </a:p>
-        </p:txBody>
-      </p:sp>
-      <p:sp>
-        <p:nvSpPr>
-          <p:cNvPr id="23" name="Text 20"/>
-          <p:cNvSpPr/>
-          <p:nvPr/>
-        </p:nvSpPr>
-        <p:spPr>
-          <a:xfrm>
-            <a:off x="6903720" y="3977640"/>
-            <a:ext cx="4327855" cy="411480"/>
-          </a:xfrm>
-          <a:prstGeom prst="rect">
-            <a:avLst/>
-          </a:prstGeom>
-          <a:noFill/>
-          <a:ln/>
-        </p:spPr>
-        <p:txBody>
-          <a:bodyPr wrap="square" lIns="0" tIns="0" rIns="0" bIns="0" rtlCol="0" anchor="ctr"/>
-          <a:lstStyle/>
-          <a:p>
-            <a:pPr marL="0" indent="0">
-              <a:buNone/>
-            </a:pPr>
-            <a:r>
-              <a:rPr lang="en-US" sz="1550" b="1" dirty="0">
-                <a:solidFill>
-                  <a:srgbClr val="0B7E77"/>
-                </a:solidFill>
-                <a:latin typeface="Calibri" pitchFamily="34" charset="0"/>
-                <a:ea typeface="Calibri" pitchFamily="34" charset="-122"/>
-                <a:cs typeface="Calibri" pitchFamily="34" charset="-120"/>
-              </a:rPr>
-              <a:t>Robustete sub stres</a:t>
-            </a:r>
-            <a:endParaRPr lang="en-US" sz="1550" dirty="0"/>
-          </a:p>
-        </p:txBody>
-      </p:sp>
-      <p:sp>
-        <p:nvSpPr>
-          <p:cNvPr id="24" name="Text 21"/>
-          <p:cNvSpPr/>
-          <p:nvPr/>
-        </p:nvSpPr>
-        <p:spPr>
-          <a:xfrm>
-            <a:off x="6903720" y="4480560"/>
-            <a:ext cx="4327855" cy="1691640"/>
-          </a:xfrm>
-          <a:prstGeom prst="rect">
-            <a:avLst/>
-          </a:prstGeom>
-          <a:noFill/>
-          <a:ln/>
-        </p:spPr>
-        <p:txBody>
-          <a:bodyPr wrap="square" lIns="0" tIns="0" rIns="0" bIns="0" rtlCol="0" anchor="ctr"/>
-          <a:lstStyle/>
-          <a:p>
-            <a:pPr marL="342900" indent="-342900">
-              <a:lnSpc>
-                <a:spcPct val="108000"/>
-              </a:lnSpc>
-              <a:spcAft>
-                <a:spcPts val="900"/>
-              </a:spcAft>
-              <a:buSzPct val="100000"/>
-              <a:buChar char="•"/>
-            </a:pPr>
-            <a:r>
-              <a:rPr lang="en-US" sz="1250" dirty="0">
-                <a:solidFill>
-                  <a:srgbClr val="1B2A38"/>
-                </a:solidFill>
-                <a:latin typeface="Calibri" pitchFamily="34" charset="0"/>
-                <a:ea typeface="Calibri" pitchFamily="34" charset="-122"/>
-                <a:cs typeface="Calibri" pitchFamily="34" charset="-120"/>
-              </a:rPr>
-              <a:t>Protectie la suprasarcina: coada plina → HTTP 500 «Queue full», fara blocaje sau memory leak.</a:t>
-            </a:r>
-            <a:endParaRPr lang="en-US" sz="1250" dirty="0"/>
-          </a:p>
-          <a:p>
-            <a:pPr marL="342900" indent="-342900">
-              <a:lnSpc>
-                <a:spcPct val="108000"/>
-              </a:lnSpc>
-              <a:spcAft>
-                <a:spcPts val="900"/>
-              </a:spcAft>
-              <a:buSzPct val="100000"/>
-              <a:buChar char="•"/>
-            </a:pPr>
-            <a:r>
-              <a:rPr lang="en-US" sz="1250" dirty="0">
-                <a:solidFill>
-                  <a:srgbClr val="1B2A38"/>
-                </a:solidFill>
-                <a:latin typeface="Calibri" pitchFamily="34" charset="0"/>
-                <a:ea typeface="Calibri" pitchFamily="34" charset="-122"/>
-                <a:cs typeface="Calibri" pitchFamily="34" charset="-120"/>
-              </a:rPr>
-              <a:t>Stabilitate Wi-Fi pe sesiuni de 15–30 min, fara deconectari (WiFi.setSleep(false)).</a:t>
-            </a:r>
-            <a:endParaRPr lang="en-US" sz="1250" dirty="0"/>
-          </a:p>
-          <a:p>
-            <a:pPr marL="342900" indent="-342900">
-              <a:lnSpc>
-                <a:spcPct val="108000"/>
-              </a:lnSpc>
-              <a:spcAft>
-                <a:spcPts val="900"/>
-              </a:spcAft>
-              <a:buSzPct val="100000"/>
-              <a:buChar char="•"/>
-            </a:pPr>
-            <a:r>
-              <a:rPr lang="en-US" sz="1250" dirty="0">
-                <a:solidFill>
-                  <a:srgbClr val="1B2A38"/>
-                </a:solidFill>
-                <a:latin typeface="Calibri" pitchFamily="34" charset="0"/>
-                <a:ea typeface="Calibri" pitchFamily="34" charset="-122"/>
-                <a:cs typeface="Calibri" pitchFamily="34" charset="-120"/>
-              </a:rPr>
-              <a:t>Toleranta la defecte: comutare automata in mod Access Point la pierderea retelei.</a:t>
-            </a:r>
-            <a:endParaRPr lang="en-US" sz="1250" dirty="0"/>
-          </a:p>
-        </p:txBody>
-      </p:sp>
-      <p:sp>
-        <p:nvSpPr>
-          <p:cNvPr id="25" name="Text 22"/>
-          <p:cNvSpPr/>
-          <p:nvPr/>
-        </p:nvSpPr>
-        <p:spPr>
-          <a:xfrm>
-            <a:off x="640080" y="6437376"/>
-            <a:ext cx="7315200" cy="274320"/>
-          </a:xfrm>
-          <a:prstGeom prst="rect">
-            <a:avLst/>
-          </a:prstGeom>
-          <a:noFill/>
-          <a:ln/>
-        </p:spPr>
-        <p:txBody>
-          <a:bodyPr wrap="square" lIns="0" tIns="0" rIns="0" bIns="0" rtlCol="0" anchor="ctr"/>
-          <a:lstStyle/>
-          <a:p>
-            <a:pPr marL="0" indent="0" algn="l">
-              <a:buNone/>
-            </a:pPr>
-            <a:r>
-              <a:rPr lang="en-US" sz="900" dirty="0">
-                <a:solidFill>
-                  <a:srgbClr val="5C6B79"/>
-                </a:solidFill>
-                <a:latin typeface="Calibri" pitchFamily="34" charset="0"/>
-                <a:ea typeface="Calibri" pitchFamily="34" charset="-122"/>
-                <a:cs typeface="Calibri" pitchFamily="34" charset="-120"/>
-              </a:rPr>
-              <a:t>Mana robotica controlata web  ·  Mihai Albu</a:t>
-            </a:r>
-            <a:endParaRPr lang="en-US" sz="900" dirty="0"/>
-          </a:p>
-        </p:txBody>
-      </p:sp>
-      <p:sp>
-        <p:nvSpPr>
-          <p:cNvPr id="26" name="Text 23"/>
-          <p:cNvSpPr/>
-          <p:nvPr/>
-        </p:nvSpPr>
-        <p:spPr>
-          <a:xfrm>
-            <a:off x="11002975" y="6437376"/>
-            <a:ext cx="548640" cy="274320"/>
-          </a:xfrm>
-          <a:prstGeom prst="rect">
-            <a:avLst/>
-          </a:prstGeom>
-          <a:noFill/>
-          <a:ln/>
-        </p:spPr>
-        <p:txBody>
-          <a:bodyPr wrap="square" lIns="0" tIns="0" rIns="0" bIns="0" rtlCol="0" anchor="ctr"/>
-          <a:lstStyle/>
-          <a:p>
-            <a:pPr marL="0" indent="0" algn="r">
-              <a:buNone/>
-            </a:pPr>
-            <a:r>
-              <a:rPr lang="en-US" sz="900" b="1" dirty="0">
-                <a:solidFill>
-                  <a:srgbClr val="0B7E77"/>
-                </a:solidFill>
-                <a:latin typeface="Calibri" pitchFamily="34" charset="0"/>
-                <a:ea typeface="Calibri" pitchFamily="34" charset="-122"/>
-                <a:cs typeface="Calibri" pitchFamily="34" charset="-120"/>
-              </a:rPr>
-              <a:t>09</a:t>
             </a:r>
             <a:endParaRPr lang="en-US" sz="900" dirty="0"/>
           </a:p>
